--- a/ADG/05장/5장_PhysicalStandby생성_RMAN_DUPLICATE.pptx
+++ b/ADG/05장/5장_PhysicalStandby생성_RMAN_DUPLICATE.pptx
@@ -6299,7 +6299,26 @@
                 </a:solidFill>
                 <a:latin typeface="맑은 고딕"/>
               </a:rPr>
-              <a:t>•  `db_name=chicago` — Primary와 같아야 한다</a:t>
+              <a:t>•  </a:t>
+            </a:r>
+            <a:r>
+              <a:rPr sz="1700" b="0">
+                <a:solidFill>
+                  <a:srgbClr val="222222"/>
+                </a:solidFill>
+                <a:latin typeface="Consolas"/>
+                <a:cs typeface="Consolas"/>
+              </a:rPr>
+              <a:t>db_name=chicago</a:t>
+            </a:r>
+            <a:r>
+              <a:rPr sz="1700" b="0">
+                <a:solidFill>
+                  <a:srgbClr val="222222"/>
+                </a:solidFill>
+                <a:latin typeface="맑은 고딕"/>
+              </a:rPr>
+              <a:t> — Primary와 같아야 한다</a:t>
             </a:r>
           </a:p>
           <a:p>
@@ -6315,7 +6334,26 @@
                 </a:solidFill>
                 <a:latin typeface="맑은 고딕"/>
               </a:rPr>
-              <a:t>•  `enable_pluggable_database=true` — CDB이므로</a:t>
+              <a:t>•  </a:t>
+            </a:r>
+            <a:r>
+              <a:rPr sz="1700" b="0">
+                <a:solidFill>
+                  <a:srgbClr val="222222"/>
+                </a:solidFill>
+                <a:latin typeface="Consolas"/>
+                <a:cs typeface="Consolas"/>
+              </a:rPr>
+              <a:t>enable_pluggable_database=true</a:t>
+            </a:r>
+            <a:r>
+              <a:rPr sz="1700" b="0">
+                <a:solidFill>
+                  <a:srgbClr val="222222"/>
+                </a:solidFill>
+                <a:latin typeface="맑은 고딕"/>
+              </a:rPr>
+              <a:t> — CDB이므로</a:t>
             </a:r>
           </a:p>
           <a:p>
@@ -6590,7 +6628,25 @@
                 </a:solidFill>
                 <a:latin typeface="맑은 고딕"/>
               </a:rPr>
-              <a:t>•  **DB_NAME = chicago** ← 이것만 다르다</a:t>
+              <a:t>•  </a:t>
+            </a:r>
+            <a:r>
+              <a:rPr sz="1700" b="1">
+                <a:solidFill>
+                  <a:srgbClr val="222222"/>
+                </a:solidFill>
+                <a:latin typeface="맑은 고딕"/>
+              </a:rPr>
+              <a:t>DB_NAME = chicago</a:t>
+            </a:r>
+            <a:r>
+              <a:rPr sz="1700" b="0">
+                <a:solidFill>
+                  <a:srgbClr val="222222"/>
+                </a:solidFill>
+                <a:latin typeface="맑은 고딕"/>
+              </a:rPr>
+              <a:t> ← 이것만 다르다</a:t>
             </a:r>
           </a:p>
         </p:txBody>
@@ -6769,7 +6825,17 @@
                 </a:solidFill>
                 <a:latin typeface="맑은 고딕"/>
               </a:rPr>
-              <a:t>•  `STARTUP NOMOUNT PFILE='.../initboston.ora'`</a:t>
+              <a:t>•  </a:t>
+            </a:r>
+            <a:r>
+              <a:rPr sz="1700" b="0">
+                <a:solidFill>
+                  <a:srgbClr val="222222"/>
+                </a:solidFill>
+                <a:latin typeface="Consolas"/>
+                <a:cs typeface="Consolas"/>
+              </a:rPr>
+              <a:t>STARTUP NOMOUNT PFILE='.../initboston.ora'</a:t>
             </a:r>
           </a:p>
           <a:p>
@@ -7028,7 +7094,26 @@
                 </a:solidFill>
                 <a:latin typeface="맑은 고딕"/>
               </a:rPr>
-              <a:t>•  있으면 → `status UNKNOWN`으로 접속을 넘겨준다</a:t>
+              <a:t>•  있으면 → </a:t>
+            </a:r>
+            <a:r>
+              <a:rPr sz="1700" b="0">
+                <a:solidFill>
+                  <a:srgbClr val="222222"/>
+                </a:solidFill>
+                <a:latin typeface="Consolas"/>
+                <a:cs typeface="Consolas"/>
+              </a:rPr>
+              <a:t>status UNKNOWN</a:t>
+            </a:r>
+            <a:r>
+              <a:rPr sz="1700" b="0">
+                <a:solidFill>
+                  <a:srgbClr val="222222"/>
+                </a:solidFill>
+                <a:latin typeface="맑은 고딕"/>
+              </a:rPr>
+              <a:t>으로 접속을 넘겨준다</a:t>
             </a:r>
           </a:p>
           <a:p>
@@ -7044,7 +7129,26 @@
                 </a:solidFill>
                 <a:latin typeface="맑은 고딕"/>
               </a:rPr>
-              <a:t>•  Primary에서 `sqlplus "sys/oracle@boston as sysdba"`가 되어야 시작할 수 있다</a:t>
+              <a:t>•  Primary에서 </a:t>
+            </a:r>
+            <a:r>
+              <a:rPr sz="1700" b="0">
+                <a:solidFill>
+                  <a:srgbClr val="222222"/>
+                </a:solidFill>
+                <a:latin typeface="Consolas"/>
+                <a:cs typeface="Consolas"/>
+              </a:rPr>
+              <a:t>sqlplus "sys/oracle@boston as sysdba"</a:t>
+            </a:r>
+            <a:r>
+              <a:rPr sz="1700" b="0">
+                <a:solidFill>
+                  <a:srgbClr val="222222"/>
+                </a:solidFill>
+                <a:latin typeface="맑은 고딕"/>
+              </a:rPr>
+              <a:t>가 되어야 시작할 수 있다</a:t>
             </a:r>
           </a:p>
         </p:txBody>
@@ -7478,7 +7582,26 @@
                 </a:solidFill>
                 <a:latin typeface="맑은 고딕"/>
               </a:rPr>
-              <a:t>•  `for standby` — DBID 유지, standby 컨트롤 파일</a:t>
+              <a:t>•  </a:t>
+            </a:r>
+            <a:r>
+              <a:rPr sz="1700" b="0">
+                <a:solidFill>
+                  <a:srgbClr val="222222"/>
+                </a:solidFill>
+                <a:latin typeface="Consolas"/>
+                <a:cs typeface="Consolas"/>
+              </a:rPr>
+              <a:t>for standby</a:t>
+            </a:r>
+            <a:r>
+              <a:rPr sz="1700" b="0">
+                <a:solidFill>
+                  <a:srgbClr val="222222"/>
+                </a:solidFill>
+                <a:latin typeface="맑은 고딕"/>
+              </a:rPr>
+              <a:t> — DBID 유지, standby 컨트롤 파일</a:t>
             </a:r>
           </a:p>
           <a:p>
@@ -7494,7 +7617,26 @@
                 </a:solidFill>
                 <a:latin typeface="맑은 고딕"/>
               </a:rPr>
-              <a:t>•  `from active database` — 운영 중 Primary에서 직접</a:t>
+              <a:t>•  </a:t>
+            </a:r>
+            <a:r>
+              <a:rPr sz="1700" b="0">
+                <a:solidFill>
+                  <a:srgbClr val="222222"/>
+                </a:solidFill>
+                <a:latin typeface="Consolas"/>
+                <a:cs typeface="Consolas"/>
+              </a:rPr>
+              <a:t>from active database</a:t>
+            </a:r>
+            <a:r>
+              <a:rPr sz="1700" b="0">
+                <a:solidFill>
+                  <a:srgbClr val="222222"/>
+                </a:solidFill>
+                <a:latin typeface="맑은 고딕"/>
+              </a:rPr>
+              <a:t> — 운영 중 Primary에서 직접</a:t>
             </a:r>
           </a:p>
           <a:p>
@@ -7510,7 +7652,26 @@
                 </a:solidFill>
                 <a:latin typeface="맑은 고딕"/>
               </a:rPr>
-              <a:t>•  `DORECOVER` — 복제 후 그 시점까지 복구</a:t>
+              <a:t>•  </a:t>
+            </a:r>
+            <a:r>
+              <a:rPr sz="1700" b="0">
+                <a:solidFill>
+                  <a:srgbClr val="222222"/>
+                </a:solidFill>
+                <a:latin typeface="Consolas"/>
+                <a:cs typeface="Consolas"/>
+              </a:rPr>
+              <a:t>DORECOVER</a:t>
+            </a:r>
+            <a:r>
+              <a:rPr sz="1700" b="0">
+                <a:solidFill>
+                  <a:srgbClr val="222222"/>
+                </a:solidFill>
+                <a:latin typeface="맑은 고딕"/>
+              </a:rPr>
+              <a:t> — 복제 후 그 시점까지 복구</a:t>
             </a:r>
           </a:p>
           <a:p>
@@ -7526,7 +7687,26 @@
                 </a:solidFill>
                 <a:latin typeface="맑은 고딕"/>
               </a:rPr>
-              <a:t>•  `spfile` — Primary spfile을 고쳐 Standby용으로</a:t>
+              <a:t>•  </a:t>
+            </a:r>
+            <a:r>
+              <a:rPr sz="1700" b="0">
+                <a:solidFill>
+                  <a:srgbClr val="222222"/>
+                </a:solidFill>
+                <a:latin typeface="Consolas"/>
+                <a:cs typeface="Consolas"/>
+              </a:rPr>
+              <a:t>spfile</a:t>
+            </a:r>
+            <a:r>
+              <a:rPr sz="1700" b="0">
+                <a:solidFill>
+                  <a:srgbClr val="222222"/>
+                </a:solidFill>
+                <a:latin typeface="맑은 고딕"/>
+              </a:rPr>
+              <a:t> — Primary spfile을 고쳐 Standby용으로</a:t>
             </a:r>
           </a:p>
           <a:p>
@@ -7542,7 +7722,26 @@
                 </a:solidFill>
                 <a:latin typeface="맑은 고딕"/>
               </a:rPr>
-              <a:t>•  `nofilenamecheck` — 이름 충돌 검사 생략</a:t>
+              <a:t>•  </a:t>
+            </a:r>
+            <a:r>
+              <a:rPr sz="1700" b="0">
+                <a:solidFill>
+                  <a:srgbClr val="222222"/>
+                </a:solidFill>
+                <a:latin typeface="Consolas"/>
+                <a:cs typeface="Consolas"/>
+              </a:rPr>
+              <a:t>nofilenamecheck</a:t>
+            </a:r>
+            <a:r>
+              <a:rPr sz="1700" b="0">
+                <a:solidFill>
+                  <a:srgbClr val="222222"/>
+                </a:solidFill>
+                <a:latin typeface="맑은 고딕"/>
+              </a:rPr>
+              <a:t> — 이름 충돌 검사 생략</a:t>
             </a:r>
           </a:p>
         </p:txBody>
@@ -7721,7 +7920,26 @@
                 </a:solidFill>
                 <a:latin typeface="맑은 고딕"/>
               </a:rPr>
-              <a:t>•  `PARAMETER_VALUE_CONVERT 'chicago','boston'` — 값 안의 문자열 일괄 치환</a:t>
+              <a:t>•  </a:t>
+            </a:r>
+            <a:r>
+              <a:rPr sz="1700" b="0">
+                <a:solidFill>
+                  <a:srgbClr val="222222"/>
+                </a:solidFill>
+                <a:latin typeface="Consolas"/>
+                <a:cs typeface="Consolas"/>
+              </a:rPr>
+              <a:t>PARAMETER_VALUE_CONVERT 'chicago','boston'</a:t>
+            </a:r>
+            <a:r>
+              <a:rPr sz="1700" b="0">
+                <a:solidFill>
+                  <a:srgbClr val="222222"/>
+                </a:solidFill>
+                <a:latin typeface="맑은 고딕"/>
+              </a:rPr>
+              <a:t> — 값 안의 문자열 일괄 치환</a:t>
             </a:r>
           </a:p>
           <a:p>
@@ -7737,7 +7955,26 @@
                 </a:solidFill>
                 <a:latin typeface="맑은 고딕"/>
               </a:rPr>
-              <a:t>•  그 대상에 `db_name`의 값도 포함된다</a:t>
+              <a:t>•  그 대상에 </a:t>
+            </a:r>
+            <a:r>
+              <a:rPr sz="1700" b="0">
+                <a:solidFill>
+                  <a:srgbClr val="222222"/>
+                </a:solidFill>
+                <a:latin typeface="Consolas"/>
+                <a:cs typeface="Consolas"/>
+              </a:rPr>
+              <a:t>db_name</a:t>
+            </a:r>
+            <a:r>
+              <a:rPr sz="1700" b="0">
+                <a:solidFill>
+                  <a:srgbClr val="222222"/>
+                </a:solidFill>
+                <a:latin typeface="맑은 고딕"/>
+              </a:rPr>
+              <a:t>의 값도 포함된다</a:t>
             </a:r>
           </a:p>
           <a:p>
@@ -7769,7 +8006,16 @@
                 </a:solidFill>
                 <a:latin typeface="맑은 고딕"/>
               </a:rPr>
-              <a:t>•  둘이 겹치면 **SET이 이긴다**</a:t>
+              <a:t>•  둘이 겹치면 </a:t>
+            </a:r>
+            <a:r>
+              <a:rPr sz="1700" b="1">
+                <a:solidFill>
+                  <a:srgbClr val="222222"/>
+                </a:solidFill>
+                <a:latin typeface="맑은 고딕"/>
+              </a:rPr>
+              <a:t>SET이 이긴다</a:t>
             </a:r>
           </a:p>
         </p:txBody>
@@ -7948,7 +8194,36 @@
                 </a:solidFill>
                 <a:latin typeface="맑은 고딕"/>
               </a:rPr>
-              <a:t>•  `/u03/.../Chicago/` → `/u03/.../Boston/datafile/`</a:t>
+              <a:t>•  </a:t>
+            </a:r>
+            <a:r>
+              <a:rPr sz="1700" b="0">
+                <a:solidFill>
+                  <a:srgbClr val="222222"/>
+                </a:solidFill>
+                <a:latin typeface="Consolas"/>
+                <a:cs typeface="Consolas"/>
+              </a:rPr>
+              <a:t>/u03/.../Chicago/</a:t>
+            </a:r>
+            <a:r>
+              <a:rPr sz="1700" b="0">
+                <a:solidFill>
+                  <a:srgbClr val="222222"/>
+                </a:solidFill>
+                <a:latin typeface="맑은 고딕"/>
+              </a:rPr>
+              <a:t> → </a:t>
+            </a:r>
+            <a:r>
+              <a:rPr sz="1700" b="0">
+                <a:solidFill>
+                  <a:srgbClr val="222222"/>
+                </a:solidFill>
+                <a:latin typeface="Consolas"/>
+                <a:cs typeface="Consolas"/>
+              </a:rPr>
+              <a:t>/u03/.../Boston/datafile/</a:t>
             </a:r>
           </a:p>
           <a:p>
@@ -7964,7 +8239,36 @@
                 </a:solidFill>
                 <a:latin typeface="맑은 고딕"/>
               </a:rPr>
-              <a:t>•  `system01.dbf` → `Boston/datafile/system01.dbf`</a:t>
+              <a:t>•  </a:t>
+            </a:r>
+            <a:r>
+              <a:rPr sz="1700" b="0">
+                <a:solidFill>
+                  <a:srgbClr val="222222"/>
+                </a:solidFill>
+                <a:latin typeface="Consolas"/>
+                <a:cs typeface="Consolas"/>
+              </a:rPr>
+              <a:t>system01.dbf</a:t>
+            </a:r>
+            <a:r>
+              <a:rPr sz="1700" b="0">
+                <a:solidFill>
+                  <a:srgbClr val="222222"/>
+                </a:solidFill>
+                <a:latin typeface="맑은 고딕"/>
+              </a:rPr>
+              <a:t> → </a:t>
+            </a:r>
+            <a:r>
+              <a:rPr sz="1700" b="0">
+                <a:solidFill>
+                  <a:srgbClr val="222222"/>
+                </a:solidFill>
+                <a:latin typeface="Consolas"/>
+                <a:cs typeface="Consolas"/>
+              </a:rPr>
+              <a:t>Boston/datafile/system01.dbf</a:t>
             </a:r>
           </a:p>
           <a:p>
@@ -7980,7 +8284,36 @@
                 </a:solidFill>
                 <a:latin typeface="맑은 고딕"/>
               </a:rPr>
-              <a:t>•  `chicago_pdb1/users01.dbf` → `Boston/datafile/chicago_pdb1/users01.dbf`</a:t>
+              <a:t>•  </a:t>
+            </a:r>
+            <a:r>
+              <a:rPr sz="1700" b="0">
+                <a:solidFill>
+                  <a:srgbClr val="222222"/>
+                </a:solidFill>
+                <a:latin typeface="Consolas"/>
+                <a:cs typeface="Consolas"/>
+              </a:rPr>
+              <a:t>chicago_pdb1/users01.dbf</a:t>
+            </a:r>
+            <a:r>
+              <a:rPr sz="1700" b="0">
+                <a:solidFill>
+                  <a:srgbClr val="222222"/>
+                </a:solidFill>
+                <a:latin typeface="맑은 고딕"/>
+              </a:rPr>
+              <a:t> → </a:t>
+            </a:r>
+            <a:r>
+              <a:rPr sz="1700" b="0">
+                <a:solidFill>
+                  <a:srgbClr val="222222"/>
+                </a:solidFill>
+                <a:latin typeface="Consolas"/>
+                <a:cs typeface="Consolas"/>
+              </a:rPr>
+              <a:t>Boston/datafile/chicago_pdb1/users01.dbf</a:t>
             </a:r>
           </a:p>
           <a:p>
@@ -7996,7 +8329,17 @@
                 </a:solidFill>
                 <a:latin typeface="맑은 고딕"/>
               </a:rPr>
-              <a:t>•  로그는 목적지가 다르다 → `Boston/onlinelog/`</a:t>
+              <a:t>•  로그는 목적지가 다르다 → </a:t>
+            </a:r>
+            <a:r>
+              <a:rPr sz="1700" b="0">
+                <a:solidFill>
+                  <a:srgbClr val="222222"/>
+                </a:solidFill>
+                <a:latin typeface="Consolas"/>
+                <a:cs typeface="Consolas"/>
+              </a:rPr>
+              <a:t>Boston/onlinelog/</a:t>
             </a:r>
           </a:p>
         </p:txBody>
@@ -8391,7 +8734,26 @@
                 </a:solidFill>
                 <a:latin typeface="맑은 고딕"/>
               </a:rPr>
-              <a:t>•  `DUPLICATE ... FOR STANDBY FROM ACTIVE DATABASE`의 각 절이 무엇을 결정하는지 설명한다.</a:t>
+              <a:t>•  </a:t>
+            </a:r>
+            <a:r>
+              <a:rPr sz="1600" b="0">
+                <a:solidFill>
+                  <a:srgbClr val="222222"/>
+                </a:solidFill>
+                <a:latin typeface="Consolas"/>
+                <a:cs typeface="Consolas"/>
+              </a:rPr>
+              <a:t>DUPLICATE ... FOR STANDBY FROM ACTIVE DATABASE</a:t>
+            </a:r>
+            <a:r>
+              <a:rPr sz="1600" b="0">
+                <a:solidFill>
+                  <a:srgbClr val="222222"/>
+                </a:solidFill>
+                <a:latin typeface="맑은 고딕"/>
+              </a:rPr>
+              <a:t>의 각 절이 무엇을 결정하는지 설명한다.</a:t>
             </a:r>
           </a:p>
           <a:p>
@@ -8471,7 +8833,26 @@
                 </a:solidFill>
                 <a:latin typeface="맑은 고딕"/>
               </a:rPr>
-              <a:t>•  `DBMS_DBCOMP.DBCOMP`로 블록을 비교하고 보고서의 판정 열을 읽는다.</a:t>
+              <a:t>•  </a:t>
+            </a:r>
+            <a:r>
+              <a:rPr sz="1600" b="0">
+                <a:solidFill>
+                  <a:srgbClr val="222222"/>
+                </a:solidFill>
+                <a:latin typeface="Consolas"/>
+                <a:cs typeface="Consolas"/>
+              </a:rPr>
+              <a:t>DBMS_DBCOMP.DBCOMP</a:t>
+            </a:r>
+            <a:r>
+              <a:rPr sz="1600" b="0">
+                <a:solidFill>
+                  <a:srgbClr val="222222"/>
+                </a:solidFill>
+                <a:latin typeface="맑은 고딕"/>
+              </a:rPr>
+              <a:t>로 블록을 비교하고 보고서의 판정 열을 읽는다.</a:t>
             </a:r>
           </a:p>
           <a:p>
@@ -8666,7 +9047,17 @@
                 </a:solidFill>
                 <a:latin typeface="맑은 고딕"/>
               </a:rPr>
-              <a:t>•  경고 : `warning: implicitly using DB_FILE_NAME_CONVERT`</a:t>
+              <a:t>•  경고 : </a:t>
+            </a:r>
+            <a:r>
+              <a:rPr sz="1700" b="0">
+                <a:solidFill>
+                  <a:srgbClr val="222222"/>
+                </a:solidFill>
+                <a:latin typeface="Consolas"/>
+                <a:cs typeface="Consolas"/>
+              </a:rPr>
+              <a:t>warning: implicitly using DB_FILE_NAME_CONVERT</a:t>
             </a:r>
           </a:p>
           <a:p>
@@ -8682,7 +9073,17 @@
                 </a:solidFill>
                 <a:latin typeface="맑은 고딕"/>
               </a:rPr>
-              <a:t>•  오류 : `auxiliary file name ... conflicts with a file used by the target database`</a:t>
+              <a:t>•  오류 : </a:t>
+            </a:r>
+            <a:r>
+              <a:rPr sz="1700" b="0">
+                <a:solidFill>
+                  <a:srgbClr val="222222"/>
+                </a:solidFill>
+                <a:latin typeface="Consolas"/>
+                <a:cs typeface="Consolas"/>
+              </a:rPr>
+              <a:t>auxiliary file name ... conflicts with a file used by the target database</a:t>
             </a:r>
           </a:p>
           <a:p>
@@ -8698,7 +9099,25 @@
                 </a:solidFill>
                 <a:latin typeface="맑은 고딕"/>
               </a:rPr>
-              <a:t>•  경로가 **Chicago**다 — 변환이 전혀 없었다</a:t>
+              <a:t>•  경로가 </a:t>
+            </a:r>
+            <a:r>
+              <a:rPr sz="1700" b="1">
+                <a:solidFill>
+                  <a:srgbClr val="222222"/>
+                </a:solidFill>
+                <a:latin typeface="맑은 고딕"/>
+              </a:rPr>
+              <a:t>Chicago</a:t>
+            </a:r>
+            <a:r>
+              <a:rPr sz="1700" b="0">
+                <a:solidFill>
+                  <a:srgbClr val="222222"/>
+                </a:solidFill>
+                <a:latin typeface="맑은 고딕"/>
+              </a:rPr>
+              <a:t>다 — 변환이 전혀 없었다</a:t>
             </a:r>
           </a:p>
           <a:p>
@@ -8925,7 +9344,16 @@
                 </a:solidFill>
                 <a:latin typeface="맑은 고딕"/>
               </a:rPr>
-              <a:t>•  결과 : **Primary 데이터 파일을 실제로 덮어쓴다**</a:t>
+              <a:t>•  결과 : </a:t>
+            </a:r>
+            <a:r>
+              <a:rPr sz="1700" b="1">
+                <a:solidFill>
+                  <a:srgbClr val="222222"/>
+                </a:solidFill>
+                <a:latin typeface="맑은 고딕"/>
+              </a:rPr>
+              <a:t>Primary 데이터 파일을 실제로 덮어쓴다</a:t>
             </a:r>
           </a:p>
           <a:p>
@@ -9152,7 +9580,26 @@
                 </a:solidFill>
                 <a:latin typeface="맑은 고딕"/>
               </a:rPr>
-              <a:t>•  6번(`pdbseed/sysaux01.dbf`)에서 멈췄다</a:t>
+              <a:t>•  6번(</a:t>
+            </a:r>
+            <a:r>
+              <a:rPr sz="1700" b="0">
+                <a:solidFill>
+                  <a:srgbClr val="222222"/>
+                </a:solidFill>
+                <a:latin typeface="Consolas"/>
+                <a:cs typeface="Consolas"/>
+              </a:rPr>
+              <a:t>pdbseed/sysaux01.dbf</a:t>
+            </a:r>
+            <a:r>
+              <a:rPr sz="1700" b="0">
+                <a:solidFill>
+                  <a:srgbClr val="222222"/>
+                </a:solidFill>
+                <a:latin typeface="맑은 고딕"/>
+              </a:rPr>
+              <a:t>)에서 멈췄다</a:t>
             </a:r>
           </a:p>
           <a:p>
@@ -9168,7 +9615,25 @@
                 </a:solidFill>
                 <a:latin typeface="맑은 고딕"/>
               </a:rPr>
-              <a:t>•  공통점 : 실패한 파일은 **하위 디렉터리 아래** 있다</a:t>
+              <a:t>•  공통점 : 실패한 파일은 </a:t>
+            </a:r>
+            <a:r>
+              <a:rPr sz="1700" b="1">
+                <a:solidFill>
+                  <a:srgbClr val="222222"/>
+                </a:solidFill>
+                <a:latin typeface="맑은 고딕"/>
+              </a:rPr>
+              <a:t>하위 디렉터리 아래</a:t>
+            </a:r>
+            <a:r>
+              <a:rPr sz="1700" b="0">
+                <a:solidFill>
+                  <a:srgbClr val="222222"/>
+                </a:solidFill>
+                <a:latin typeface="맑은 고딕"/>
+              </a:rPr>
+              <a:t> 있다</a:t>
             </a:r>
           </a:p>
         </p:txBody>
@@ -9306,9 +9771,10 @@
                 <a:solidFill>
                   <a:srgbClr val="5A6672"/>
                 </a:solidFill>
-                <a:latin typeface="맑은 고딕"/>
-              </a:rPr>
-              <a:t>`failed to identify file ""`</a:t>
+                <a:latin typeface="Consolas"/>
+                <a:cs typeface="Consolas"/>
+              </a:rPr>
+              <a:t>failed to identify file ""</a:t>
             </a:r>
           </a:p>
         </p:txBody>
@@ -9363,7 +9829,25 @@
                 </a:solidFill>
                 <a:latin typeface="맑은 고딕"/>
               </a:rPr>
-              <a:t>•  해법 : 로그에서 **바로 앞의 input datafile 줄**을 본다</a:t>
+              <a:t>•  해법 : 로그에서 </a:t>
+            </a:r>
+            <a:r>
+              <a:rPr sz="1700" b="1">
+                <a:solidFill>
+                  <a:srgbClr val="222222"/>
+                </a:solidFill>
+                <a:latin typeface="맑은 고딕"/>
+              </a:rPr>
+              <a:t>바로 앞의 input datafile 줄</a:t>
+            </a:r>
+            <a:r>
+              <a:rPr sz="1700" b="0">
+                <a:solidFill>
+                  <a:srgbClr val="222222"/>
+                </a:solidFill>
+                <a:latin typeface="맑은 고딕"/>
+              </a:rPr>
+              <a:t>을 본다</a:t>
             </a:r>
           </a:p>
           <a:p>
@@ -9379,7 +9863,17 @@
                 </a:solidFill>
                 <a:latin typeface="맑은 고딕"/>
               </a:rPr>
-              <a:t>•  286번 줄 : `input datafile file number=00006 ... pdbseed/sysaux01.dbf`</a:t>
+              <a:t>•  286번 줄 : </a:t>
+            </a:r>
+            <a:r>
+              <a:rPr sz="1700" b="0">
+                <a:solidFill>
+                  <a:srgbClr val="222222"/>
+                </a:solidFill>
+                <a:latin typeface="Consolas"/>
+                <a:cs typeface="Consolas"/>
+              </a:rPr>
+              <a:t>input datafile file number=00006 ... pdbseed/sysaux01.dbf</a:t>
             </a:r>
           </a:p>
           <a:p>
@@ -9590,7 +10084,25 @@
                 </a:solidFill>
                 <a:latin typeface="맑은 고딕"/>
               </a:rPr>
-              <a:t>•  ORA-17628 — 방향. **원격(Standby) 쪽** 오류다</a:t>
+              <a:t>•  ORA-17628 — 방향. </a:t>
+            </a:r>
+            <a:r>
+              <a:rPr sz="1700" b="1">
+                <a:solidFill>
+                  <a:srgbClr val="222222"/>
+                </a:solidFill>
+                <a:latin typeface="맑은 고딕"/>
+              </a:rPr>
+              <a:t>원격(Standby) 쪽</a:t>
+            </a:r>
+            <a:r>
+              <a:rPr sz="1700" b="0">
+                <a:solidFill>
+                  <a:srgbClr val="222222"/>
+                </a:solidFill>
+                <a:latin typeface="맑은 고딕"/>
+              </a:rPr>
+              <a:t> 오류다</a:t>
             </a:r>
           </a:p>
           <a:p>
@@ -9801,7 +10313,25 @@
                 </a:solidFill>
                 <a:latin typeface="맑은 고딕"/>
               </a:rPr>
-              <a:t>•  첫 번째 : 전송 **전**에 막힘 — 남은 파일 없음</a:t>
+              <a:t>•  첫 번째 : 전송 </a:t>
+            </a:r>
+            <a:r>
+              <a:rPr sz="1700" b="1">
+                <a:solidFill>
+                  <a:srgbClr val="222222"/>
+                </a:solidFill>
+                <a:latin typeface="맑은 고딕"/>
+              </a:rPr>
+              <a:t>전</a:t>
+            </a:r>
+            <a:r>
+              <a:rPr sz="1700" b="0">
+                <a:solidFill>
+                  <a:srgbClr val="222222"/>
+                </a:solidFill>
+                <a:latin typeface="맑은 고딕"/>
+              </a:rPr>
+              <a:t>에 막힘 — 남은 파일 없음</a:t>
             </a:r>
           </a:p>
           <a:p>
@@ -9817,7 +10347,25 @@
                 </a:solidFill>
                 <a:latin typeface="맑은 고딕"/>
               </a:rPr>
-              <a:t>•  두 번째 : 전송 **도중** 막힘 — 일부 파일이 남는다</a:t>
+              <a:t>•  두 번째 : 전송 </a:t>
+            </a:r>
+            <a:r>
+              <a:rPr sz="1700" b="1">
+                <a:solidFill>
+                  <a:srgbClr val="222222"/>
+                </a:solidFill>
+                <a:latin typeface="맑은 고딕"/>
+              </a:rPr>
+              <a:t>도중</a:t>
+            </a:r>
+            <a:r>
+              <a:rPr sz="1700" b="0">
+                <a:solidFill>
+                  <a:srgbClr val="222222"/>
+                </a:solidFill>
+                <a:latin typeface="맑은 고딕"/>
+              </a:rPr>
+              <a:t> 막힘 — 일부 파일이 남는다</a:t>
             </a:r>
           </a:p>
           <a:p>
@@ -10283,7 +10831,26 @@
                 </a:solidFill>
                 <a:latin typeface="맑은 고딕"/>
               </a:rPr>
-              <a:t>•  `rc=0` — 종료 코드</a:t>
+              <a:t>•  </a:t>
+            </a:r>
+            <a:r>
+              <a:rPr sz="1700" b="0">
+                <a:solidFill>
+                  <a:srgbClr val="222222"/>
+                </a:solidFill>
+                <a:latin typeface="Consolas"/>
+                <a:cs typeface="Consolas"/>
+              </a:rPr>
+              <a:t>rc=0</a:t>
+            </a:r>
+            <a:r>
+              <a:rPr sz="1700" b="0">
+                <a:solidFill>
+                  <a:srgbClr val="222222"/>
+                </a:solidFill>
+                <a:latin typeface="맑은 고딕"/>
+              </a:rPr>
+              <a:t> — 종료 코드</a:t>
             </a:r>
           </a:p>
           <a:p>
@@ -10299,7 +10866,35 @@
                 </a:solidFill>
                 <a:latin typeface="맑은 고딕"/>
               </a:rPr>
-              <a:t>•  `grep -cE 'RMAN-|ORA-'` = **0**</a:t>
+              <a:t>•  </a:t>
+            </a:r>
+            <a:r>
+              <a:rPr sz="1700" b="0">
+                <a:solidFill>
+                  <a:srgbClr val="222222"/>
+                </a:solidFill>
+                <a:latin typeface="Consolas"/>
+                <a:cs typeface="Consolas"/>
+              </a:rPr>
+              <a:t>grep -cE 'RMAN-|ORA-'</a:t>
+            </a:r>
+            <a:r>
+              <a:rPr sz="1700" b="0">
+                <a:solidFill>
+                  <a:srgbClr val="222222"/>
+                </a:solidFill>
+                <a:latin typeface="맑은 고딕"/>
+              </a:rPr>
+              <a:t> = </a:t>
+            </a:r>
+            <a:r>
+              <a:rPr sz="1700" b="1">
+                <a:solidFill>
+                  <a:srgbClr val="222222"/>
+                </a:solidFill>
+                <a:latin typeface="맑은 고딕"/>
+              </a:rPr>
+              <a:t>0</a:t>
             </a:r>
           </a:p>
           <a:p>
@@ -10315,7 +10910,26 @@
                 </a:solidFill>
                 <a:latin typeface="맑은 고딕"/>
               </a:rPr>
-              <a:t>•  `Finished Duplicate Db` 존재</a:t>
+              <a:t>•  </a:t>
+            </a:r>
+            <a:r>
+              <a:rPr sz="1700" b="0">
+                <a:solidFill>
+                  <a:srgbClr val="222222"/>
+                </a:solidFill>
+                <a:latin typeface="Consolas"/>
+                <a:cs typeface="Consolas"/>
+              </a:rPr>
+              <a:t>Finished Duplicate Db</a:t>
+            </a:r>
+            <a:r>
+              <a:rPr sz="1700" b="0">
+                <a:solidFill>
+                  <a:srgbClr val="222222"/>
+                </a:solidFill>
+                <a:latin typeface="맑은 고딕"/>
+              </a:rPr>
+              <a:t> 존재</a:t>
             </a:r>
           </a:p>
           <a:p>
@@ -10753,7 +11367,17 @@
                 </a:solidFill>
                 <a:latin typeface="맑은 고딕"/>
               </a:rPr>
-              <a:t>•  로그 끝 : `sql statement: alter database recover managed standby database ...`</a:t>
+              <a:t>•  로그 끝 : </a:t>
+            </a:r>
+            <a:r>
+              <a:rPr sz="1700" b="0">
+                <a:solidFill>
+                  <a:srgbClr val="222222"/>
+                </a:solidFill>
+                <a:latin typeface="Consolas"/>
+                <a:cs typeface="Consolas"/>
+              </a:rPr>
+              <a:t>sql statement: alter database recover managed standby database ...</a:t>
             </a:r>
           </a:p>
           <a:p>
@@ -11503,7 +12127,16 @@
                 </a:solidFill>
                 <a:latin typeface="맑은 고딕"/>
               </a:rPr>
-              <a:t>•  그러나 OPEN_MODE는 **MOUNTED**</a:t>
+              <a:t>•  그러나 OPEN_MODE는 </a:t>
+            </a:r>
+            <a:r>
+              <a:rPr sz="1700" b="1">
+                <a:solidFill>
+                  <a:srgbClr val="222222"/>
+                </a:solidFill>
+                <a:latin typeface="맑은 고딕"/>
+              </a:rPr>
+              <a:t>MOUNTED</a:t>
             </a:r>
           </a:p>
           <a:p>
@@ -11714,7 +12347,35 @@
                 </a:solidFill>
                 <a:latin typeface="맑은 고딕"/>
               </a:rPr>
-              <a:t>•  `CREATE SPFILE FROM MEMORY` → **ORA-32002**</a:t>
+              <a:t>•  </a:t>
+            </a:r>
+            <a:r>
+              <a:rPr sz="1700" b="0">
+                <a:solidFill>
+                  <a:srgbClr val="222222"/>
+                </a:solidFill>
+                <a:latin typeface="Consolas"/>
+                <a:cs typeface="Consolas"/>
+              </a:rPr>
+              <a:t>CREATE SPFILE FROM MEMORY</a:t>
+            </a:r>
+            <a:r>
+              <a:rPr sz="1700" b="0">
+                <a:solidFill>
+                  <a:srgbClr val="222222"/>
+                </a:solidFill>
+                <a:latin typeface="맑은 고딕"/>
+              </a:rPr>
+              <a:t> → </a:t>
+            </a:r>
+            <a:r>
+              <a:rPr sz="1700" b="1">
+                <a:solidFill>
+                  <a:srgbClr val="222222"/>
+                </a:solidFill>
+                <a:latin typeface="맑은 고딕"/>
+              </a:rPr>
+              <a:t>ORA-32002</a:t>
             </a:r>
           </a:p>
           <a:p>
@@ -11746,7 +12407,35 @@
                 </a:solidFill>
                 <a:latin typeface="맑은 고딕"/>
               </a:rPr>
-              <a:t>•  가이드에 `ALTER PLUGGABLE DATABASE ... OPEN READ ONLY`가 **없다**</a:t>
+              <a:t>•  가이드에 </a:t>
+            </a:r>
+            <a:r>
+              <a:rPr sz="1700" b="0">
+                <a:solidFill>
+                  <a:srgbClr val="222222"/>
+                </a:solidFill>
+                <a:latin typeface="Consolas"/>
+                <a:cs typeface="Consolas"/>
+              </a:rPr>
+              <a:t>ALTER PLUGGABLE DATABASE ... OPEN READ ONLY</a:t>
+            </a:r>
+            <a:r>
+              <a:rPr sz="1700" b="0">
+                <a:solidFill>
+                  <a:srgbClr val="222222"/>
+                </a:solidFill>
+                <a:latin typeface="맑은 고딕"/>
+              </a:rPr>
+              <a:t>가 </a:t>
+            </a:r>
+            <a:r>
+              <a:rPr sz="1700" b="1">
+                <a:solidFill>
+                  <a:srgbClr val="222222"/>
+                </a:solidFill>
+                <a:latin typeface="맑은 고딕"/>
+              </a:rPr>
+              <a:t>없다</a:t>
             </a:r>
           </a:p>
           <a:p>
@@ -12168,7 +12857,17 @@
                 </a:solidFill>
                 <a:latin typeface="맑은 고딕"/>
               </a:rPr>
-              <a:t>•  Primary에서 `ALTER SYSTEM ARCHIVE LOG CURRENT`</a:t>
+              <a:t>•  Primary에서 </a:t>
+            </a:r>
+            <a:r>
+              <a:rPr sz="1700" b="0">
+                <a:solidFill>
+                  <a:srgbClr val="222222"/>
+                </a:solidFill>
+                <a:latin typeface="Consolas"/>
+                <a:cs typeface="Consolas"/>
+              </a:rPr>
+              <a:t>ALTER SYSTEM ARCHIVE LOG CURRENT</a:t>
             </a:r>
           </a:p>
           <a:p>
@@ -12184,7 +12883,17 @@
                 </a:solidFill>
                 <a:latin typeface="맑은 고딕"/>
               </a:rPr>
-              <a:t>•  transport lag / apply lag = `+00 00:00:00`</a:t>
+              <a:t>•  transport lag / apply lag = </a:t>
+            </a:r>
+            <a:r>
+              <a:rPr sz="1700" b="0">
+                <a:solidFill>
+                  <a:srgbClr val="222222"/>
+                </a:solidFill>
+                <a:latin typeface="Consolas"/>
+                <a:cs typeface="Consolas"/>
+              </a:rPr>
+              <a:t>+00 00:00:00</a:t>
             </a:r>
           </a:p>
           <a:p>
@@ -12200,7 +12909,16 @@
                 </a:solidFill>
                 <a:latin typeface="맑은 고딕"/>
               </a:rPr>
-              <a:t>•  MRP0 상태가 WAIT_FOR_LOG → **APPLYING_LOG**</a:t>
+              <a:t>•  MRP0 상태가 WAIT_FOR_LOG → </a:t>
+            </a:r>
+            <a:r>
+              <a:rPr sz="1700" b="1">
+                <a:solidFill>
+                  <a:srgbClr val="222222"/>
+                </a:solidFill>
+                <a:latin typeface="맑은 고딕"/>
+              </a:rPr>
+              <a:t>APPLYING_LOG</a:t>
             </a:r>
           </a:p>
           <a:p>
@@ -12666,7 +13384,26 @@
                 </a:solidFill>
                 <a:latin typeface="맑은 고딕"/>
               </a:rPr>
-              <a:t>•  `DBMS_DBCOMP.DBCOMP`는 데이터 블록을 하나씩 비교한다</a:t>
+              <a:t>•  </a:t>
+            </a:r>
+            <a:r>
+              <a:rPr sz="1700" b="0">
+                <a:solidFill>
+                  <a:srgbClr val="222222"/>
+                </a:solidFill>
+                <a:latin typeface="Consolas"/>
+                <a:cs typeface="Consolas"/>
+              </a:rPr>
+              <a:t>DBMS_DBCOMP.DBCOMP</a:t>
+            </a:r>
+            <a:r>
+              <a:rPr sz="1700" b="0">
+                <a:solidFill>
+                  <a:srgbClr val="222222"/>
+                </a:solidFill>
+                <a:latin typeface="맑은 고딕"/>
+              </a:rPr>
+              <a:t>는 데이터 블록을 하나씩 비교한다</a:t>
             </a:r>
           </a:p>
           <a:p>
@@ -12877,7 +13614,26 @@
                 </a:solidFill>
                 <a:latin typeface="맑은 고딕"/>
               </a:rPr>
-              <a:t>•  이름은 `output_file` — 디렉터리 객체를 넣고 싶어진다</a:t>
+              <a:t>•  이름은 </a:t>
+            </a:r>
+            <a:r>
+              <a:rPr sz="1700" b="0">
+                <a:solidFill>
+                  <a:srgbClr val="222222"/>
+                </a:solidFill>
+                <a:latin typeface="Consolas"/>
+                <a:cs typeface="Consolas"/>
+              </a:rPr>
+              <a:t>output_file</a:t>
+            </a:r>
+            <a:r>
+              <a:rPr sz="1700" b="0">
+                <a:solidFill>
+                  <a:srgbClr val="222222"/>
+                </a:solidFill>
+                <a:latin typeface="맑은 고딕"/>
+              </a:rPr>
+              <a:t> — 디렉터리 객체를 넣고 싶어진다</a:t>
             </a:r>
           </a:p>
           <a:p>
@@ -12893,7 +13649,16 @@
                 </a:solidFill>
                 <a:latin typeface="맑은 고딕"/>
               </a:rPr>
-              <a:t>•  실제로는 **파일 이름 접두어**</a:t>
+              <a:t>•  실제로는 </a:t>
+            </a:r>
+            <a:r>
+              <a:rPr sz="1700" b="1">
+                <a:solidFill>
+                  <a:srgbClr val="222222"/>
+                </a:solidFill>
+                <a:latin typeface="맑은 고딕"/>
+              </a:rPr>
+              <a:t>파일 이름 접두어</a:t>
             </a:r>
           </a:p>
           <a:p>
@@ -12909,7 +13674,26 @@
                 </a:solidFill>
                 <a:latin typeface="맑은 고딕"/>
               </a:rPr>
-              <a:t>•  결과는 `$ORACLE_HOME/dbs` 아래에 생긴다</a:t>
+              <a:t>•  결과는 </a:t>
+            </a:r>
+            <a:r>
+              <a:rPr sz="1700" b="0">
+                <a:solidFill>
+                  <a:srgbClr val="222222"/>
+                </a:solidFill>
+                <a:latin typeface="Consolas"/>
+                <a:cs typeface="Consolas"/>
+              </a:rPr>
+              <a:t>$ORACLE_HOME/dbs</a:t>
+            </a:r>
+            <a:r>
+              <a:rPr sz="1700" b="0">
+                <a:solidFill>
+                  <a:srgbClr val="222222"/>
+                </a:solidFill>
+                <a:latin typeface="맑은 고딕"/>
+              </a:rPr>
+              <a:t> 아래에 생긴다</a:t>
             </a:r>
           </a:p>
           <a:p>
@@ -12925,7 +13709,36 @@
                 </a:solidFill>
                 <a:latin typeface="맑은 고딕"/>
               </a:rPr>
-              <a:t>•  `&lt;접두어&gt;` 와 `&lt;접두어&gt;_&lt;상대 DB_UNIQUE_NAME&gt;_&lt;파일번호&gt;`</a:t>
+              <a:t>•  </a:t>
+            </a:r>
+            <a:r>
+              <a:rPr sz="1700" b="0">
+                <a:solidFill>
+                  <a:srgbClr val="222222"/>
+                </a:solidFill>
+                <a:latin typeface="Consolas"/>
+                <a:cs typeface="Consolas"/>
+              </a:rPr>
+              <a:t>&lt;접두어&gt;</a:t>
+            </a:r>
+            <a:r>
+              <a:rPr sz="1700" b="0">
+                <a:solidFill>
+                  <a:srgbClr val="222222"/>
+                </a:solidFill>
+                <a:latin typeface="맑은 고딕"/>
+              </a:rPr>
+              <a:t> 와 </a:t>
+            </a:r>
+            <a:r>
+              <a:rPr sz="1700" b="0">
+                <a:solidFill>
+                  <a:srgbClr val="222222"/>
+                </a:solidFill>
+                <a:latin typeface="Consolas"/>
+                <a:cs typeface="Consolas"/>
+              </a:rPr>
+              <a:t>&lt;접두어&gt;_&lt;상대 DB_UNIQUE_NAME&gt;_&lt;파일번호&gt;</a:t>
             </a:r>
           </a:p>
         </p:txBody>
@@ -13104,7 +13917,25 @@
                 </a:solidFill>
                 <a:latin typeface="맑은 고딕"/>
               </a:rPr>
-              <a:t>•  같은 접두어 재사용 → **ORA-24258** (덮어쓰지 않는다)</a:t>
+              <a:t>•  같은 접두어 재사용 → </a:t>
+            </a:r>
+            <a:r>
+              <a:rPr sz="1700" b="1">
+                <a:solidFill>
+                  <a:srgbClr val="222222"/>
+                </a:solidFill>
+                <a:latin typeface="맑은 고딕"/>
+              </a:rPr>
+              <a:t>ORA-24258</a:t>
+            </a:r>
+            <a:r>
+              <a:rPr sz="1700" b="0">
+                <a:solidFill>
+                  <a:srgbClr val="222222"/>
+                </a:solidFill>
+                <a:latin typeface="맑은 고딕"/>
+              </a:rPr>
+              <a:t> (덮어쓰지 않는다)</a:t>
             </a:r>
           </a:p>
           <a:p>
@@ -13120,7 +13951,25 @@
                 </a:solidFill>
                 <a:latin typeface="맑은 고딕"/>
               </a:rPr>
-              <a:t>•  NULL이나 없는 파일 → **ORA-53201** (한 번에 한 파일만)</a:t>
+              <a:t>•  NULL이나 없는 파일 → </a:t>
+            </a:r>
+            <a:r>
+              <a:rPr sz="1700" b="1">
+                <a:solidFill>
+                  <a:srgbClr val="222222"/>
+                </a:solidFill>
+                <a:latin typeface="맑은 고딕"/>
+              </a:rPr>
+              <a:t>ORA-53201</a:t>
+            </a:r>
+            <a:r>
+              <a:rPr sz="1700" b="0">
+                <a:solidFill>
+                  <a:srgbClr val="222222"/>
+                </a:solidFill>
+                <a:latin typeface="맑은 고딕"/>
+              </a:rPr>
+              <a:t> (한 번에 한 파일만)</a:t>
             </a:r>
           </a:p>
           <a:p>
@@ -13136,7 +13985,16 @@
                 </a:solidFill>
                 <a:latin typeface="맑은 고딕"/>
               </a:rPr>
-              <a:t>•  없는 디렉터리 객체 이름 → **오류 없이 성공**</a:t>
+              <a:t>•  없는 디렉터리 객체 이름 → </a:t>
+            </a:r>
+            <a:r>
+              <a:rPr sz="1700" b="1">
+                <a:solidFill>
+                  <a:srgbClr val="222222"/>
+                </a:solidFill>
+                <a:latin typeface="맑은 고딕"/>
+              </a:rPr>
+              <a:t>오류 없이 성공</a:t>
             </a:r>
           </a:p>
         </p:txBody>
@@ -13315,7 +14173,25 @@
                 </a:solidFill>
                 <a:latin typeface="맑은 고딕"/>
               </a:rPr>
-              <a:t>•  **DIFFPAIR** : 버전은 같은데 내용이 다르다 — 있을 수 없는 상태</a:t>
+              <a:t>•  </a:t>
+            </a:r>
+            <a:r>
+              <a:rPr sz="1700" b="1">
+                <a:solidFill>
+                  <a:srgbClr val="222222"/>
+                </a:solidFill>
+                <a:latin typeface="맑은 고딕"/>
+              </a:rPr>
+              <a:t>DIFFPAIR</a:t>
+            </a:r>
+            <a:r>
+              <a:rPr sz="1700" b="0">
+                <a:solidFill>
+                  <a:srgbClr val="222222"/>
+                </a:solidFill>
+                <a:latin typeface="맑은 고딕"/>
+              </a:rPr>
+              <a:t> : 버전은 같은데 내용이 다르다 — 있을 수 없는 상태</a:t>
             </a:r>
           </a:p>
           <a:p>
@@ -13331,7 +14207,25 @@
                 </a:solidFill>
                 <a:latin typeface="맑은 고딕"/>
               </a:rPr>
-              <a:t>•  **LWLOC / LWRMT** : 로컬·원격의 lost write</a:t>
+              <a:t>•  </a:t>
+            </a:r>
+            <a:r>
+              <a:rPr sz="1700" b="1">
+                <a:solidFill>
+                  <a:srgbClr val="222222"/>
+                </a:solidFill>
+                <a:latin typeface="맑은 고딕"/>
+              </a:rPr>
+              <a:t>LWLOC / LWRMT</a:t>
+            </a:r>
+            <a:r>
+              <a:rPr sz="1700" b="0">
+                <a:solidFill>
+                  <a:srgbClr val="222222"/>
+                </a:solidFill>
+                <a:latin typeface="맑은 고딕"/>
+              </a:rPr>
+              <a:t> : 로컬·원격의 lost write</a:t>
             </a:r>
           </a:p>
           <a:p>
@@ -13845,7 +14739,16 @@
                 </a:solidFill>
                 <a:latin typeface="맑은 고딕"/>
               </a:rPr>
-              <a:t>•  CORR가 잡히면 **재실행과 RMAN VALIDATE로 교차 확인**</a:t>
+              <a:t>•  CORR가 잡히면 </a:t>
+            </a:r>
+            <a:r>
+              <a:rPr sz="1700" b="1">
+                <a:solidFill>
+                  <a:srgbClr val="222222"/>
+                </a:solidFill>
+                <a:latin typeface="맑은 고딕"/>
+              </a:rPr>
+              <a:t>재실행과 RMAN VALIDATE로 교차 확인</a:t>
             </a:r>
           </a:p>
         </p:txBody>
@@ -14327,7 +15230,26 @@
                 </a:solidFill>
                 <a:latin typeface="맑은 고딕"/>
               </a:rPr>
-              <a:t>•  6장 OMF : `DB_CREATE_FILE_DEST` 하나면 끝난다</a:t>
+              <a:t>•  6장 OMF : </a:t>
+            </a:r>
+            <a:r>
+              <a:rPr sz="1700" b="0">
+                <a:solidFill>
+                  <a:srgbClr val="222222"/>
+                </a:solidFill>
+                <a:latin typeface="Consolas"/>
+                <a:cs typeface="Consolas"/>
+              </a:rPr>
+              <a:t>DB_CREATE_FILE_DEST</a:t>
+            </a:r>
+            <a:r>
+              <a:rPr sz="1700" b="0">
+                <a:solidFill>
+                  <a:srgbClr val="222222"/>
+                </a:solidFill>
+                <a:latin typeface="맑은 고딕"/>
+              </a:rPr>
+              <a:t> 하나면 끝난다</a:t>
             </a:r>
           </a:p>
         </p:txBody>
@@ -14467,7 +15389,26 @@
                 </a:solidFill>
                 <a:latin typeface="맑은 고딕"/>
               </a:rPr>
-              <a:t>•  Q1. `FOR STANDBY`가 없으면 무엇이 달라지며, 그것이 왜 Data Guard에 치명적인가?</a:t>
+              <a:t>•  Q1. </a:t>
+            </a:r>
+            <a:r>
+              <a:rPr sz="1600" b="0">
+                <a:solidFill>
+                  <a:srgbClr val="222222"/>
+                </a:solidFill>
+                <a:latin typeface="Consolas"/>
+                <a:cs typeface="Consolas"/>
+              </a:rPr>
+              <a:t>FOR STANDBY</a:t>
+            </a:r>
+            <a:r>
+              <a:rPr sz="1600" b="0">
+                <a:solidFill>
+                  <a:srgbClr val="222222"/>
+                </a:solidFill>
+                <a:latin typeface="맑은 고딕"/>
+              </a:rPr>
+              <a:t>가 없으면 무엇이 달라지며, 그것이 왜 Data Guard에 치명적인가?</a:t>
             </a:r>
           </a:p>
           <a:p>
@@ -14499,7 +15440,45 @@
                 </a:solidFill>
                 <a:latin typeface="맑은 고딕"/>
               </a:rPr>
-              <a:t>•  Q3. `RMAN-05538` 경고가 뜨고 `RMAN-05001`의 경로가 Chicago였다. 무엇이 잘못되었는가?</a:t>
+              <a:t>•  Q3. </a:t>
+            </a:r>
+            <a:r>
+              <a:rPr sz="1600" b="0">
+                <a:solidFill>
+                  <a:srgbClr val="222222"/>
+                </a:solidFill>
+                <a:latin typeface="Consolas"/>
+                <a:cs typeface="Consolas"/>
+              </a:rPr>
+              <a:t>RMAN-05538</a:t>
+            </a:r>
+            <a:r>
+              <a:rPr sz="1600" b="0">
+                <a:solidFill>
+                  <a:srgbClr val="222222"/>
+                </a:solidFill>
+                <a:latin typeface="맑은 고딕"/>
+              </a:rPr>
+              <a:t> 경고가 뜨고 </a:t>
+            </a:r>
+            <a:r>
+              <a:rPr sz="1600" b="0">
+                <a:solidFill>
+                  <a:srgbClr val="222222"/>
+                </a:solidFill>
+                <a:latin typeface="Consolas"/>
+                <a:cs typeface="Consolas"/>
+              </a:rPr>
+              <a:t>RMAN-05001</a:t>
+            </a:r>
+            <a:r>
+              <a:rPr sz="1600" b="0">
+                <a:solidFill>
+                  <a:srgbClr val="222222"/>
+                </a:solidFill>
+                <a:latin typeface="맑은 고딕"/>
+              </a:rPr>
+              <a:t>의 경로가 Chicago였다. 무엇이 잘못되었는가?</a:t>
             </a:r>
           </a:p>
           <a:p>
@@ -14515,7 +15494,26 @@
                 </a:solidFill>
                 <a:latin typeface="맑은 고딕"/>
               </a:rPr>
-              <a:t>•  Q4. `NOFILENAMECHECK`를 convert 없이 단독으로 쓰면 왜 위험한가?</a:t>
+              <a:t>•  Q4. </a:t>
+            </a:r>
+            <a:r>
+              <a:rPr sz="1600" b="0">
+                <a:solidFill>
+                  <a:srgbClr val="222222"/>
+                </a:solidFill>
+                <a:latin typeface="Consolas"/>
+                <a:cs typeface="Consolas"/>
+              </a:rPr>
+              <a:t>NOFILENAMECHECK</a:t>
+            </a:r>
+            <a:r>
+              <a:rPr sz="1600" b="0">
+                <a:solidFill>
+                  <a:srgbClr val="222222"/>
+                </a:solidFill>
+                <a:latin typeface="맑은 고딕"/>
+              </a:rPr>
+              <a:t>를 convert 없이 단독으로 쓰면 왜 위험한가?</a:t>
             </a:r>
           </a:p>
           <a:p>
@@ -14531,7 +15529,26 @@
                 </a:solidFill>
                 <a:latin typeface="맑은 고딕"/>
               </a:rPr>
-              <a:t>•  Q5. `ORA-19505`의 파일 이름이 비어 있을 때 원인을 어떻게 특정하는가?</a:t>
+              <a:t>•  Q5. </a:t>
+            </a:r>
+            <a:r>
+              <a:rPr sz="1600" b="0">
+                <a:solidFill>
+                  <a:srgbClr val="222222"/>
+                </a:solidFill>
+                <a:latin typeface="Consolas"/>
+                <a:cs typeface="Consolas"/>
+              </a:rPr>
+              <a:t>ORA-19505</a:t>
+            </a:r>
+            <a:r>
+              <a:rPr sz="1600" b="0">
+                <a:solidFill>
+                  <a:srgbClr val="222222"/>
+                </a:solidFill>
+                <a:latin typeface="맑은 고딕"/>
+              </a:rPr>
+              <a:t>의 파일 이름이 비어 있을 때 원인을 어떻게 특정하는가?</a:t>
             </a:r>
           </a:p>
           <a:p>
@@ -14547,7 +15564,26 @@
                 </a:solidFill>
                 <a:latin typeface="맑은 고딕"/>
               </a:rPr>
-              <a:t>•  Q6. `DBMS_DBCOMP` 보고서에서 정상 여부를 판정하는 세 열은 무엇이며 왜 그 셋인가?</a:t>
+              <a:t>•  Q6. </a:t>
+            </a:r>
+            <a:r>
+              <a:rPr sz="1600" b="0">
+                <a:solidFill>
+                  <a:srgbClr val="222222"/>
+                </a:solidFill>
+                <a:latin typeface="Consolas"/>
+                <a:cs typeface="Consolas"/>
+              </a:rPr>
+              <a:t>DBMS_DBCOMP</a:t>
+            </a:r>
+            <a:r>
+              <a:rPr sz="1600" b="0">
+                <a:solidFill>
+                  <a:srgbClr val="222222"/>
+                </a:solidFill>
+                <a:latin typeface="맑은 고딕"/>
+              </a:rPr>
+              <a:t> 보고서에서 정상 여부를 판정하는 세 열은 무엇이며 왜 그 셋인가?</a:t>
             </a:r>
           </a:p>
         </p:txBody>
@@ -14687,7 +15723,26 @@
                 </a:solidFill>
                 <a:latin typeface="맑은 고딕"/>
               </a:rPr>
-              <a:t>•  `FOR STANDBY`가 DBID를 유지한다. 실측 양쪽 모두 1852041610. 이 값이 다르면 Data Guard로 쓸 수 없다.</a:t>
+              <a:t>•  </a:t>
+            </a:r>
+            <a:r>
+              <a:rPr sz="1600" b="0">
+                <a:solidFill>
+                  <a:srgbClr val="222222"/>
+                </a:solidFill>
+                <a:latin typeface="Consolas"/>
+                <a:cs typeface="Consolas"/>
+              </a:rPr>
+              <a:t>FOR STANDBY</a:t>
+            </a:r>
+            <a:r>
+              <a:rPr sz="1600" b="0">
+                <a:solidFill>
+                  <a:srgbClr val="222222"/>
+                </a:solidFill>
+                <a:latin typeface="맑은 고딕"/>
+              </a:rPr>
+              <a:t>가 DBID를 유지한다. 실측 양쪽 모두 1852041610. 이 값이 다르면 Data Guard로 쓸 수 없다.</a:t>
             </a:r>
           </a:p>
           <a:p>
@@ -14703,7 +15758,26 @@
                 </a:solidFill>
                 <a:latin typeface="맑은 고딕"/>
               </a:rPr>
-              <a:t>•  `FROM ACTIVE DATABASE`는 백업 없이 운영 중 Primary에서 직접 읽는다. 실패해도 Primary는 무사하다.</a:t>
+              <a:t>•  </a:t>
+            </a:r>
+            <a:r>
+              <a:rPr sz="1600" b="0">
+                <a:solidFill>
+                  <a:srgbClr val="222222"/>
+                </a:solidFill>
+                <a:latin typeface="Consolas"/>
+                <a:cs typeface="Consolas"/>
+              </a:rPr>
+              <a:t>FROM ACTIVE DATABASE</a:t>
+            </a:r>
+            <a:r>
+              <a:rPr sz="1600" b="0">
+                <a:solidFill>
+                  <a:srgbClr val="222222"/>
+                </a:solidFill>
+                <a:latin typeface="맑은 고딕"/>
+              </a:rPr>
+              <a:t>는 백업 없이 운영 중 Primary에서 직접 읽는다. 실패해도 Primary는 무사하다.</a:t>
             </a:r>
           </a:p>
           <a:p>
@@ -14751,7 +15825,45 @@
                 </a:solidFill>
                 <a:latin typeface="맑은 고딕"/>
               </a:rPr>
-              <a:t>•  `PARAMETER_VALUE_CONVERT`가 db_name까지 바꾸므로 `SET DB_NAME='chicago'`로 되돌린다. SET이 이긴다.</a:t>
+              <a:t>•  </a:t>
+            </a:r>
+            <a:r>
+              <a:rPr sz="1600" b="0">
+                <a:solidFill>
+                  <a:srgbClr val="222222"/>
+                </a:solidFill>
+                <a:latin typeface="Consolas"/>
+                <a:cs typeface="Consolas"/>
+              </a:rPr>
+              <a:t>PARAMETER_VALUE_CONVERT</a:t>
+            </a:r>
+            <a:r>
+              <a:rPr sz="1600" b="0">
+                <a:solidFill>
+                  <a:srgbClr val="222222"/>
+                </a:solidFill>
+                <a:latin typeface="맑은 고딕"/>
+              </a:rPr>
+              <a:t>가 db_name까지 바꾸므로 </a:t>
+            </a:r>
+            <a:r>
+              <a:rPr sz="1600" b="0">
+                <a:solidFill>
+                  <a:srgbClr val="222222"/>
+                </a:solidFill>
+                <a:latin typeface="Consolas"/>
+                <a:cs typeface="Consolas"/>
+              </a:rPr>
+              <a:t>SET DB_NAME='chicago'</a:t>
+            </a:r>
+            <a:r>
+              <a:rPr sz="1600" b="0">
+                <a:solidFill>
+                  <a:srgbClr val="222222"/>
+                </a:solidFill>
+                <a:latin typeface="맑은 고딕"/>
+              </a:rPr>
+              <a:t>로 되돌린다. SET이 이긴다.</a:t>
             </a:r>
           </a:p>
           <a:p>
@@ -14783,7 +15895,26 @@
                 </a:solidFill>
                 <a:latin typeface="맑은 고딕"/>
               </a:rPr>
-              <a:t>•  `NOFILENAMECHECK`는 convert와 함께 써야 한다. 단독 사용은 안전장치만 제거한다.</a:t>
+              <a:t>•  </a:t>
+            </a:r>
+            <a:r>
+              <a:rPr sz="1600" b="0">
+                <a:solidFill>
+                  <a:srgbClr val="222222"/>
+                </a:solidFill>
+                <a:latin typeface="Consolas"/>
+                <a:cs typeface="Consolas"/>
+              </a:rPr>
+              <a:t>NOFILENAMECHECK</a:t>
+            </a:r>
+            <a:r>
+              <a:rPr sz="1600" b="0">
+                <a:solidFill>
+                  <a:srgbClr val="222222"/>
+                </a:solidFill>
+                <a:latin typeface="맑은 고딕"/>
+              </a:rPr>
+              <a:t>는 convert와 함께 써야 한다. 단독 사용은 안전장치만 제거한다.</a:t>
             </a:r>
           </a:p>
           <a:p>
@@ -14831,7 +15962,26 @@
                 </a:solidFill>
                 <a:latin typeface="맑은 고딕"/>
               </a:rPr>
-              <a:t>•  성공 조건 셋: rc=0, RMAN-·ORA- 줄 0개, `Finished Duplicate Db`. 실측 418줄 중 413번 줄.</a:t>
+              <a:t>•  성공 조건 셋: rc=0, RMAN-·ORA- 줄 0개, </a:t>
+            </a:r>
+            <a:r>
+              <a:rPr sz="1600" b="0">
+                <a:solidFill>
+                  <a:srgbClr val="222222"/>
+                </a:solidFill>
+                <a:latin typeface="Consolas"/>
+                <a:cs typeface="Consolas"/>
+              </a:rPr>
+              <a:t>Finished Duplicate Db</a:t>
+            </a:r>
+            <a:r>
+              <a:rPr sz="1600" b="0">
+                <a:solidFill>
+                  <a:srgbClr val="222222"/>
+                </a:solidFill>
+                <a:latin typeface="맑은 고딕"/>
+              </a:rPr>
+              <a:t>. 실측 418줄 중 413번 줄.</a:t>
             </a:r>
           </a:p>
           <a:p>
@@ -14863,7 +16013,26 @@
                 </a:solidFill>
                 <a:latin typeface="맑은 고딕"/>
               </a:rPr>
-              <a:t>•  가이드 결함 둘: `CREATE SPFILE FROM MEMORY`는 불필요(ORA-32002), PDB 여는 줄이 누락되어 있다.</a:t>
+              <a:t>•  가이드 결함 둘: </a:t>
+            </a:r>
+            <a:r>
+              <a:rPr sz="1600" b="0">
+                <a:solidFill>
+                  <a:srgbClr val="222222"/>
+                </a:solidFill>
+                <a:latin typeface="Consolas"/>
+                <a:cs typeface="Consolas"/>
+              </a:rPr>
+              <a:t>CREATE SPFILE FROM MEMORY</a:t>
+            </a:r>
+            <a:r>
+              <a:rPr sz="1600" b="0">
+                <a:solidFill>
+                  <a:srgbClr val="222222"/>
+                </a:solidFill>
+                <a:latin typeface="맑은 고딕"/>
+              </a:rPr>
+              <a:t>는 불필요(ORA-32002), PDB 여는 줄이 누락되어 있다.</a:t>
             </a:r>
           </a:p>
           <a:p>
@@ -14895,7 +16064,26 @@
                 </a:solidFill>
                 <a:latin typeface="맑은 고딕"/>
               </a:rPr>
-              <a:t>•  `DBMS_DBCOMP`의 둘째 인자는 디렉터리 객체가 아니라 파일 이름 접두어다. 결과는 dbs 아래에 생긴다.</a:t>
+              <a:t>•  </a:t>
+            </a:r>
+            <a:r>
+              <a:rPr sz="1600" b="0">
+                <a:solidFill>
+                  <a:srgbClr val="222222"/>
+                </a:solidFill>
+                <a:latin typeface="Consolas"/>
+                <a:cs typeface="Consolas"/>
+              </a:rPr>
+              <a:t>DBMS_DBCOMP</a:t>
+            </a:r>
+            <a:r>
+              <a:rPr sz="1600" b="0">
+                <a:solidFill>
+                  <a:srgbClr val="222222"/>
+                </a:solidFill>
+                <a:latin typeface="맑은 고딕"/>
+              </a:rPr>
+              <a:t>의 둘째 인자는 디렉터리 객체가 아니라 파일 이름 접두어다. 결과는 dbs 아래에 생긴다.</a:t>
             </a:r>
           </a:p>
           <a:p>
@@ -15374,7 +16562,17 @@
                 </a:solidFill>
                 <a:latin typeface="맑은 고딕"/>
               </a:rPr>
-              <a:t>•  차이를 만드는 것은 단 한 절, `FOR STANDBY`</a:t>
+              <a:t>•  차이를 만드는 것은 단 한 절, </a:t>
+            </a:r>
+            <a:r>
+              <a:rPr sz="1700" b="0">
+                <a:solidFill>
+                  <a:srgbClr val="222222"/>
+                </a:solidFill>
+                <a:latin typeface="Consolas"/>
+                <a:cs typeface="Consolas"/>
+              </a:rPr>
+              <a:t>FOR STANDBY</a:t>
             </a:r>
           </a:p>
           <a:p>
@@ -16294,7 +17492,26 @@
                 </a:solidFill>
                 <a:latin typeface="맑은 고딕"/>
               </a:rPr>
-              <a:t>•  루트 : 1, 3, 4, 7 — `/Chicago/` 바로 아래</a:t>
+              <a:t>•  루트 : 1, 3, 4, 7 — </a:t>
+            </a:r>
+            <a:r>
+              <a:rPr sz="1700" b="0">
+                <a:solidFill>
+                  <a:srgbClr val="222222"/>
+                </a:solidFill>
+                <a:latin typeface="Consolas"/>
+                <a:cs typeface="Consolas"/>
+              </a:rPr>
+              <a:t>/Chicago/</a:t>
+            </a:r>
+            <a:r>
+              <a:rPr sz="1700" b="0">
+                <a:solidFill>
+                  <a:srgbClr val="222222"/>
+                </a:solidFill>
+                <a:latin typeface="맑은 고딕"/>
+              </a:rPr>
+              <a:t> 바로 아래</a:t>
             </a:r>
           </a:p>
           <a:p>
@@ -16310,7 +17527,17 @@
                 </a:solidFill>
                 <a:latin typeface="맑은 고딕"/>
               </a:rPr>
-              <a:t>•  시드 PDB : 5, 6, 8 — `/Chicago/pdbseed/`</a:t>
+              <a:t>•  시드 PDB : 5, 6, 8 — </a:t>
+            </a:r>
+            <a:r>
+              <a:rPr sz="1700" b="0">
+                <a:solidFill>
+                  <a:srgbClr val="222222"/>
+                </a:solidFill>
+                <a:latin typeface="Consolas"/>
+                <a:cs typeface="Consolas"/>
+              </a:rPr>
+              <a:t>/Chicago/pdbseed/</a:t>
             </a:r>
           </a:p>
           <a:p>
@@ -16326,7 +17553,17 @@
                 </a:solidFill>
                 <a:latin typeface="맑은 고딕"/>
               </a:rPr>
-              <a:t>•  사용자 PDB : 9, 10, 11, 12 — `/Chicago/chicago_pdb1/`</a:t>
+              <a:t>•  사용자 PDB : 9, 10, 11, 12 — </a:t>
+            </a:r>
+            <a:r>
+              <a:rPr sz="1700" b="0">
+                <a:solidFill>
+                  <a:srgbClr val="222222"/>
+                </a:solidFill>
+                <a:latin typeface="Consolas"/>
+                <a:cs typeface="Consolas"/>
+              </a:rPr>
+              <a:t>/Chicago/chicago_pdb1/</a:t>
             </a:r>
           </a:p>
         </p:txBody>

--- a/ADG/05장/5장_PhysicalStandby생성_RMAN_DUPLICATE.pptx
+++ b/ADG/05장/5장_PhysicalStandby생성_RMAN_DUPLICATE.pptx
@@ -50,6 +50,13 @@
     <p:sldId id="298" r:id="rId50"/>
     <p:sldId id="299" r:id="rId51"/>
     <p:sldId id="300" r:id="rId52"/>
+    <p:sldId id="301" r:id="rId53"/>
+    <p:sldId id="302" r:id="rId54"/>
+    <p:sldId id="303" r:id="rId55"/>
+    <p:sldId id="304" r:id="rId56"/>
+    <p:sldId id="305" r:id="rId57"/>
+    <p:sldId id="306" r:id="rId58"/>
+    <p:sldId id="307" r:id="rId59"/>
   </p:sldIdLst>
   <p:sldSz cx="12191695" cy="6858000" type="screen4x3"/>
   <p:notesSz cx="6858000" cy="9144000"/>
@@ -546,7 +553,7 @@
           <a:lstStyle/>
           <a:p>
             <a:r>
-              <a:t>Backup &amp; Recovery 과정에서 이미 DUPLICATE를 다뤘습니다. 명령의 뼈대는 같습니다. 그런데 결과물의 성격이 전혀 다릅니다. 테스트 복제본은 원본과 무관한 별개의 데이터베이스여야 하므로 새 DBID를 받고 RESETLOGS를 합니다. 반면 Standby는 원본과 같은 데이터베이스의 물리적 사본이어야 하므로 DBID가 같아야 하고 RESETLOGS를 하면 안 됩니다. FOR STANDBY 한 절이 이 모든 차이를 만듭니다. 실습에서 양쪽 DBID가 1852041610으로 같은 것을 확인하게 됩니다. 이 값이 다르면 아무리 파일이 똑같아도 Data Guard로 쓸 수 없습니다.</a:t>
+              <a:t>리두에는 그 리두를 만든 데이터베이스의 DBID와 리셋로그 정보가 들어 있습니다. Standby는 자기 DBID와 맞지 않는 리두를 받지 않기 때문에 DBID와 DB_NAME이 Primary와 같아야 합니다. 반대로 Data Guard 구성 안에서 멤버를 구별하는 값은 DB_UNIQUE_NAME이라서, 이 값이 같으면 LOG_ARCHIVE_CONFIG도 전송 목적지도 성립하지 않습니다. 같아야 하는 값과 달라야 하는 값을 표로 나란히 놓고 보면 뒤에 나오는 SET 절에서 무엇을 바꾸는지가 저절로 정리됩니다.</a:t>
             </a:r>
           </a:p>
         </p:txBody>
@@ -616,7 +623,7 @@
           <a:lstStyle/>
           <a:p>
             <a:r>
-              <a:t>처음 스크립트를 보면 가장 이상한 줄입니다. Primary와 같은 값을 왜 굳이 지정하는가. 이유는 자동 치환의 부작용을 막기 위해서입니다. PARAMETER_VALUE_CONVERT는 파라미터 값 안의 chicago라는 문자열을 가리지 않고 boston으로 바꿉니다. db_name도 예외가 아닙니다. 그러면 물리 복제본의 조건이 깨집니다. 그래서 SET으로 원복해 줍니다. 즉 이 한 줄은 안전장치입니다. audit_file_dest와 diagnostic_dest를 따로 SET한 것도 같은 맥락으로, 자동 치환 결과가 의도와 다를 수 있어 명시적으로 못 박은 것입니다.</a:t>
+              <a:t>RMAN 클라이언트는 Primary 호스트, Standby 호스트, 제3의 관리 서버 어디서 실행해도 결과가 같습니다. Active DUPLICATE에서 데이터 파일은 Primary 서버 프로세스와 Standby 서버 프로세스 사이를 직접 흐르고 RMAN 클라이언트를 거치지 않기 때문입니다. 실행 위치는 로그를 어디에 남길지, 작업자가 어디에 접속해 있는지로 정하면 됩니다. 과정 실습은 chicago-srv에서 RMAN을 실행하고 로그를 파일로 남깁니다.</a:t>
             </a:r>
           </a:p>
         </p:txBody>
@@ -686,7 +693,7 @@
           <a:lstStyle/>
           <a:p>
             <a:r>
-              <a:t>규칙 자체는 단순합니다. 앞의 문자열이 경로에 있으면 뒤의 문자열로 바꿉니다. 중요한 것은 뒤에 붙은 하위 디렉터리 구조가 그대로 따라온다는 점입니다. chicago_pdb1이라는 디렉터리 이름은 손대지 않습니다. 그래서 Standby에도 같은 이름의 디렉터리가 필요해집니다. 데이터 파일과 로그의 목적지가 다른 것도 확인해 두십시오. 설치 가이드가 datafile과 onlinelog로 디렉터리를 나눠 두었기 때문에 두 convert의 목적지가 다릅니다. 한쪽만 지정하는 실수가 흔합니다.</a:t>
+              <a:t>orapwd로 같은 비밀번호를 넣어 만들면 될 것 같지만 Data Guard에서는 파일 자체를 복사하는 것이 원칙입니다. 리두 전송 인증은 파일 내용을 기준으로 하기 때문에 비밀번호가 같아도 실패할 수 있습니다. 순서도 중요합니다. RMAN이 auxiliary에 SYS로 원격 접속하려면 Standby에 이미 파일이 있어야 하고, 작업 중에는 RMAN이 Primary 파일로 다시 덮어씁니다. 운영 중 SYS 비밀번호를 바꾸면 이 복사를 다시 해야 전송이 끊기지 않습니다.</a:t>
             </a:r>
           </a:p>
         </p:txBody>
@@ -756,7 +763,7 @@
           <a:lstStyle/>
           <a:p>
             <a:r>
-              <a:t>convert 파라미터와 NOFILENAMECHECK를 모두 뺀 최소 스크립트로 실행한 결과입니다. 먼저 봐야 할 것은 세 줄 위의 경고입니다. RMAN이 스스로 변환 규칙을 만들어 썼다는 뜻인데, 만들 재료가 없으니 결국 아무것도 바꾸지 않는 규칙이 되었습니다. 그 결과 auxiliary 파일 경로가 Primary 경로 그대로가 되었고, 이름 충돌 검사가 이를 잡았습니다. 경로에 Chicago가 찍혀 있다는 것이 결정적 증거입니다. 같은 서버였다면 Primary를 덮어썼을 상황이며, RMAN이 막아 준 것입니다.</a:t>
+              <a:t>처음 보는 분들은 파라미터 파일이 두 줄뿐이라는 데서 불안해합니다. 이 인스턴스는 RMAN이 접속할 대상 역할만 하면 되고, DUPLICATE의 SPFILE 절이 Primary의 SPFILE을 가져와 Standby용으로 고친 다음 그 파일로 인스턴스를 다시 띄웁니다. 그래서 여기 적은 값은 곧 사라집니다. DB_NAME은 Primary와 같은 값을 적어 두면 혼동이 적습니다. 공식 교재 예시는 DB_DOMAIN까지 두 줄을 씁니다.</a:t>
             </a:r>
           </a:p>
         </p:txBody>
@@ -826,7 +833,7 @@
           <a:lstStyle/>
           <a:p>
             <a:r>
-              <a:t>이 장에서 가장 위험한 오해입니다. 오류 메시지가 "이름 충돌"이라고 하니 충돌 검사를 끄면 해결될 것 같습니다. 실제로는 정반대입니다. 안전장치만 사라지고 원인은 그대로 남습니다. NOFILENAMECHECK의 올바른 용도는 convert로 경로를 제대로 바꾼 뒤, 두 노드가 같은 디렉터리 구조를 쓰는 상황에서 "이름이 같아 보여도 다른 서버이니 괜찮다"고 알려 주는 것입니다. 원인을 고치는 절이 아니라 정상 상황을 승인하는 절입니다. 오류를 없애는 것과 원인을 고치는 것은 다릅니다.</a:t>
+              <a:t>convert 파라미터를 처음 쓰는 경우 경로를 바꿔 주면 디렉터리도 알아서 생길 거라고 기대하기 쉽지만 그렇지 않습니다. 문자열을 바꿔서 이름을 정할 뿐이고 그 이름의 디렉터리가 없으면 Standby 쪽에서 파일을 만들지 못해 실패합니다. CDB라면 PDB 시드와 PDB마다 하위 디렉터리가 있으니 Primary의 V$DATAFILE 목록을 보고 빠짐없이 만듭니다. 감사 디렉터리가 없으면 인스턴스 기동 단계부터 실패한다는 것도 같이 확인합니다.</a:t>
             </a:r>
           </a:p>
         </p:txBody>
@@ -896,7 +903,7 @@
           <a:lstStyle/>
           <a:p>
             <a:r>
-              <a:t>이번에는 스크립트가 아니라 환경이 원인입니다. 정리 과정에서 datafile/* 로 지워 pdbseed와 chicago_pdb1 디렉터리까지 없앤 상태였습니다. convert가 만든 목적지 경로는 맞는데 그 디렉터리가 없습니다. 오라클은 디렉터리를 만들어 주지 않으므로 그대로 실패합니다. 로그를 보면 성공한 파일과 실패한 파일이 갈리는 지점이 명확합니다. datafile 바로 아래 있던 파일은 성공했고, 하위 디렉터리 아래 있던 파일에서 멈췄습니다. 이 대비가 원인을 그대로 가리킵니다.</a:t>
+              <a:t>3장에서 정적 등록을 설정한 이유가 여기서 드러납니다. NOMOUNT 상태의 인스턴스는 동적 등록이 되더라도 BLOCKED 상태라 원격 접속을 받지 않고 ORA-12528을 돌려줍니다. 정적 등록한 SID_DESC 항목은 상태와 관계없이 접속을 받아 줍니다. 게다가 RMAN은 SPFILE을 만든 다음 auxiliary 인스턴스를 내렸다가 다시 올리는데, 내려간 인스턴스에 다시 붙는 길은 정적 등록뿐입니다. DUPLICATE 전에 원격 SYS 접속을 직접 한 번 해 보면 이런 문제를 미리 걸러 낼 수 있습니다.</a:t>
             </a:r>
           </a:p>
         </p:txBody>
@@ -966,7 +973,7 @@
           <a:lstStyle/>
           <a:p>
             <a:r>
-              <a:t>실무에서 자주 만나는 유형의 불친절한 메시지입니다. 파일을 식별하지 못했다면서 그 파일 이름 자리가 비어 있습니다. 메시지만 보면 아무것도 알 수 없습니다. 그래서 로그를 파일로 남기는 것이 중요합니다. 오류 줄의 바로 앞 줄에 RMAN이 어느 파일을 처리하려 했는지가 남아 있습니다. 화면으로 흘려보냈다면 이 정보를 잃습니다. 로그 파일을 남기고, 오류가 나면 그 줄 번호 앞뒤를 보는 습관이 진단 시간을 크게 줄입니다.</a:t>
+              <a:t>스크립트를 처음 보면 길어서 복잡해 보이지만 구조는 단순합니다. 채널을 할당하는 부분, 무엇을 어떤 방식으로 만들지 정하는 부분, Standby SPFILE을 어떻게 고칠지 정하는 부분, 마지막 옵션으로 나뉩니다. 이 중 실제로 환경마다 달라지는 곳은 SET 절의 값, 특히 경로와 이름입니다. 스크립트를 작성할 때는 Primary 파라미터 목록과 파일 경로 목록을 옆에 띄워 두고 한 줄씩 대조하면서 쓰는 방법을 권합니다.</a:t>
             </a:r>
           </a:p>
         </p:txBody>
@@ -1036,7 +1043,7 @@
           <a:lstStyle/>
           <a:p>
             <a:r>
-              <a:t>오라클 오류 스택은 바깥에서 안쪽으로 쌓입니다. 그래서 읽을 때는 반대로 아래에서 위로 올라갑니다. 가장 바깥의 RMAN-03002는 "Duplicate 명령이 실패했다"는 결론일 뿐 아무 정보가 없습니다. 정보는 안쪽에 있습니다. ORA-17628의 remote Oracle server라는 표현은 특히 유용한데, 그 오류가 Standby 쪽에서 왔다는 방향을 알려 줍니다. Primary 로그만 뒤지고 있으면 원인을 찾을 수 없습니다. 어느 노드를 봐야 하는지가 여기서 정해집니다.</a:t>
+              <a:t>target과 auxiliary라는 이름은 BR 과정의 DUPLICATE와 같습니다. Active DUPLICATE는 두 접속 모두 Oracle Net을 거쳐야 하므로 운영체제 인증으로는 할 수 없습니다. 카탈로그 없이 Primary 컨트롤 파일에 있는 RMAN 메타데이터만으로 충분합니다. auxiliary 채널은 Standby 쪽에서 SPFILE 복원, 컨트롤 파일 생성, 복구를 실제로 수행하는 프로세스라서 하나는 반드시 있어야 합니다. RUN 블록 없이 실행하면 CONFIGURE로 설정해 둔 병렬도가 자동 채널로 쓰입니다.</a:t>
             </a:r>
           </a:p>
         </p:txBody>
@@ -1106,7 +1113,7 @@
           <a:lstStyle/>
           <a:p>
             <a:r>
-              <a:t>실패를 만났을 때 가장 먼저 판단해야 할 것은 언제 막혔느냐입니다. 로그에 output file name 줄이 하나라도 나왔다면 이미 파일을 쓰기 시작한 것이므로, 반쯤 복제된 파일이 남아 있습니다. 그대로 재실행하면 예상치 못한 결과가 나오므로 반드시 지우고 처음부터 해야 합니다. output 줄이 없다면 아무것도 쓰지 않았으니 스크립트만 고쳐 다시 돌리면 됩니다. 이 판단 하나로 복구 절차가 갈립니다.</a:t>
+              <a:t>결과물은 같은데 전송 형태가 두 가지라는 것이 처음에는 낯설 수 있습니다. 예전 방식인 push는 target 쪽 채널이 데이터 파일을 이미지 사본으로 Standby에 보내고, 12c에서 들어온 pull은 Standby 쪽 채널이 target에서 백업 셋을 받아 가며 복원합니다. pull 방식이어야 압축과 멀티섹션을 쓸 수 있어서 큰 데이터베이스는 대개 pull로 갑니다. 로그에 backup set이라는 말이 보이면 pull 방식으로 돌고 있는 것입니다.</a:t>
             </a:r>
           </a:p>
         </p:txBody>
@@ -1176,7 +1183,7 @@
           <a:lstStyle/>
           <a:p>
             <a:r>
-              <a:t>418줄짜리 로그를 처음부터 읽을 필요가 없습니다. 세 가지만 확인하면 됩니다. 먼저 종료 코드입니다. 실패한 실행에서는 rc=1이었습니다. 그 다음 grep으로 오류 줄이 하나도 없는지 봅니다. 성공한 실행에서는 RMAN-이나 ORA-로 시작하는 줄이 한 줄도 없었습니다. 마지막으로 Finished Duplicate Db가 있는지 봅니다. 이 세 가지가 5초면 끝납니다. 오류가 있을 때만 그 줄 번호 앞뒤 30줄을 읽습니다. 로그 전체를 읽는 것은 마지막 수단입니다.</a:t>
+              <a:t>PARAMETER_VALUE_CONVERT는 편리하지만 문자열을 기계적으로 바꾸기만 합니다. Primary에서 Standby를 가리키려고 boston이라고 적어 둔 값은 바꿀 대상이 없어서 그대로 남고, 결과적으로 Standby의 FAL_SERVER가 자기 자신을 가리키게 됩니다. 이런 값은 SET 절에서 chicago로 다시 지정해야 합니다. 대소문자도 구분해서 경로에 Chicago처럼 대문자가 섞여 있으면 바뀌지 않습니다. 파일 경로 변환은 이 치환에 기대지 말고 SET으로 따로 적습니다.</a:t>
             </a:r>
           </a:p>
         </p:txBody>
@@ -1246,7 +1253,7 @@
           <a:lstStyle/>
           <a:p>
             <a:r>
-              <a:t>로그의 골격을 알아 두면 오류가 어느 단계에서 났는지 바로 가늠할 수 있습니다. 전반부는 준비 작업이고, 중반부의 데이터 파일 전송이 대부분을 차지합니다. 파일 하나당 input과 output 두 줄이 나오는데, 채널 두 개가 병렬로 도니 순서가 뒤섞여 보입니다. 이것은 정상입니다. 짝이 맞는지만 확인하면 됩니다. 후반부의 DORECOVER 구간에서는 아카이브 두 개를 적용하고 지우는데, 실측에서 arch1_56과 arch1_57이 처리되고 Deleted 2 objects가 남았습니다.</a:t>
+              <a:t>SET 절에는 Primary와 달라야 하는 값만 적습니다. 빠뜨렸을 때 어떻게 되는지를 같이 보면 각 항목이 왜 필요한지 이해가 쉽습니다. DB_UNIQUE_NAME을 빼면 Primary와 같은 이름의 Standby가 생겨 구성이 성립하지 않고, CONTROL_FILES를 빼면 Primary 경로에 컨트롤 파일을 만들려다 실패합니다. LOG_ARCHIVE_DEST_2는 지금 당장은 쓰이지 않지만 나중에 역할이 바뀌어 boston이 Primary가 됐을 때 chicago로 보낼 목적지입니다. 필요 없는 값은 RESET으로 지울 수도 있습니다.</a:t>
             </a:r>
           </a:p>
         </p:txBody>
@@ -1316,7 +1323,7 @@
           <a:lstStyle/>
           <a:p>
             <a:r>
-              <a:t>예전에는 Standby를 만들려면 먼저 Primary 백업을 받고, 그 백업을 Standby 서버로 옮기고, 그 다음 복원해야 했습니다. FROM ACTIVE DATABASE는 이 과정을 하나로 합칩니다. 네트워크를 통해 Primary의 파일을 직접 읽어 Standby에 씁니다. 실무에서 이 방식의 가장 큰 가치는 재시도의 자유입니다. Primary는 읽기 대상일 뿐이므로 몇 번을 실패해도 손상되지 않습니다. 이 장에서 실제로 두 번 실패하는데, 그 동안에도 chicago는 정상 운영되었습니다. 부담 없이 시도하고 실패에서 배울 수 있다는 뜻입니다.</a:t>
+              <a:t>BR 과정 17장에서 DUPLICATE TO 새이름 형태를 실습했다면 채널 할당이나 파일 이름 변환은 이미 익숙합니다. 차이는 마지막 단계에 있습니다. 일반 복제는 OPEN RESETLOGS로 새 incarnation을 시작하고 새 DBID를 받는 순간 원본 리두와 인연이 끊깁니다. FOR STANDBY는 그 단계를 하지 않고 마운트 상태로 멈춰서 이후 리두를 계속 받을 수 있는 상태로 남습니다. 명령은 비슷해 보여도 관심사가 복제 완료에서 복제 이후의 동기화로 옮겨 간 것으로 이해하면 됩니다.</a:t>
             </a:r>
           </a:p>
         </p:txBody>
@@ -1386,7 +1393,7 @@
           <a:lstStyle/>
           <a:p>
             <a:r>
-              <a:t>스크립트 마지막의 sql channel sby 절이 이 일을 합니다. 복제가 끝나자마자 Standby에서 실시간 적용을 시작합니다. 그래서 복제 직후 V$MANAGED_STANDBY를 보면 MRP0이 이미 WAIT_FOR_LOG 상태로 대기하고 있습니다. 시퀀스 58을 기다린다는 것은 57번까지는 DORECOVER로 적용을 마쳤다는 뜻입니다. 이 절이 없으면 복제 후 수동으로 MRP를 기동해야 하고, 그 사이의 시간만큼 갭이 생깁니다. 작아 보이는 한 줄이지만 절차를 하나 줄여 줍니다.</a:t>
+              <a:t>복사가 한 시간 걸리면 그 한 시간 동안 Primary는 계속 바뀌니 첫 파일과 마지막 파일의 시점이 다릅니다. DORECOVER를 주면 RMAN이 그 사이의 아카이브 로그로 복구까지 해 두고, 빼면 이후 Redo Apply가 그 일을 넘겨받습니다. NOFILENAMECHECK는 별도 호스트에 똑같은 경로로 만들 때 필요한 옵션입니다. 경로를 바꾸는 방식에서는 원래 필요 없지만 습관처럼 넣는 경우가 많은데, 그러면 변환에서 빠진 파일을 RMAN이 알려 주지 않습니다. 같은 호스트 구성에서는 절대 쓰지 않습니다.</a:t>
             </a:r>
           </a:p>
         </p:txBody>
@@ -1456,7 +1463,7 @@
           <a:lstStyle/>
           <a:p>
             <a:r>
-              <a:t>복제가 끝나면 Standby가 완성된 것처럼 보이지만 아직 한 단계가 남았습니다. MOUNTED 상태에서는 리두 적용은 되지만 조회가 불가능합니다. Active Data Guard는 적용하면서 동시에 조회할 수 있는 상태를 말하므로, 데이터베이스를 READ ONLY로 열어야 합니다. 순서는 적용 중지, 재기동, READ ONLY 열기, PDB 열기, 적용 재개입니다. 이 다섯 단계를 마치면 OPEN_MODE가 READ ONLY WITH APPLY로 바뀝니다. 이 한 문장이 ADG의 표식입니다.</a:t>
+              <a:t>채널을 늘리면 빨라지는 것은 파일이 여러 개일 때 이야기입니다. 빅파일 테이블스페이스처럼 큰 파일 하나는 채널을 열 개 두어도 한 채널이 끝까지 붙잡고 있어서, SECTION SIZE로 파일을 잘게 나눠야 병렬 효과가 납니다. 압축은 원거리 Standby처럼 대역이 좁을 때 쓸모가 크고 대신 양쪽 CPU를 씁니다. 라이선스도 확인해야 합니다. RMAN의 BASIC 압축은 추가 옵션 없이 쓸 수 있지만 LOW, MEDIUM, HIGH는 Advanced Compression 옵션이 필요합니다.</a:t>
             </a:r>
           </a:p>
         </p:txBody>
@@ -1526,7 +1533,7 @@
           <a:lstStyle/>
           <a:p>
             <a:r>
-              <a:t>설치 가이드를 그대로 따라가면 두 곳에서 걸립니다. 첫째, spfile을 만들라는 단계가 있는데 실행하면 ORA-32002가 납니다. DUPLICATE의 SPFILE 절이 이미 만들었기 때문에 처음부터 불필요한 단계입니다. 오류를 보고 복제가 잘못됐나 하며 되돌아가지 않는 것이 중요합니다. 둘째, PDB를 여는 줄이 없습니다. 이쪽이 더 까다로운데, 상태 표시상으로는 READ ONLY WITH APPLY로 정상인데도 정작 사용자 데이터를 조회할 수 없습니다. 문제가 드러나지 않는 유형의 누락입니다.</a:t>
+              <a:t>규칙은 간단합니다. 파일 이름에서 앞 문자열을 찾아 뒤 문자열로 바꾼 결과가 Standby 파일 이름입니다. 문제는 부분 문자열로 비교한다는 데서 생깁니다. oradata/chicago를 바꾸는 규칙은 oradata/chicago_old라는 디렉터리도 함께 바꿔 버리므로, 끝의 슬래시까지 넣어 경계를 분명히 하는 편이 안전합니다. 데이터 파일이 여러 마운트 지점에 흩어져 있으면 쌍도 그만큼 적고, 더 구체적인 경로를 앞에 둡니다.</a:t>
             </a:r>
           </a:p>
         </p:txBody>
@@ -1596,7 +1603,7 @@
           <a:lstStyle/>
           <a:p>
             <a:r>
-              <a:t>실습 01에서 기록한 기준값과 하나씩 맞춰 보면 검증이 끝납니다. 눈여겨볼 것은 SRL입니다. 4장에서 Primary에 만들어 둔 SRL 네 그룹이 그대로 복제되어 왔습니다. Standby에서 따로 만든 것이 아닙니다. 4장에서 미리 만들어 둔 보람이 여기서 나옵니다. 만약 그때 만들지 않았다면 지금 Standby에 수동으로 만들어야 했을 것입니다. 준비 순서가 왜 그랬는지가 여기서 드러납니다.</a:t>
+              <a:t>convert 파라미터를 DUPLICATE 때만 쓰는 값으로 생각하면 나중에 곤란해집니다. SET 절로 넣은 값은 Standby SPFILE에 남아서, Primary에 데이터 파일이 추가될 때마다 Standby 쪽 이름을 정하는 데 계속 쓰입니다. 이 동작은 8장에서 자세히 봅니다. 그리고 역할이 바뀌어 chicago가 Standby가 되면 그때는 chicago의 convert 값이 쓰이므로, Primary에도 방향을 뒤집은 값을 미리 넣어 둡니다.</a:t>
             </a:r>
           </a:p>
         </p:txBody>
@@ -1666,7 +1673,7 @@
           <a:lstStyle/>
           <a:p>
             <a:r>
-              <a:t>상태 조회만으로는 실제로 리두가 흐르는지 알 수 없습니다. Primary에서 로그를 강제로 넘겨 전송을 유발한 뒤 Standby를 보는 것이 확실합니다. 두 지연이 모두 0이고, MRP0의 상태가 대기에서 적용 중으로 바뀌고, 시퀀스가 하나 올라갑니다. 세 가지가 함께 움직여야 정상입니다. 정지된 화면을 보는 것과 움직이는 것을 보는 것은 다릅니다. 운영에서도 문제를 의심할 때 이 방법으로 확인합니다.</a:t>
+              <a:t>컨트롤 파일은 convert 규칙의 대상이 아니어서 CONTROL_FILES를 꼭 SET 절에 적어야 합니다. 온라인 로그는 조금 특이합니다. DUPLICATE가 끝난 직후에는 컨트롤 파일에 정의만 있고 실제 파일은 없다가, Redo Apply를 처음 시작하면 지워진 상태로 새로 만들어집니다. 이때 LOG_FILE_NAME_CONVERT로 정한 이름이 쓰입니다. SRL은 Primary에 미리 만들어 두었다면 DUPLICATE가 같은 개수와 크기로 만들어 주므로, 4장에서 Primary에 SRL을 먼저 만든 이유가 여기 있습니다.</a:t>
             </a:r>
           </a:p>
         </p:txBody>
@@ -1736,7 +1743,7 @@
           <a:lstStyle/>
           <a:p>
             <a:r>
-              <a:t>lost write는 디스크가 쓴 척만 하고 실제로는 쓰지 않은 상태입니다. 데이터베이스는 성공했다고 알고 있으므로 오류도 나지 않습니다. 시간이 한참 지나 그 블록을 읽을 때에야 드러나며, 그때는 이미 복구가 어렵습니다. DBCOMP는 Primary와 Standby의 같은 블록을 맞춰 보면서 이런 상태를 찾아냅니다. 실무에서는 정기 점검 항목으로 넣거나, 스토리지 장애가 의심될 때 씁니다. 구축 직후에 한 번 돌려 기준을 잡아 두는 것도 좋습니다.</a:t>
+              <a:t>convert 문자열은 ASM 디스크 그룹 이름에도 그대로 적용됩니다. Primary가 +DATA를 쓰고 Standby가 +SBDAT를 쓰면 그 두 문자열을 쌍으로 적으면 됩니다. OMF를 쓰는 Standby라면 이야기가 달라져서 convert 파라미터를 아예 설정하지 않고, DB_CREATE_FILE_DEST 아래에 오라클이 이름을 만들어 줍니다. 디렉터리를 일일이 맞출 필요가 없다는 장점이 있고, 두 방식의 장단점은 다음 장에서 나란히 비교합니다.</a:t>
             </a:r>
           </a:p>
         </p:txBody>
@@ -1806,7 +1813,7 @@
           <a:lstStyle/>
           <a:p>
             <a:r>
-              <a:t>실습에서 디렉터리 객체 DBCOMP_DIR을 만들고 /u03/dbcomp를 가리키게 한 뒤 그 이름을 넘겼습니다. 프로시저는 성공했는데 디렉터리는 비어 있었습니다. 파일은 $ORACLE_HOME/dbs 아래에 DBCOMP_DIR과 DBCOMP_DIR_boston_7이라는 이름으로 생겨 있었습니다. 문자열을 그대로 파일 이름으로 쓴 것입니다. 디렉터리 객체는 아무 관련이 없었습니다. 이름 규칙을 알아 두면 파일을 찾기 쉽습니다. 뒤에 붙는 숫자는 데이터 파일 번호이고, 그 앞은 상대 데이터베이스의 DB_UNIQUE_NAME입니다.</a:t>
+              <a:t>RMAN은 DUPLICATE를 받으면 내부적으로 메모리 스크립트를 여러 개 만들어 순서대로 실행합니다. 이 순서를 알면 로그가 길어도 지금 어디쯤인지 금방 찾을 수 있습니다. 앞쪽에서 SPFILE을 만들고 인스턴스를 재기동하는데, 정적 등록이 없으면 이 지점에서 멈춥니다. 컨트롤 파일은 계속 바뀌는 운영 파일 대신 스냅샷 파일을 떠서 그걸로 만듭니다. 끝나면 Standby는 마운트 상태로 남고 Redo Apply는 아직 돌지 않습니다.</a:t>
             </a:r>
           </a:p>
         </p:txBody>
@@ -1876,7 +1883,7 @@
           <a:lstStyle/>
           <a:p>
             <a:r>
-              <a:t>앞의 두 가지는 오류가 나므로 바로 알 수 있습니다. 문제는 세 번째입니다. 존재하지 않는 디렉터리 객체 이름을 주어도 오류가 나지 않습니다. 두 번째 인자가 디렉터리 객체가 아니라 파일 이름이기 때문입니다. 디렉터리 객체를 넣었다고 믿은 사람은 그 디렉터리를 들여다보고 아무것도 없는 것을 확인한 뒤 문제가 없었나 보다 하고 넘어갑니다. 실제로는 보고서를 엉뚱한 곳에서 찾고 있었을 뿐입니다. 소리를 내는 오류보다 조용한 실패가 훨씬 다루기 어렵습니다.</a:t>
+              <a:t>DUPLICATE가 실패하면 화면에 RMAN 오류가 여러 줄 쌓이는데, 맨 위의 RMAN-03002와 RMAN-05501은 복제가 실패했다는 결과만 말해 줍니다. 원인은 가장 아래쪽 ORA 오류에 있으니 거꾸로 올라가며 읽습니다. 그리고 바로 앞에 찍힌 메모리 스크립트 내용을 보면 몇 단계에서 멈췄는지가 보입니다. 채널이 여러 개면 파일 복사 로그의 input과 output 줄이 섞여 나오는 것이 정상이므로 파일 번호로 짝을 맞춰 읽습니다.</a:t>
             </a:r>
           </a:p>
         </p:txBody>
@@ -1946,7 +1953,7 @@
           <a:lstStyle/>
           <a:p>
             <a:r>
-              <a:t>보고서에는 열이 열 개 넘게 나오지만 판정은 세 열로 끝납니다. DIFFPAIR가 왜 결정적인지 이해해 두십시오. 버전이 같다는 것은 같은 시점의 같은 블록이라는 뜻입니다. 그런데 내용이 다르다면 논리적으로 있을 수 없는 상태입니다. 이것이 0이 아니면 데이터 불일치이며 반드시 원인을 찾아야 합니다. LWLOC와 LWRMT는 각각 어느 쪽에서 lost write가 일어났는지까지 알려 줍니다. 실습 환경의 system01.dbf 비교에서는 세 열 모두 모든 행에서 0이었습니다.</a:t>
+              <a:t>처음 보는 오류 번호를 하나하나 외우기보다 어느 단계의 문제인지 먼저 나누는 쪽이 진단이 빠릅니다. 접속 오류라면 패스워드 파일과 리스너를, 파일 이름 충돌이라면 SET 절의 convert 값을, 원격 서버 오류라면 Standby의 디렉터리와 alert 로그를 보는 식으로 확인할 곳이 정해집니다. 실패 대부분은 명령 자체보다 준비 단계의 빈틈에서 나오기 때문에, 5.4절의 시작 전 확인 목록이 사실상 예방책 역할을 합니다.</a:t>
             </a:r>
           </a:p>
         </p:txBody>
@@ -2016,7 +2023,7 @@
           <a:lstStyle/>
           <a:p>
             <a:r>
-              <a:t>보고서를 처음 보면 0이 아닌 숫자마다 불안해집니다. 대부분은 정상입니다. DIFFV는 버전이 다른 블록인데, 비교하는 동안에도 Primary는 계속 돌아가므로 Standby가 아직 적용하지 않은 변경분이 있으면 당연히 생깁니다. apply lag이 0이어도 마이크로초 단위 시차는 존재합니다. SAMEV와 SAMEV&amp;C의 차이는 내용이 같아도 체크섬이 다를 수 있기 때문입니다. CORR가 잡히면 한 번의 결과로 단정하지 말고 접두어를 바꿔 다시 비교하거나 RMAN VALIDATE로 교차 확인합니다.</a:t>
+              <a:t>ORA-17628은 원격 서버가 돌려준 오류를 전달받았다는 표시입니다. Active DUPLICATE에서 파일을 만드는 쪽은 Standby이니 Primary 로그만 뒤지면 원인을 찾지 못하고, Standby alert 로그와 디렉터리를 봐야 합니다. RMAN-05001은 출력되는 파일 목록의 범위가 단서가 됩니다. 일부 파일만 나오면 그 파일들이 있는 경로의 쌍이 빠진 것이고, 전부 나오면 규칙이 통째로 적용되지 않은 것이라 대소문자나 SET 누락부터 의심합니다.</a:t>
             </a:r>
           </a:p>
         </p:txBody>
@@ -2086,7 +2093,7 @@
           <a:lstStyle/>
           <a:p>
             <a:r>
-              <a:t>복제가 잘 됐는지 확인하려면 기준이 있어야 합니다. 복제한 뒤에 Standby만 들여다봐서는 그것이 옳은지 알 수 없습니다. 그래서 실습 01에서 Primary의 상태를 먼저 기록합니다. 데이터 파일 번호 목록, 각 파일의 크기, 로그 그룹 수, PDB 이름까지 적어 둡니다. 실습 06에서 이 목록과 Standby를 한 줄씩 대조하면 검증이 기계적인 작업이 됩니다. 무엇을 봐야 할지 고민할 필요가 없어집니다. 참고로 파일 번호 2번이 없는데, CDB에서는 정상입니다.</a:t>
+              <a:t>어떤 생성 방법을 쓰든 Standby 호스트에 이 다섯 가지가 갖춰지면 됩니다. 온라인 상태에서 복사한 데이터 파일은 파일마다 SCN이 달라 그대로는 열 수 없는 퍼지 상태이고, 리두를 적용해야 일관성이 맞습니다. 수동 방식에서는 이 재료를 하나씩 직접 만들고 옮기고, RMAN DUPLICATE는 한 명령으로 전부 만들어 줍니다. 방법을 비교할 때 이 목록을 기준으로 누가 무엇을 만들어 주는지 보면 차이가 선명해집니다.</a:t>
             </a:r>
           </a:p>
         </p:txBody>
@@ -2156,7 +2163,357 @@
           <a:lstStyle/>
           <a:p>
             <a:r>
-              <a:t>두 번째 실패는 실수가 아니라 이 방식의 구조적 약점입니다. convert 규칙은 문자열을 바꿀 뿐 그 경로가 존재하는지 확인하지 않습니다. 그래서 사람이 미리 디렉터리를 만들어 두어야 하고, 이 부담은 PDB를 추가할 때마다 반복됩니다. STANDBY_FILE_MANAGEMENT가 AUTO여도 디렉터리까지 만들어 주지는 않습니다. 6장의 OMF 방식은 DB_CREATE_FILE_DEST 하나만 지정하면 오라클이 디렉터리 구조와 파일 이름을 스스로 만듭니다. 대신 경로와 이름을 사람이 정할 수 없다는 대가가 따릅니다.</a:t>
+              <a:t>실패한 DUPLICATE는 만들다 만 파일을 그대로 두고 끝납니다. 다시 하려면 Standby 인스턴스를 내리고 데이터 파일, 컨트롤 파일, SPFILE을 지운 다음 처음 상태로 돌아가 NOMOUNT부터 반복합니다. SPFILE을 지우지 않으면 다음 기동 때 오라클이 PFILE보다 SPFILE을 먼저 찾아 읽어서 잘못된 값으로 뜰 수 있으니, 재기동 명령에는 PFILE 경로를 명시합니다. Primary는 읽히기만 하므로 여러 번 다시 해도 운영 데이터에는 영향이 없습니다.</a:t>
+            </a:r>
+          </a:p>
+        </p:txBody>
+      </p:sp>
+      <p:sp>
+        <p:nvSpPr>
+          <p:cNvPr id="4" name="Slide Number Placeholder 3"/>
+          <p:cNvSpPr>
+            <a:spLocks noGrp="1"/>
+          </p:cNvSpPr>
+          <p:nvPr>
+            <p:ph type="sldNum" idx="5" sz="quarter"/>
+          </p:nvPr>
+        </p:nvSpPr>
+        <p:spPr/>
+      </p:sp>
+    </p:spTree>
+  </p:cSld>
+  <p:clrMapOvr>
+    <a:masterClrMapping/>
+  </p:clrMapOvr>
+</p:notes>
+</file>
+
+<file path=ppt/notesSlides/notesSlide31.xml><?xml version="1.0" encoding="utf-8"?>
+<p:notes xmlns:a="http://schemas.openxmlformats.org/drawingml/2006/main" xmlns:p="http://schemas.openxmlformats.org/presentationml/2006/main" xmlns:r="http://schemas.openxmlformats.org/officeDocument/2006/relationships">
+  <p:cSld>
+    <p:spTree>
+      <p:nvGrpSpPr>
+        <p:cNvPr id="1" name=""/>
+        <p:cNvGrpSpPr/>
+        <p:nvPr/>
+      </p:nvGrpSpPr>
+      <p:grpSpPr>
+        <a:xfrm>
+          <a:off x="0" y="0"/>
+          <a:ext cx="0" cy="0"/>
+          <a:chOff x="0" y="0"/>
+          <a:chExt cx="0" cy="0"/>
+        </a:xfrm>
+      </p:grpSpPr>
+      <p:sp>
+        <p:nvSpPr>
+          <p:cNvPr id="2" name="Slide Image Placeholder 1"/>
+          <p:cNvSpPr>
+            <a:spLocks noGrp="1"/>
+          </p:cNvSpPr>
+          <p:nvPr>
+            <p:ph type="sldImg" idx="2"/>
+          </p:nvPr>
+        </p:nvSpPr>
+        <p:spPr/>
+      </p:sp>
+      <p:sp>
+        <p:nvSpPr>
+          <p:cNvPr id="3" name="Notes Placeholder 2"/>
+          <p:cNvSpPr>
+            <a:spLocks noGrp="1"/>
+          </p:cNvSpPr>
+          <p:nvPr>
+            <p:ph type="body" idx="3" sz="quarter"/>
+          </p:nvPr>
+        </p:nvSpPr>
+        <p:spPr/>
+        <p:txBody>
+          <a:bodyPr/>
+          <a:lstStyle/>
+          <a:p>
+            <a:r>
+              <a:t>Finished Duplicate Db가 나왔다고 끝난 것이 아니고, 먼저 V$DATABASE 한 줄로 정체성을 확인합니다. DBID가 Primary와 다르면 FOR STANDBY 없이 일반 복제를 한 것이니 뒤의 확인은 의미가 없습니다. 생성 후 SPFILE을 만들려다 ORA-32002를 만나는 경우가 있는데, DUPLICATE의 SPFILE 절이 이미 SPFILE을 만들고 그걸로 재기동해 두었기 때문입니다. SHOW PARAMETER spfile로 경로를 확인하면 충분하고 다시 만들 필요는 없습니다.</a:t>
+            </a:r>
+          </a:p>
+        </p:txBody>
+      </p:sp>
+      <p:sp>
+        <p:nvSpPr>
+          <p:cNvPr id="4" name="Slide Number Placeholder 3"/>
+          <p:cNvSpPr>
+            <a:spLocks noGrp="1"/>
+          </p:cNvSpPr>
+          <p:nvPr>
+            <p:ph type="sldNum" idx="5" sz="quarter"/>
+          </p:nvPr>
+        </p:nvSpPr>
+        <p:spPr/>
+      </p:sp>
+    </p:spTree>
+  </p:cSld>
+  <p:clrMapOvr>
+    <a:masterClrMapping/>
+  </p:clrMapOvr>
+</p:notes>
+</file>
+
+<file path=ppt/notesSlides/notesSlide32.xml><?xml version="1.0" encoding="utf-8"?>
+<p:notes xmlns:a="http://schemas.openxmlformats.org/drawingml/2006/main" xmlns:p="http://schemas.openxmlformats.org/presentationml/2006/main" xmlns:r="http://schemas.openxmlformats.org/officeDocument/2006/relationships">
+  <p:cSld>
+    <p:spTree>
+      <p:nvGrpSpPr>
+        <p:cNvPr id="1" name=""/>
+        <p:cNvGrpSpPr/>
+        <p:nvPr/>
+      </p:nvGrpSpPr>
+      <p:grpSpPr>
+        <a:xfrm>
+          <a:off x="0" y="0"/>
+          <a:ext cx="0" cy="0"/>
+          <a:chOff x="0" y="0"/>
+          <a:chExt cx="0" cy="0"/>
+        </a:xfrm>
+      </p:grpSpPr>
+      <p:sp>
+        <p:nvSpPr>
+          <p:cNvPr id="2" name="Slide Image Placeholder 1"/>
+          <p:cNvSpPr>
+            <a:spLocks noGrp="1"/>
+          </p:cNvSpPr>
+          <p:nvPr>
+            <p:ph type="sldImg" idx="2"/>
+          </p:nvPr>
+        </p:nvSpPr>
+        <p:spPr/>
+      </p:sp>
+      <p:sp>
+        <p:nvSpPr>
+          <p:cNvPr id="3" name="Notes Placeholder 2"/>
+          <p:cNvSpPr>
+            <a:spLocks noGrp="1"/>
+          </p:cNvSpPr>
+          <p:nvPr>
+            <p:ph type="body" idx="3" sz="quarter"/>
+          </p:nvPr>
+        </p:nvSpPr>
+        <p:spPr/>
+        <p:txBody>
+          <a:bodyPr/>
+          <a:lstStyle/>
+          <a:p>
+            <a:r>
+              <a:t>생성 전에 Primary에서 뽑아 둔 파일 목록과 파라미터 값을 여기서 기준값으로 씁니다. 데이터 파일은 개수와 번호가 같고 경로만 규칙대로 바뀌었는지 봅니다. SRL이 보이지 않으면 Primary에 SRL이 없었던 것이므로 Standby에 직접 추가합니다. 파라미터는 PARAMETER_VALUE_CONVERT가 엉뚱하게 바꿨거나 바꾸지 못한 값이 남기 쉬운 FAL_SERVER와 LOG_ARCHIVE_DEST_1, LOG_ARCHIVE_DEST_2를 특히 꼼꼼히 봅니다.</a:t>
+            </a:r>
+          </a:p>
+        </p:txBody>
+      </p:sp>
+      <p:sp>
+        <p:nvSpPr>
+          <p:cNvPr id="4" name="Slide Number Placeholder 3"/>
+          <p:cNvSpPr>
+            <a:spLocks noGrp="1"/>
+          </p:cNvSpPr>
+          <p:nvPr>
+            <p:ph type="sldNum" idx="5" sz="quarter"/>
+          </p:nvPr>
+        </p:nvSpPr>
+        <p:spPr/>
+      </p:sp>
+    </p:spTree>
+  </p:cSld>
+  <p:clrMapOvr>
+    <a:masterClrMapping/>
+  </p:clrMapOvr>
+</p:notes>
+</file>
+
+<file path=ppt/notesSlides/notesSlide33.xml><?xml version="1.0" encoding="utf-8"?>
+<p:notes xmlns:a="http://schemas.openxmlformats.org/drawingml/2006/main" xmlns:p="http://schemas.openxmlformats.org/presentationml/2006/main" xmlns:r="http://schemas.openxmlformats.org/officeDocument/2006/relationships">
+  <p:cSld>
+    <p:spTree>
+      <p:nvGrpSpPr>
+        <p:cNvPr id="1" name=""/>
+        <p:cNvGrpSpPr/>
+        <p:nvPr/>
+      </p:nvGrpSpPr>
+      <p:grpSpPr>
+        <a:xfrm>
+          <a:off x="0" y="0"/>
+          <a:ext cx="0" cy="0"/>
+          <a:chOff x="0" y="0"/>
+          <a:chExt cx="0" cy="0"/>
+        </a:xfrm>
+      </p:grpSpPr>
+      <p:sp>
+        <p:nvSpPr>
+          <p:cNvPr id="2" name="Slide Image Placeholder 1"/>
+          <p:cNvSpPr>
+            <a:spLocks noGrp="1"/>
+          </p:cNvSpPr>
+          <p:nvPr>
+            <p:ph type="sldImg" idx="2"/>
+          </p:nvPr>
+        </p:nvSpPr>
+        <p:spPr/>
+      </p:sp>
+      <p:sp>
+        <p:nvSpPr>
+          <p:cNvPr id="3" name="Notes Placeholder 2"/>
+          <p:cNvSpPr>
+            <a:spLocks noGrp="1"/>
+          </p:cNvSpPr>
+          <p:nvPr>
+            <p:ph type="body" idx="3" sz="quarter"/>
+          </p:nvPr>
+        </p:nvSpPr>
+        <p:spPr/>
+        <p:txBody>
+          <a:bodyPr/>
+          <a:lstStyle/>
+          <a:p>
+            <a:r>
+              <a:t>Standby가 없는 동안 Primary의 전송 목적지를 DEFER로 두었다면 이제 ENABLE로 바꾸고 로그 전환을 한 번 일으켜 상태가 VALID인지 봅니다. 그다음 Standby에서 Redo Apply를 기동합니다. 기동 명령의 옵션, 실시간 적용, 갭 해소는 7장에서 자세히 다룹니다. 라이선스는 여기서 확실히 해 둡니다. 적용을 켠 채 READ ONLY로 여는 실시간 조회는 Active Data Guard 옵션이 있어야 하므로, 옵션이 없는 사이트라면 생성 직후 습관처럼 OPEN하지 않도록 합니다.</a:t>
+            </a:r>
+          </a:p>
+        </p:txBody>
+      </p:sp>
+      <p:sp>
+        <p:nvSpPr>
+          <p:cNvPr id="4" name="Slide Number Placeholder 3"/>
+          <p:cNvSpPr>
+            <a:spLocks noGrp="1"/>
+          </p:cNvSpPr>
+          <p:nvPr>
+            <p:ph type="sldNum" idx="5" sz="quarter"/>
+          </p:nvPr>
+        </p:nvSpPr>
+        <p:spPr/>
+      </p:sp>
+    </p:spTree>
+  </p:cSld>
+  <p:clrMapOvr>
+    <a:masterClrMapping/>
+  </p:clrMapOvr>
+</p:notes>
+</file>
+
+<file path=ppt/notesSlides/notesSlide34.xml><?xml version="1.0" encoding="utf-8"?>
+<p:notes xmlns:a="http://schemas.openxmlformats.org/drawingml/2006/main" xmlns:p="http://schemas.openxmlformats.org/presentationml/2006/main" xmlns:r="http://schemas.openxmlformats.org/officeDocument/2006/relationships">
+  <p:cSld>
+    <p:spTree>
+      <p:nvGrpSpPr>
+        <p:cNvPr id="1" name=""/>
+        <p:cNvGrpSpPr/>
+        <p:nvPr/>
+      </p:nvGrpSpPr>
+      <p:grpSpPr>
+        <a:xfrm>
+          <a:off x="0" y="0"/>
+          <a:ext cx="0" cy="0"/>
+          <a:chOff x="0" y="0"/>
+          <a:chExt cx="0" cy="0"/>
+        </a:xfrm>
+      </p:grpSpPr>
+      <p:sp>
+        <p:nvSpPr>
+          <p:cNvPr id="2" name="Slide Image Placeholder 1"/>
+          <p:cNvSpPr>
+            <a:spLocks noGrp="1"/>
+          </p:cNvSpPr>
+          <p:nvPr>
+            <p:ph type="sldImg" idx="2"/>
+          </p:nvPr>
+        </p:nvSpPr>
+        <p:spPr/>
+      </p:sp>
+      <p:sp>
+        <p:nvSpPr>
+          <p:cNvPr id="3" name="Notes Placeholder 2"/>
+          <p:cNvSpPr>
+            <a:spLocks noGrp="1"/>
+          </p:cNvSpPr>
+          <p:nvPr>
+            <p:ph type="body" idx="3" sz="quarter"/>
+          </p:nvPr>
+        </p:nvSpPr>
+        <p:spPr/>
+        <p:txBody>
+          <a:bodyPr/>
+          <a:lstStyle/>
+          <a:p>
+            <a:r>
+              <a:t>앞의 확인은 모두 메타데이터를 본 것이고, DBMS_DBCOMP는 실제 블록 내용을 맞춰 봅니다. lost write 같은 물리적 불일치를 찾는 용도로도 씁니다. 자주 틀리는 부분은 두 번째 인자입니다. 이름이 디렉터리처럼 보이지만 디렉터리 객체가 아니라 출력 파일 이름 앞에 붙는 접두어이고, 보고서는 ORACLE_HOME 아래 dbs 디렉터리에 생깁니다. 전체 파일 비교는 양쪽에 I/O 부담이 크니 생성 직후라면 작은 파일 몇 개로 충분합니다.</a:t>
+            </a:r>
+          </a:p>
+        </p:txBody>
+      </p:sp>
+      <p:sp>
+        <p:nvSpPr>
+          <p:cNvPr id="4" name="Slide Number Placeholder 3"/>
+          <p:cNvSpPr>
+            <a:spLocks noGrp="1"/>
+          </p:cNvSpPr>
+          <p:nvPr>
+            <p:ph type="sldNum" idx="5" sz="quarter"/>
+          </p:nvPr>
+        </p:nvSpPr>
+        <p:spPr/>
+      </p:sp>
+    </p:spTree>
+  </p:cSld>
+  <p:clrMapOvr>
+    <a:masterClrMapping/>
+  </p:clrMapOvr>
+</p:notes>
+</file>
+
+<file path=ppt/notesSlides/notesSlide35.xml><?xml version="1.0" encoding="utf-8"?>
+<p:notes xmlns:a="http://schemas.openxmlformats.org/drawingml/2006/main" xmlns:p="http://schemas.openxmlformats.org/presentationml/2006/main" xmlns:r="http://schemas.openxmlformats.org/officeDocument/2006/relationships">
+  <p:cSld>
+    <p:spTree>
+      <p:nvGrpSpPr>
+        <p:cNvPr id="1" name=""/>
+        <p:cNvGrpSpPr/>
+        <p:nvPr/>
+      </p:nvGrpSpPr>
+      <p:grpSpPr>
+        <a:xfrm>
+          <a:off x="0" y="0"/>
+          <a:ext cx="0" cy="0"/>
+          <a:chOff x="0" y="0"/>
+          <a:chExt cx="0" cy="0"/>
+        </a:xfrm>
+      </p:grpSpPr>
+      <p:sp>
+        <p:nvSpPr>
+          <p:cNvPr id="2" name="Slide Image Placeholder 1"/>
+          <p:cNvSpPr>
+            <a:spLocks noGrp="1"/>
+          </p:cNvSpPr>
+          <p:nvPr>
+            <p:ph type="sldImg" idx="2"/>
+          </p:nvPr>
+        </p:nvSpPr>
+        <p:spPr/>
+      </p:sp>
+      <p:sp>
+        <p:nvSpPr>
+          <p:cNvPr id="3" name="Notes Placeholder 2"/>
+          <p:cNvSpPr>
+            <a:spLocks noGrp="1"/>
+          </p:cNvSpPr>
+          <p:nvPr>
+            <p:ph type="body" idx="3" sz="quarter"/>
+          </p:nvPr>
+        </p:nvSpPr>
+        <p:spPr/>
+        <p:txBody>
+          <a:bodyPr/>
+          <a:lstStyle/>
+          <a:p>
+            <a:r>
+              <a:t>Standby를 다시 만들어야 하는 날은 대개 장애가 난 날입니다. 그때 스크립트를 처음부터 다시 쓰지 않도록 실행했던 스크립트와 convert 규칙을 구성 문서와 함께 보관해 둡니다. Primary에 새 마운트 지점이나 PDB 디렉터리가 생기면 Standby의 convert 값과 디렉터리를 같이 갱신하지 않는 한 다음 파일 추가 때 Redo Apply가 멈춥니다. 생성 작업 동안 쌓인 아카이브 로그는 Standby가 받아 갈 때까지 지우면 안 되니 삭제 정책도 미리 확인합니다.</a:t>
             </a:r>
           </a:p>
         </p:txBody>
@@ -2226,7 +2583,7 @@
           <a:lstStyle/>
           <a:p>
             <a:r>
-              <a:t>이 구조를 지금 기억해 두어야 합니다. convert 규칙은 경로의 앞부분만 바꾸고 뒤의 하위 디렉터리 구조는 그대로 따라옵니다. 즉 Standby에도 pdbseed와 chicago_pdb1 디렉터리가 필요해집니다. 그런데 오라클은 디렉터리를 만들어 주지 않습니다. 5.6절의 두 번째 실패가 정확히 이 지점에서 납니다. 지금은 그냥 파일 목록처럼 보이지만, 실패를 겪고 나면 이 슬라이드가 다시 보일 것입니다. 실무에서도 PDB를 추가할 때마다 이 확인이 필요합니다.</a:t>
+              <a:t>Active DUPLICATE는 백업 없이 지금 돌고 있는 Primary에서 파일을 바로 가져옵니다. SPFILE 생성부터 Standby 컨트롤 파일, 파일 이름 변환, 복구까지 한 명령에 들어 있어서 사람 손이 가장 덜 갑니다. 대신 복사가 진행되는 동안 Primary의 디스크 읽기와 네트워크 대역을 씁니다. 수십 GB 수준이면 크게 문제 되지 않지만 수 TB라면 채널 수, 압축, 작업 시간대를 미리 정해 두어야 업무에 지장이 없습니다.</a:t>
             </a:r>
           </a:p>
         </p:txBody>
@@ -2296,7 +2653,7 @@
           <a:lstStyle/>
           <a:p>
             <a:r>
-              <a:t>처음 보면 불안합니다. 메모리도, 컨트롤 파일 경로도, 아무것도 없이 인스턴스가 뜰까 싶습니다. 뜹니다. 이 두 줄은 인스턴스를 NOMOUNT로 띄우기 위한 최소한일 뿐입니다. 진짜 파라미터는 복제 과정에서 만들어집니다. DUPLICATE 스크립트의 SPFILE 절이 Primary의 spfile을 가져와 SET 지시대로 고친 뒤 Standby에 씁니다. 47바이트가 5,632바이트가 되는 것이 그 결과입니다. 약 120배입니다. 여기서 db_name을 boston으로 쓰는 실수가 매우 흔한데, 다음 슬라이드에서 다룹니다.</a:t>
+              <a:t>정기적으로 RMAN 백업을 받고 있다면 그 백업으로 Standby를 만들 수 있습니다. 복원 작업이 Standby 쪽에서 일어나므로 생성 중에 Primary가 거의 영향을 받지 않습니다. 조건은 Standby 호스트가 백업 파일을 읽을 수 있어야 한다는 것입니다. 같은 경로로 공유 저장소를 붙이거나 백업을 옮겨 두거나 테이프 장치를 양쪽에서 쓰는 식입니다. 백업 시점 이후의 아카이브 로그가 빠짐없이 남아 있어야 복구가 이어진다는 조건도 함께 확인합니다.</a:t>
             </a:r>
           </a:p>
         </p:txBody>
@@ -2366,7 +2723,7 @@
           <a:lstStyle/>
           <a:p>
             <a:r>
-              <a:t>다섯 자리 중 넷이 boston이고 하나만 chicago입니다. 실수하기 딱 좋은 구조입니다. 물리 복제본은 DB_NAME이 원본과 같아야 하고, 구별은 DB_UNIQUE_NAME이 담당합니다. 1장에서 양쪽 V$DATABASE.NAME이 모두 CHICAGO였던 것을 기억하실 겁니다. 다행히 이 실수는 조기에 드러납니다. RMAN 접속 시 connected to auxiliary database 뒤에 BOSTON이 찍히면 잘못된 것입니다. 정상이라면 CHICAGO여야 합니다. 명령을 내리기 전에 이 한 줄만 보면 됩니다.</a:t>
+              <a:t>공식 문서의 기본 절차는 이렇게 재료를 하나씩 만드는 방식입니다. 컨트롤 파일, 파라미터 파일, 백업을 각각 만들고 옮기고 이름을 고쳐야 하니 단계가 많고 실수할 곳도 많습니다. 실무에서 일부러 고를 일은 드물지만, DUPLICATE 로그를 읽을 때 지금 이 단계 중 무엇을 하는지 대응시켜 보면 이해가 빠릅니다. 파일 시스템 저장소라면 운영체제 복사로도 되지만 ASM 위의 파일은 RMAN 없이 꺼낼 수 없습니다.</a:t>
             </a:r>
           </a:p>
         </p:txBody>
@@ -2436,7 +2793,7 @@
           <a:lstStyle/>
           <a:p>
             <a:r>
-              <a:t>STATUS가 STARTED로 나오는 것이 NOMOUNT를 뜻합니다. MOUNTED나 OPEN이면 DUPLICATE가 시작되지 않습니다. SGA가 356MB로 아주 작은데, pfile에 메모리 파라미터를 주지 않아 기본값으로 뜬 것입니다. Primary는 3GB이니 약 9분의 1입니다. 이 상태는 임시입니다. 복제 과정에서 spfile이 만들어지고 그것으로 재기동되면서 Primary와 같은 규모가 됩니다. 실습 06에서 재기동 시 SGA 숫자가 바뀌는 것을 직접 확인합니다. 숫자를 비교하는 습관이 상태를 읽는 감각을 만듭니다.</a:t>
+              <a:t>DBCA의 createDuplicateDB는 내부적으로 리스너 구성, auxiliary 인스턴스 생성, RMAN DUPLICATE를 차례로 실행합니다. 명령 한 줄로 끝나서 편하지만 공식 교재는 비 multitenant 단일 인스턴스 Primary로 대상을 한정합니다. Primary 쪽 전송 목적지나 STANDBY_FILE_MANAGEMENT는 건드리지 않으니 그 설정은 따로 해야 합니다. EM 마법사는 Broker 구성까지 해 주지만 Cloud Control이 있어야 하므로 이 과정에서는 소개만 합니다.</a:t>
             </a:r>
           </a:p>
         </p:txBody>
@@ -2506,7 +2863,7 @@
           <a:lstStyle/>
           <a:p>
             <a:r>
-              <a:t>3장에서 정적 등록을 왜 그렇게 강조했는지가 여기서 완결됩니다. DUPLICATE는 Primary에서 Standby로 원격 SYS 접속을 해야 시작됩니다. 그런데 그 시점의 Standby는 NOMOUNT라 리스너에 스스로 등록하지 못합니다. 정적 등록이 유일한 통로입니다. lsnrctl status에서 status가 UNKNOWN으로 나오는데, 이것이 정적 등록의 표식입니다. 리스너가 인스턴스 상태를 모르지만 일단 접속을 넘겨준다는 뜻입니다. 이 실습은 3장 구성이 실제로 작동하는지 검증하는 시험대이기도 합니다.</a:t>
+              <a:t>대부분의 신규 구축은 Active DUPLICATE로 충분합니다. 판단이 갈리는 지점은 데이터 크기와 회선입니다. 회선이 좁은데 데이터가 크면 Active 방식은 업무 리두 전송까지 밀어낼 수 있어서 백업 기반으로 바꾸는 편이 낫습니다. 공식 교재의 퀴즈에도 나오듯 CDB 환경에서 쓸 수 있는 방법은 RMAN DUPLICATE와 EM이고, DBCA는 교재 기준으로 빠집니다. 같은 호스트에 Standby를 두는 구성은 학습용으로만 쓰고, 이때는 경로를 반드시 바꾸고 이름 검사를 끄지 않습니다.</a:t>
             </a:r>
           </a:p>
         </p:txBody>
@@ -2576,7 +2933,7 @@
           <a:lstStyle/>
           <a:p>
             <a:r>
-              <a:t>명령이 길어 보이지만 절 단위로 끊어 읽으면 각각이 하나씩만 결정합니다. 채널 세 개를 먼저 할당하는데, c1과 c2는 Primary 쪽에서 파일을 읽어 보내고 sby는 Standby 쪽에서 받아 씁니다. 채널이 둘이라 파일 전송이 병렬로 일어나고, 그래서 로그에서 input과 output 순서가 뒤섞여 보입니다. 마지막의 sql channel sby 절도 눈여겨보십시오. 복제가 끝나자마자 Standby에서 MRP를 기동합니다. 별도로 띄울 필요가 없다는 뜻입니다.</a:t>
+              <a:t>이 항목들은 앞 장에서 이미 설정했지만 DUPLICATE 직전에 다시 확인하는 습관을 들이는 편이 좋습니다. 빠졌을 때 드러나는 시점이 제각각이기 때문입니다. 정적 등록이나 패스워드 파일이 빠지면 DUPLICATE가 바로 실패해서 금방 알지만, Primary에 SRL이 없으면 생성은 성공하고 나중에 실시간 적용이 안 되는 것으로 나타납니다. FORCE LOGGING은 더 늦게, nologging 작업이 있었던 블록을 읽을 때에야 문제가 드러납니다.</a:t>
             </a:r>
           </a:p>
         </p:txBody>
@@ -5787,7 +6144,7 @@
                 </a:solidFill>
                 <a:latin typeface="맑은 고딕"/>
               </a:rPr>
-              <a:t>Physical Standby 생성 ①</a:t>
+              <a:t>Physical Standby 생성 ① RMAN DUPLICATE</a:t>
             </a:r>
           </a:p>
         </p:txBody>
@@ -5826,7 +6183,7 @@
                 </a:solidFill>
                 <a:latin typeface="맑은 고딕"/>
               </a:rPr>
-              <a:t>RMAN DUPLICATE — 경로 지정 방식</a:t>
+              <a:t>경로 지정 방식으로 Standby를 만드는 전체 과정</a:t>
             </a:r>
           </a:p>
         </p:txBody>
@@ -5865,7 +6222,7 @@
                 </a:solidFill>
                 <a:latin typeface="맑은 고딕"/>
               </a:rPr>
-              <a:t>실패 두 번에서 배우는 convert · NOFILENAMECHECK · DBMS_DBCOMP</a:t>
+              <a:t>제5장</a:t>
             </a:r>
           </a:p>
         </p:txBody>
@@ -5897,7 +6254,7 @@
         <p:spPr>
           <a:xfrm>
             <a:off x="0" y="0"/>
-            <a:ext cx="12191695" cy="6858000"/>
+            <a:ext cx="12191695" cy="1005840"/>
           </a:xfrm>
           <a:prstGeom prst="rect">
             <a:avLst/>
@@ -5940,8 +6297,8 @@
         </p:nvSpPr>
         <p:spPr>
           <a:xfrm>
-            <a:off x="822960" y="2011680"/>
-            <a:ext cx="10515600" cy="1097280"/>
+            <a:off x="548640" y="91440"/>
+            <a:ext cx="10972800" cy="777240"/>
           </a:xfrm>
           <a:prstGeom prst="rect">
             <a:avLst/>
@@ -5960,13 +6317,13 @@
               </a:spcAft>
             </a:pPr>
             <a:r>
-              <a:rPr sz="4000" b="1">
+              <a:rPr sz="2600" b="1">
                 <a:solidFill>
                   <a:srgbClr val="FFFFFF"/>
                 </a:solidFill>
                 <a:latin typeface="맑은 고딕"/>
               </a:rPr>
-              <a:t>5.4</a:t>
+              <a:t>백업 기반 DUPLICATE</a:t>
             </a:r>
           </a:p>
         </p:txBody>
@@ -5979,8 +6336,8 @@
         </p:nvSpPr>
         <p:spPr>
           <a:xfrm>
-            <a:off x="822960" y="3017520"/>
-            <a:ext cx="10515600" cy="914400"/>
+            <a:off x="640080" y="1078992"/>
+            <a:ext cx="10881360" cy="457200"/>
           </a:xfrm>
           <a:prstGeom prst="rect">
             <a:avLst/>
@@ -5999,71 +6356,27 @@
               </a:spcAft>
             </a:pPr>
             <a:r>
-              <a:rPr sz="2800" b="1">
-                <a:solidFill>
-                  <a:srgbClr val="FFFFFF"/>
-                </a:solidFill>
-                <a:latin typeface="맑은 고딕"/>
-              </a:rPr>
-              <a:t>Standby 인스턴스 준비</a:t>
-            </a:r>
-          </a:p>
-        </p:txBody>
-      </p:sp>
-      <p:sp>
-        <p:nvSpPr>
-          <p:cNvPr id="5" name="Rectangle 4"/>
-          <p:cNvSpPr/>
-          <p:nvPr/>
-        </p:nvSpPr>
-        <p:spPr>
-          <a:xfrm>
-            <a:off x="822960" y="4114800"/>
-            <a:ext cx="5486400" cy="54864"/>
-          </a:xfrm>
-          <a:prstGeom prst="rect">
-            <a:avLst/>
-          </a:prstGeom>
-          <a:solidFill>
-            <a:srgbClr val="FFFFFF"/>
-          </a:solidFill>
-          <a:ln>
-            <a:noFill/>
-          </a:ln>
-          <a:effectLst/>
-        </p:spPr>
-        <p:style>
-          <a:lnRef idx="1">
-            <a:schemeClr val="accent1"/>
-          </a:lnRef>
-          <a:fillRef idx="3">
-            <a:schemeClr val="accent1"/>
-          </a:fillRef>
-          <a:effectRef idx="2">
-            <a:schemeClr val="accent1"/>
-          </a:effectRef>
-          <a:fontRef idx="minor">
-            <a:schemeClr val="lt1"/>
-          </a:fontRef>
-        </p:style>
-        <p:txBody>
-          <a:bodyPr rtlCol="0" anchor="ctr"/>
-          <a:lstStyle/>
-          <a:p>
-            <a:pPr algn="ctr"/>
-          </a:p>
-        </p:txBody>
-      </p:sp>
-      <p:sp>
-        <p:nvSpPr>
-          <p:cNvPr id="6" name="TextBox 5"/>
+              <a:rPr sz="1500" b="0">
+                <a:solidFill>
+                  <a:srgbClr val="5A6672"/>
+                </a:solidFill>
+                <a:latin typeface="맑은 고딕"/>
+              </a:rPr>
+              <a:t>Primary 부하를 생성 작업에서 떼어 냄</a:t>
+            </a:r>
+          </a:p>
+        </p:txBody>
+      </p:sp>
+      <p:sp>
+        <p:nvSpPr>
+          <p:cNvPr id="5" name="TextBox 4"/>
           <p:cNvSpPr txBox="1"/>
           <p:nvPr/>
         </p:nvSpPr>
         <p:spPr>
           <a:xfrm>
-            <a:off x="822960" y="4297680"/>
-            <a:ext cx="10058400" cy="2011680"/>
+            <a:off x="640080" y="1737360"/>
+            <a:ext cx="10881360" cy="4754880"/>
           </a:xfrm>
           <a:prstGeom prst="rect">
             <a:avLst/>
@@ -6078,49 +6391,65 @@
           <a:p>
             <a:pPr algn="l">
               <a:spcAft>
-                <a:spcPts val="800"/>
-              </a:spcAft>
-            </a:pPr>
-            <a:r>
-              <a:rPr sz="1600" b="0">
-                <a:solidFill>
-                  <a:srgbClr val="FFFFFF"/>
-                </a:solidFill>
-                <a:latin typeface="맑은 고딕"/>
-              </a:rPr>
-              <a:t>•  두 줄짜리 pfile</a:t>
-            </a:r>
-          </a:p>
-          <a:p>
-            <a:pPr algn="l">
-              <a:spcAft>
-                <a:spcPts val="800"/>
-              </a:spcAft>
-            </a:pPr>
-            <a:r>
-              <a:rPr sz="1600" b="0">
-                <a:solidFill>
-                  <a:srgbClr val="FFFFFF"/>
-                </a:solidFill>
-                <a:latin typeface="맑은 고딕"/>
-              </a:rPr>
-              <a:t>•  NOMOUNT 기동</a:t>
-            </a:r>
-          </a:p>
-          <a:p>
-            <a:pPr algn="l">
-              <a:spcAft>
-                <a:spcPts val="800"/>
-              </a:spcAft>
-            </a:pPr>
-            <a:r>
-              <a:rPr sz="1600" b="0">
-                <a:solidFill>
-                  <a:srgbClr val="FFFFFF"/>
-                </a:solidFill>
-                <a:latin typeface="맑은 고딕"/>
-              </a:rPr>
-              <a:t>•  3장 정적 등록의 회수</a:t>
+                <a:spcPts val="1000"/>
+              </a:spcAft>
+            </a:pPr>
+            <a:r>
+              <a:rPr sz="1700" b="0">
+                <a:solidFill>
+                  <a:srgbClr val="222222"/>
+                </a:solidFill>
+                <a:latin typeface="맑은 고딕"/>
+              </a:rPr>
+              <a:t>•  FROM ACTIVE DATABASE 없이 기존 백업에서 복원</a:t>
+            </a:r>
+          </a:p>
+          <a:p>
+            <a:pPr algn="l">
+              <a:spcAft>
+                <a:spcPts val="1000"/>
+              </a:spcAft>
+            </a:pPr>
+            <a:r>
+              <a:rPr sz="1700" b="0">
+                <a:solidFill>
+                  <a:srgbClr val="222222"/>
+                </a:solidFill>
+                <a:latin typeface="맑은 고딕"/>
+              </a:rPr>
+              <a:t>•  복원은 Standby 호스트에서 일어남</a:t>
+            </a:r>
+          </a:p>
+          <a:p>
+            <a:pPr algn="l">
+              <a:spcAft>
+                <a:spcPts val="1000"/>
+              </a:spcAft>
+            </a:pPr>
+            <a:r>
+              <a:rPr sz="1700" b="0">
+                <a:solidFill>
+                  <a:srgbClr val="222222"/>
+                </a:solidFill>
+                <a:latin typeface="맑은 고딕"/>
+              </a:rPr>
+              <a:t>•  백업 파일에 Standby가 접근할 수 있어야 함</a:t>
+            </a:r>
+          </a:p>
+          <a:p>
+            <a:pPr algn="l">
+              <a:spcAft>
+                <a:spcPts val="1000"/>
+              </a:spcAft>
+            </a:pPr>
+            <a:r>
+              <a:rPr sz="1700" b="0">
+                <a:solidFill>
+                  <a:srgbClr val="222222"/>
+                </a:solidFill>
+                <a:latin typeface="맑은 고딕"/>
+              </a:rPr>
+              <a:t>•  대용량, 느린 WAN, 정기 백업 재활용</a:t>
             </a:r>
           </a:p>
         </p:txBody>
@@ -6221,7 +6550,7 @@
                 </a:solidFill>
                 <a:latin typeface="맑은 고딕"/>
               </a:rPr>
-              <a:t>두 줄이면 충분하다</a:t>
+              <a:t>수동 복원 방식</a:t>
             </a:r>
           </a:p>
         </p:txBody>
@@ -6260,7 +6589,7 @@
                 </a:solidFill>
                 <a:latin typeface="맑은 고딕"/>
               </a:rPr>
-              <a:t>initboston.ora 47바이트</a:t>
+              <a:t>DUPLICATE가 자동화한 일을 손으로</a:t>
             </a:r>
           </a:p>
         </p:txBody>
@@ -6299,7 +6628,7 @@
                 </a:solidFill>
                 <a:latin typeface="맑은 고딕"/>
               </a:rPr>
-              <a:t>•  `db_name=chicago` — Primary와 같아야 한다</a:t>
+              <a:t>•  CREATE STANDBY CONTROLFILE로 컨트롤 파일 생성</a:t>
             </a:r>
           </a:p>
           <a:p>
@@ -6315,7 +6644,7 @@
                 </a:solidFill>
                 <a:latin typeface="맑은 고딕"/>
               </a:rPr>
-              <a:t>•  `enable_pluggable_database=true` — CDB이므로</a:t>
+              <a:t>•  CREATE PFILE FROM SPFILE 후 값 수정</a:t>
             </a:r>
           </a:p>
           <a:p>
@@ -6331,7 +6660,7 @@
                 </a:solidFill>
                 <a:latin typeface="맑은 고딕"/>
               </a:rPr>
-              <a:t>•  나머지는 DUPLICATE의 SPFILE 절이 채운다</a:t>
+              <a:t>•  백업을 Standby로 옮겨 복원</a:t>
             </a:r>
           </a:p>
           <a:p>
@@ -6347,7 +6676,7 @@
                 </a:solidFill>
                 <a:latin typeface="맑은 고딕"/>
               </a:rPr>
-              <a:t>•  실측 : pfile 47바이트 → spfile 5,632바이트</a:t>
+              <a:t>•  ASM이면 데이터 파일 추출에 RMAN 필요</a:t>
             </a:r>
           </a:p>
         </p:txBody>
@@ -6448,7 +6777,7 @@
                 </a:solidFill>
                 <a:latin typeface="맑은 고딕"/>
               </a:rPr>
-              <a:t>boston이 네 곳, chicago가 한 곳</a:t>
+              <a:t>DBCA와 Enterprise Manager</a:t>
             </a:r>
           </a:p>
         </p:txBody>
@@ -6487,7 +6816,7 @@
                 </a:solidFill>
                 <a:latin typeface="맑은 고딕"/>
               </a:rPr>
-              <a:t>가장 흔한 실수</a:t>
+              <a:t>더 높은 자동화, 더 좁은 적용 범위</a:t>
             </a:r>
           </a:p>
         </p:txBody>
@@ -6526,7 +6855,7 @@
                 </a:solidFill>
                 <a:latin typeface="맑은 고딕"/>
               </a:rPr>
-              <a:t>•  ORACLE_SID = boston</a:t>
+              <a:t>•  dbca -createDuplicateDB -createAsStandby</a:t>
             </a:r>
           </a:p>
           <a:p>
@@ -6542,7 +6871,7 @@
                 </a:solidFill>
                 <a:latin typeface="맑은 고딕"/>
               </a:rPr>
-              <a:t>•  DB_UNIQUE_NAME = boston</a:t>
+              <a:t>•  교재 기준 비 CDB, 단일 인스턴스 Primary 대상</a:t>
             </a:r>
           </a:p>
           <a:p>
@@ -6558,7 +6887,7 @@
                 </a:solidFill>
                 <a:latin typeface="맑은 고딕"/>
               </a:rPr>
-              <a:t>•  리스너 GLOBAL_DBNAME = boston</a:t>
+              <a:t>•  DBCA는 Standby만 만들고 Primary 설정은 안 함</a:t>
             </a:r>
           </a:p>
           <a:p>
@@ -6574,23 +6903,7 @@
                 </a:solidFill>
                 <a:latin typeface="맑은 고딕"/>
               </a:rPr>
-              <a:t>•  패스워드 파일 = orapwboston</a:t>
-            </a:r>
-          </a:p>
-          <a:p>
-            <a:pPr algn="l">
-              <a:spcAft>
-                <a:spcPts val="1000"/>
-              </a:spcAft>
-            </a:pPr>
-            <a:r>
-              <a:rPr sz="1700" b="0">
-                <a:solidFill>
-                  <a:srgbClr val="222222"/>
-                </a:solidFill>
-                <a:latin typeface="맑은 고딕"/>
-              </a:rPr>
-              <a:t>•  **DB_NAME = chicago** ← 이것만 다르다</a:t>
+              <a:t>•  EM 마법사는 SRL, Broker 구성까지 처리</a:t>
             </a:r>
           </a:p>
         </p:txBody>
@@ -6691,7 +7004,7 @@
                 </a:solidFill>
                 <a:latin typeface="맑은 고딕"/>
               </a:rPr>
-              <a:t>NOMOUNT 기동</a:t>
+              <a:t>방법 선택 기준</a:t>
             </a:r>
           </a:p>
         </p:txBody>
@@ -6730,7 +7043,7 @@
                 </a:solidFill>
                 <a:latin typeface="맑은 고딕"/>
               </a:rPr>
-              <a:t>SGA 356MB의 의미</a:t>
+              <a:t>데이터 출처, Primary 부하, 자동화 정도</a:t>
             </a:r>
           </a:p>
         </p:txBody>
@@ -6769,7 +7082,7 @@
                 </a:solidFill>
                 <a:latin typeface="맑은 고딕"/>
               </a:rPr>
-              <a:t>•  `STARTUP NOMOUNT PFILE='.../initboston.ora'`</a:t>
+              <a:t>•  일반적인 신규 구축: Active DUPLICATE</a:t>
             </a:r>
           </a:p>
           <a:p>
@@ -6785,7 +7098,7 @@
                 </a:solidFill>
                 <a:latin typeface="맑은 고딕"/>
               </a:rPr>
-              <a:t>•  V$INSTANCE.STATUS = STARTED</a:t>
+              <a:t>•  대용량, 좁은 대역: 백업 기반 DUPLICATE</a:t>
             </a:r>
           </a:p>
           <a:p>
@@ -6801,7 +7114,7 @@
                 </a:solidFill>
                 <a:latin typeface="맑은 고딕"/>
               </a:rPr>
-              <a:t>•  실측 SGA 356,512,392바이트 — Primary의 약 1/9</a:t>
+              <a:t>•  비 CDB를 빠르게: DBCA</a:t>
             </a:r>
           </a:p>
           <a:p>
@@ -6817,7 +7130,7 @@
                 </a:solidFill>
                 <a:latin typeface="맑은 고딕"/>
               </a:rPr>
-              <a:t>•  spfile로 기동되면 3,221,223,192바이트가 된다</a:t>
+              <a:t>•  EM 운영 조직: Add Standby Database 마법사</a:t>
             </a:r>
           </a:p>
         </p:txBody>
@@ -6849,7 +7162,7 @@
         <p:spPr>
           <a:xfrm>
             <a:off x="0" y="0"/>
-            <a:ext cx="12191695" cy="1005840"/>
+            <a:ext cx="12191695" cy="6858000"/>
           </a:xfrm>
           <a:prstGeom prst="rect">
             <a:avLst/>
@@ -6892,8 +7205,8 @@
         </p:nvSpPr>
         <p:spPr>
           <a:xfrm>
-            <a:off x="548640" y="91440"/>
-            <a:ext cx="10972800" cy="777240"/>
+            <a:off x="822960" y="2011680"/>
+            <a:ext cx="10515600" cy="1097280"/>
           </a:xfrm>
           <a:prstGeom prst="rect">
             <a:avLst/>
@@ -6912,13 +7225,13 @@
               </a:spcAft>
             </a:pPr>
             <a:r>
-              <a:rPr sz="2600" b="1">
+              <a:rPr sz="4000" b="1">
                 <a:solidFill>
                   <a:srgbClr val="FFFFFF"/>
                 </a:solidFill>
                 <a:latin typeface="맑은 고딕"/>
               </a:rPr>
-              <a:t>3장이 여기서 회수된다</a:t>
+              <a:t>5.4</a:t>
             </a:r>
           </a:p>
         </p:txBody>
@@ -6931,8 +7244,8 @@
         </p:nvSpPr>
         <p:spPr>
           <a:xfrm>
-            <a:off x="640080" y="1078992"/>
-            <a:ext cx="10881360" cy="457200"/>
+            <a:off x="822960" y="3017520"/>
+            <a:ext cx="10515600" cy="914400"/>
           </a:xfrm>
           <a:prstGeom prst="rect">
             <a:avLst/>
@@ -6951,27 +7264,71 @@
               </a:spcAft>
             </a:pPr>
             <a:r>
-              <a:rPr sz="1500" b="0">
-                <a:solidFill>
-                  <a:srgbClr val="5A6672"/>
-                </a:solidFill>
-                <a:latin typeface="맑은 고딕"/>
-              </a:rPr>
-              <a:t>정적 등록의 이유</a:t>
-            </a:r>
-          </a:p>
-        </p:txBody>
-      </p:sp>
-      <p:sp>
-        <p:nvSpPr>
-          <p:cNvPr id="5" name="TextBox 4"/>
+              <a:rPr sz="2800" b="1">
+                <a:solidFill>
+                  <a:srgbClr val="FFFFFF"/>
+                </a:solidFill>
+                <a:latin typeface="맑은 고딕"/>
+              </a:rPr>
+              <a:t>생성 전체 흐름</a:t>
+            </a:r>
+          </a:p>
+        </p:txBody>
+      </p:sp>
+      <p:sp>
+        <p:nvSpPr>
+          <p:cNvPr id="5" name="Rectangle 4"/>
+          <p:cNvSpPr/>
+          <p:nvPr/>
+        </p:nvSpPr>
+        <p:spPr>
+          <a:xfrm>
+            <a:off x="822960" y="4114800"/>
+            <a:ext cx="5486400" cy="54864"/>
+          </a:xfrm>
+          <a:prstGeom prst="rect">
+            <a:avLst/>
+          </a:prstGeom>
+          <a:solidFill>
+            <a:srgbClr val="FFFFFF"/>
+          </a:solidFill>
+          <a:ln>
+            <a:noFill/>
+          </a:ln>
+          <a:effectLst/>
+        </p:spPr>
+        <p:style>
+          <a:lnRef idx="1">
+            <a:schemeClr val="accent1"/>
+          </a:lnRef>
+          <a:fillRef idx="3">
+            <a:schemeClr val="accent1"/>
+          </a:fillRef>
+          <a:effectRef idx="2">
+            <a:schemeClr val="accent1"/>
+          </a:effectRef>
+          <a:fontRef idx="minor">
+            <a:schemeClr val="lt1"/>
+          </a:fontRef>
+        </p:style>
+        <p:txBody>
+          <a:bodyPr rtlCol="0" anchor="ctr"/>
+          <a:lstStyle/>
+          <a:p>
+            <a:pPr algn="ctr"/>
+          </a:p>
+        </p:txBody>
+      </p:sp>
+      <p:sp>
+        <p:nvSpPr>
+          <p:cNvPr id="6" name="TextBox 5"/>
           <p:cNvSpPr txBox="1"/>
           <p:nvPr/>
         </p:nvSpPr>
         <p:spPr>
           <a:xfrm>
-            <a:off x="640080" y="1737360"/>
-            <a:ext cx="10881360" cy="4754880"/>
+            <a:off x="822960" y="4297680"/>
+            <a:ext cx="10058400" cy="2011680"/>
           </a:xfrm>
           <a:prstGeom prst="rect">
             <a:avLst/>
@@ -6986,65 +7343,33 @@
           <a:p>
             <a:pPr algn="l">
               <a:spcAft>
-                <a:spcPts val="1000"/>
-              </a:spcAft>
-            </a:pPr>
-            <a:r>
-              <a:rPr sz="1700" b="0">
-                <a:solidFill>
-                  <a:srgbClr val="222222"/>
-                </a:solidFill>
-                <a:latin typeface="맑은 고딕"/>
-              </a:rPr>
-              <a:t>•  NOMOUNT 인스턴스는 리스너에 동적 등록되지 않는다</a:t>
-            </a:r>
-          </a:p>
-          <a:p>
-            <a:pPr algn="l">
-              <a:spcAft>
-                <a:spcPts val="1000"/>
-              </a:spcAft>
-            </a:pPr>
-            <a:r>
-              <a:rPr sz="1700" b="0">
-                <a:solidFill>
-                  <a:srgbClr val="222222"/>
-                </a:solidFill>
-                <a:latin typeface="맑은 고딕"/>
-              </a:rPr>
-              <a:t>•  정적 등록이 없으면 → ORA-12528</a:t>
-            </a:r>
-          </a:p>
-          <a:p>
-            <a:pPr algn="l">
-              <a:spcAft>
-                <a:spcPts val="1000"/>
-              </a:spcAft>
-            </a:pPr>
-            <a:r>
-              <a:rPr sz="1700" b="0">
-                <a:solidFill>
-                  <a:srgbClr val="222222"/>
-                </a:solidFill>
-                <a:latin typeface="맑은 고딕"/>
-              </a:rPr>
-              <a:t>•  있으면 → `status UNKNOWN`으로 접속을 넘겨준다</a:t>
-            </a:r>
-          </a:p>
-          <a:p>
-            <a:pPr algn="l">
-              <a:spcAft>
-                <a:spcPts val="1000"/>
-              </a:spcAft>
-            </a:pPr>
-            <a:r>
-              <a:rPr sz="1700" b="0">
-                <a:solidFill>
-                  <a:srgbClr val="222222"/>
-                </a:solidFill>
-                <a:latin typeface="맑은 고딕"/>
-              </a:rPr>
-              <a:t>•  Primary에서 `sqlplus "sys/oracle@boston as sysdba"`가 되어야 시작할 수 있다</a:t>
+                <a:spcPts val="800"/>
+              </a:spcAft>
+            </a:pPr>
+            <a:r>
+              <a:rPr sz="1600" b="0">
+                <a:solidFill>
+                  <a:srgbClr val="FFFFFF"/>
+                </a:solidFill>
+                <a:latin typeface="맑은 고딕"/>
+              </a:rPr>
+              <a:t>•  시작 전에 갖춰져 있어야 하는 것</a:t>
+            </a:r>
+          </a:p>
+          <a:p>
+            <a:pPr algn="l">
+              <a:spcAft>
+                <a:spcPts val="800"/>
+              </a:spcAft>
+            </a:pPr>
+            <a:r>
+              <a:rPr sz="1600" b="0">
+                <a:solidFill>
+                  <a:srgbClr val="FFFFFF"/>
+                </a:solidFill>
+                <a:latin typeface="맑은 고딕"/>
+              </a:rPr>
+              <a:t>•  위치별로 할 일</a:t>
             </a:r>
           </a:p>
         </p:txBody>
@@ -7076,7 +7401,7 @@
         <p:spPr>
           <a:xfrm>
             <a:off x="0" y="0"/>
-            <a:ext cx="12191695" cy="6858000"/>
+            <a:ext cx="12191695" cy="1005840"/>
           </a:xfrm>
           <a:prstGeom prst="rect">
             <a:avLst/>
@@ -7119,8 +7444,8 @@
         </p:nvSpPr>
         <p:spPr>
           <a:xfrm>
-            <a:off x="822960" y="2011680"/>
-            <a:ext cx="10515600" cy="1097280"/>
+            <a:off x="548640" y="91440"/>
+            <a:ext cx="10972800" cy="777240"/>
           </a:xfrm>
           <a:prstGeom prst="rect">
             <a:avLst/>
@@ -7139,13 +7464,13 @@
               </a:spcAft>
             </a:pPr>
             <a:r>
-              <a:rPr sz="4000" b="1">
+              <a:rPr sz="2600" b="1">
                 <a:solidFill>
                   <a:srgbClr val="FFFFFF"/>
                 </a:solidFill>
                 <a:latin typeface="맑은 고딕"/>
               </a:rPr>
-              <a:t>5.5</a:t>
+              <a:t>시작 전 확인 목록</a:t>
             </a:r>
           </a:p>
         </p:txBody>
@@ -7158,8 +7483,8 @@
         </p:nvSpPr>
         <p:spPr>
           <a:xfrm>
-            <a:off x="822960" y="3017520"/>
-            <a:ext cx="10515600" cy="914400"/>
+            <a:off x="640080" y="1078992"/>
+            <a:ext cx="10881360" cy="457200"/>
           </a:xfrm>
           <a:prstGeom prst="rect">
             <a:avLst/>
@@ -7178,71 +7503,27 @@
               </a:spcAft>
             </a:pPr>
             <a:r>
-              <a:rPr sz="2800" b="1">
-                <a:solidFill>
-                  <a:srgbClr val="FFFFFF"/>
-                </a:solidFill>
-                <a:latin typeface="맑은 고딕"/>
-              </a:rPr>
-              <a:t>DUPLICATE 스크립트 읽기</a:t>
-            </a:r>
-          </a:p>
-        </p:txBody>
-      </p:sp>
-      <p:sp>
-        <p:nvSpPr>
-          <p:cNvPr id="5" name="Rectangle 4"/>
-          <p:cNvSpPr/>
-          <p:nvPr/>
-        </p:nvSpPr>
-        <p:spPr>
-          <a:xfrm>
-            <a:off x="822960" y="4114800"/>
-            <a:ext cx="5486400" cy="54864"/>
-          </a:xfrm>
-          <a:prstGeom prst="rect">
-            <a:avLst/>
-          </a:prstGeom>
-          <a:solidFill>
-            <a:srgbClr val="FFFFFF"/>
-          </a:solidFill>
-          <a:ln>
-            <a:noFill/>
-          </a:ln>
-          <a:effectLst/>
-        </p:spPr>
-        <p:style>
-          <a:lnRef idx="1">
-            <a:schemeClr val="accent1"/>
-          </a:lnRef>
-          <a:fillRef idx="3">
-            <a:schemeClr val="accent1"/>
-          </a:fillRef>
-          <a:effectRef idx="2">
-            <a:schemeClr val="accent1"/>
-          </a:effectRef>
-          <a:fontRef idx="minor">
-            <a:schemeClr val="lt1"/>
-          </a:fontRef>
-        </p:style>
-        <p:txBody>
-          <a:bodyPr rtlCol="0" anchor="ctr"/>
-          <a:lstStyle/>
-          <a:p>
-            <a:pPr algn="ctr"/>
-          </a:p>
-        </p:txBody>
-      </p:sp>
-      <p:sp>
-        <p:nvSpPr>
-          <p:cNvPr id="6" name="TextBox 5"/>
+              <a:rPr sz="1500" b="0">
+                <a:solidFill>
+                  <a:srgbClr val="5A6672"/>
+                </a:solidFill>
+                <a:latin typeface="맑은 고딕"/>
+              </a:rPr>
+              <a:t>3장과 4장에서 만든 것</a:t>
+            </a:r>
+          </a:p>
+        </p:txBody>
+      </p:sp>
+      <p:sp>
+        <p:nvSpPr>
+          <p:cNvPr id="5" name="TextBox 4"/>
           <p:cNvSpPr txBox="1"/>
           <p:nvPr/>
         </p:nvSpPr>
         <p:spPr>
           <a:xfrm>
-            <a:off x="822960" y="4297680"/>
-            <a:ext cx="10058400" cy="2011680"/>
+            <a:off x="640080" y="1737360"/>
+            <a:ext cx="10881360" cy="4754880"/>
           </a:xfrm>
           <a:prstGeom prst="rect">
             <a:avLst/>
@@ -7257,49 +7538,65 @@
           <a:p>
             <a:pPr algn="l">
               <a:spcAft>
-                <a:spcPts val="800"/>
-              </a:spcAft>
-            </a:pPr>
-            <a:r>
-              <a:rPr sz="1600" b="0">
-                <a:solidFill>
-                  <a:srgbClr val="FFFFFF"/>
-                </a:solidFill>
-                <a:latin typeface="맑은 고딕"/>
-              </a:rPr>
-              <a:t>•  절마다 무엇을 정하는가</a:t>
-            </a:r>
-          </a:p>
-          <a:p>
-            <a:pPr algn="l">
-              <a:spcAft>
-                <a:spcPts val="800"/>
-              </a:spcAft>
-            </a:pPr>
-            <a:r>
-              <a:rPr sz="1600" b="0">
-                <a:solidFill>
-                  <a:srgbClr val="FFFFFF"/>
-                </a:solidFill>
-                <a:latin typeface="맑은 고딕"/>
-              </a:rPr>
-              <a:t>•  PARAMETER_VALUE_CONVERT와 SET</a:t>
-            </a:r>
-          </a:p>
-          <a:p>
-            <a:pPr algn="l">
-              <a:spcAft>
-                <a:spcPts val="800"/>
-              </a:spcAft>
-            </a:pPr>
-            <a:r>
-              <a:rPr sz="1600" b="0">
-                <a:solidFill>
-                  <a:srgbClr val="FFFFFF"/>
-                </a:solidFill>
-                <a:latin typeface="맑은 고딕"/>
-              </a:rPr>
-              <a:t>•  convert 파라미터의 동작</a:t>
+                <a:spcPts val="1000"/>
+              </a:spcAft>
+            </a:pPr>
+            <a:r>
+              <a:rPr sz="1700" b="0">
+                <a:solidFill>
+                  <a:srgbClr val="222222"/>
+                </a:solidFill>
+                <a:latin typeface="맑은 고딕"/>
+              </a:rPr>
+              <a:t>•  ARCHIVELOG, FORCE LOGGING, Primary SRL</a:t>
+            </a:r>
+          </a:p>
+          <a:p>
+            <a:pPr algn="l">
+              <a:spcAft>
+                <a:spcPts val="1000"/>
+              </a:spcAft>
+            </a:pPr>
+            <a:r>
+              <a:rPr sz="1700" b="0">
+                <a:solidFill>
+                  <a:srgbClr val="222222"/>
+                </a:solidFill>
+                <a:latin typeface="맑은 고딕"/>
+              </a:rPr>
+              <a:t>•  LOG_ARCHIVE_CONFIG, LOG_ARCHIVE_DEST_2</a:t>
+            </a:r>
+          </a:p>
+          <a:p>
+            <a:pPr algn="l">
+              <a:spcAft>
+                <a:spcPts val="1000"/>
+              </a:spcAft>
+            </a:pPr>
+            <a:r>
+              <a:rPr sz="1700" b="0">
+                <a:solidFill>
+                  <a:srgbClr val="222222"/>
+                </a:solidFill>
+                <a:latin typeface="맑은 고딕"/>
+              </a:rPr>
+              <a:t>•  REMOTE_LOGIN_PASSWORDFILE=EXCLUSIVE</a:t>
+            </a:r>
+          </a:p>
+          <a:p>
+            <a:pPr algn="l">
+              <a:spcAft>
+                <a:spcPts val="1000"/>
+              </a:spcAft>
+            </a:pPr>
+            <a:r>
+              <a:rPr sz="1700" b="0">
+                <a:solidFill>
+                  <a:srgbClr val="222222"/>
+                </a:solidFill>
+                <a:latin typeface="맑은 고딕"/>
+              </a:rPr>
+              <a:t>•  양쪽 tnsnames.ora, Standby 리스너 정적 등록</a:t>
             </a:r>
           </a:p>
         </p:txBody>
@@ -7400,7 +7697,7 @@
                 </a:solidFill>
                 <a:latin typeface="맑은 고딕"/>
               </a:rPr>
-              <a:t>스크립트의 절 구조</a:t>
+              <a:t>위치별로 할 일</a:t>
             </a:r>
           </a:p>
         </p:txBody>
@@ -7439,7 +7736,7 @@
                 </a:solidFill>
                 <a:latin typeface="맑은 고딕"/>
               </a:rPr>
-              <a:t>절마다 하나씩</a:t>
+              <a:t>Primary, Standby, RMAN 실행 위치</a:t>
             </a:r>
           </a:p>
         </p:txBody>
@@ -7478,7 +7775,7 @@
                 </a:solidFill>
                 <a:latin typeface="맑은 고딕"/>
               </a:rPr>
-              <a:t>•  `for standby` — DBID 유지, standby 컨트롤 파일</a:t>
+              <a:t>•  Primary: 패스워드 파일 복사, 전송 확인</a:t>
             </a:r>
           </a:p>
           <a:p>
@@ -7494,7 +7791,7 @@
                 </a:solidFill>
                 <a:latin typeface="맑은 고딕"/>
               </a:rPr>
-              <a:t>•  `from active database` — 운영 중 Primary에서 직접</a:t>
+              <a:t>•  Standby: 디렉터리, 최소 pfile, NOMOUNT 기동</a:t>
             </a:r>
           </a:p>
           <a:p>
@@ -7510,7 +7807,7 @@
                 </a:solidFill>
                 <a:latin typeface="맑은 고딕"/>
               </a:rPr>
-              <a:t>•  `DORECOVER` — 복제 후 그 시점까지 복구</a:t>
+              <a:t>•  RMAN: 양쪽 접속 확인 후 DUPLICATE 실행</a:t>
             </a:r>
           </a:p>
           <a:p>
@@ -7526,23 +7823,7 @@
                 </a:solidFill>
                 <a:latin typeface="맑은 고딕"/>
               </a:rPr>
-              <a:t>•  `spfile` — Primary spfile을 고쳐 Standby용으로</a:t>
-            </a:r>
-          </a:p>
-          <a:p>
-            <a:pPr algn="l">
-              <a:spcAft>
-                <a:spcPts val="1000"/>
-              </a:spcAft>
-            </a:pPr>
-            <a:r>
-              <a:rPr sz="1700" b="0">
-                <a:solidFill>
-                  <a:srgbClr val="222222"/>
-                </a:solidFill>
-                <a:latin typeface="맑은 고딕"/>
-              </a:rPr>
-              <a:t>•  `nofilenamecheck` — 이름 충돌 검사 생략</a:t>
+              <a:t>•  RMAN은 어느 호스트에서 실행해도 됨</a:t>
             </a:r>
           </a:p>
         </p:txBody>
@@ -7574,7 +7855,7 @@
         <p:spPr>
           <a:xfrm>
             <a:off x="0" y="0"/>
-            <a:ext cx="12191695" cy="1005840"/>
+            <a:ext cx="12191695" cy="6858000"/>
           </a:xfrm>
           <a:prstGeom prst="rect">
             <a:avLst/>
@@ -7617,8 +7898,8 @@
         </p:nvSpPr>
         <p:spPr>
           <a:xfrm>
-            <a:off x="548640" y="91440"/>
-            <a:ext cx="10972800" cy="777240"/>
+            <a:off x="822960" y="2011680"/>
+            <a:ext cx="10515600" cy="1097280"/>
           </a:xfrm>
           <a:prstGeom prst="rect">
             <a:avLst/>
@@ -7637,13 +7918,13 @@
               </a:spcAft>
             </a:pPr>
             <a:r>
-              <a:rPr sz="2600" b="1">
+              <a:rPr sz="4000" b="1">
                 <a:solidFill>
                   <a:srgbClr val="FFFFFF"/>
                 </a:solidFill>
                 <a:latin typeface="맑은 고딕"/>
               </a:rPr>
-              <a:t>SET DB_NAME = 'chicago'</a:t>
+              <a:t>5.5</a:t>
             </a:r>
           </a:p>
         </p:txBody>
@@ -7656,8 +7937,8 @@
         </p:nvSpPr>
         <p:spPr>
           <a:xfrm>
-            <a:off x="640080" y="1078992"/>
-            <a:ext cx="10881360" cy="457200"/>
+            <a:off x="822960" y="3017520"/>
+            <a:ext cx="10515600" cy="914400"/>
           </a:xfrm>
           <a:prstGeom prst="rect">
             <a:avLst/>
@@ -7676,27 +7957,71 @@
               </a:spcAft>
             </a:pPr>
             <a:r>
-              <a:rPr sz="1500" b="0">
-                <a:solidFill>
-                  <a:srgbClr val="5A6672"/>
-                </a:solidFill>
-                <a:latin typeface="맑은 고딕"/>
-              </a:rPr>
-              <a:t>왜 같은 값을 다시 쓰는가</a:t>
-            </a:r>
-          </a:p>
-        </p:txBody>
-      </p:sp>
-      <p:sp>
-        <p:nvSpPr>
-          <p:cNvPr id="5" name="TextBox 4"/>
+              <a:rPr sz="2800" b="1">
+                <a:solidFill>
+                  <a:srgbClr val="FFFFFF"/>
+                </a:solidFill>
+                <a:latin typeface="맑은 고딕"/>
+              </a:rPr>
+              <a:t>Standby 인스턴스 준비</a:t>
+            </a:r>
+          </a:p>
+        </p:txBody>
+      </p:sp>
+      <p:sp>
+        <p:nvSpPr>
+          <p:cNvPr id="5" name="Rectangle 4"/>
+          <p:cNvSpPr/>
+          <p:nvPr/>
+        </p:nvSpPr>
+        <p:spPr>
+          <a:xfrm>
+            <a:off x="822960" y="4114800"/>
+            <a:ext cx="5486400" cy="54864"/>
+          </a:xfrm>
+          <a:prstGeom prst="rect">
+            <a:avLst/>
+          </a:prstGeom>
+          <a:solidFill>
+            <a:srgbClr val="FFFFFF"/>
+          </a:solidFill>
+          <a:ln>
+            <a:noFill/>
+          </a:ln>
+          <a:effectLst/>
+        </p:spPr>
+        <p:style>
+          <a:lnRef idx="1">
+            <a:schemeClr val="accent1"/>
+          </a:lnRef>
+          <a:fillRef idx="3">
+            <a:schemeClr val="accent1"/>
+          </a:fillRef>
+          <a:effectRef idx="2">
+            <a:schemeClr val="accent1"/>
+          </a:effectRef>
+          <a:fontRef idx="minor">
+            <a:schemeClr val="lt1"/>
+          </a:fontRef>
+        </p:style>
+        <p:txBody>
+          <a:bodyPr rtlCol="0" anchor="ctr"/>
+          <a:lstStyle/>
+          <a:p>
+            <a:pPr algn="ctr"/>
+          </a:p>
+        </p:txBody>
+      </p:sp>
+      <p:sp>
+        <p:nvSpPr>
+          <p:cNvPr id="6" name="TextBox 5"/>
           <p:cNvSpPr txBox="1"/>
           <p:nvPr/>
         </p:nvSpPr>
         <p:spPr>
           <a:xfrm>
-            <a:off x="640080" y="1737360"/>
-            <a:ext cx="10881360" cy="4754880"/>
+            <a:off x="822960" y="4297680"/>
+            <a:ext cx="10058400" cy="2011680"/>
           </a:xfrm>
           <a:prstGeom prst="rect">
             <a:avLst/>
@@ -7711,65 +8036,49 @@
           <a:p>
             <a:pPr algn="l">
               <a:spcAft>
-                <a:spcPts val="1000"/>
-              </a:spcAft>
-            </a:pPr>
-            <a:r>
-              <a:rPr sz="1700" b="0">
-                <a:solidFill>
-                  <a:srgbClr val="222222"/>
-                </a:solidFill>
-                <a:latin typeface="맑은 고딕"/>
-              </a:rPr>
-              <a:t>•  `PARAMETER_VALUE_CONVERT 'chicago','boston'` — 값 안의 문자열 일괄 치환</a:t>
-            </a:r>
-          </a:p>
-          <a:p>
-            <a:pPr algn="l">
-              <a:spcAft>
-                <a:spcPts val="1000"/>
-              </a:spcAft>
-            </a:pPr>
-            <a:r>
-              <a:rPr sz="1700" b="0">
-                <a:solidFill>
-                  <a:srgbClr val="222222"/>
-                </a:solidFill>
-                <a:latin typeface="맑은 고딕"/>
-              </a:rPr>
-              <a:t>•  그 대상에 `db_name`의 값도 포함된다</a:t>
-            </a:r>
-          </a:p>
-          <a:p>
-            <a:pPr algn="l">
-              <a:spcAft>
-                <a:spcPts val="1000"/>
-              </a:spcAft>
-            </a:pPr>
-            <a:r>
-              <a:rPr sz="1700" b="0">
-                <a:solidFill>
-                  <a:srgbClr val="222222"/>
-                </a:solidFill>
-                <a:latin typeface="맑은 고딕"/>
-              </a:rPr>
-              <a:t>•  물리 복제본은 DB_NAME이 같아야 하므로 되돌린다</a:t>
-            </a:r>
-          </a:p>
-          <a:p>
-            <a:pPr algn="l">
-              <a:spcAft>
-                <a:spcPts val="1000"/>
-              </a:spcAft>
-            </a:pPr>
-            <a:r>
-              <a:rPr sz="1700" b="0">
-                <a:solidFill>
-                  <a:srgbClr val="222222"/>
-                </a:solidFill>
-                <a:latin typeface="맑은 고딕"/>
-              </a:rPr>
-              <a:t>•  둘이 겹치면 **SET이 이긴다**</a:t>
+                <a:spcPts val="800"/>
+              </a:spcAft>
+            </a:pPr>
+            <a:r>
+              <a:rPr sz="1600" b="0">
+                <a:solidFill>
+                  <a:srgbClr val="FFFFFF"/>
+                </a:solidFill>
+                <a:latin typeface="맑은 고딕"/>
+              </a:rPr>
+              <a:t>•  패스워드 파일 복사</a:t>
+            </a:r>
+          </a:p>
+          <a:p>
+            <a:pPr algn="l">
+              <a:spcAft>
+                <a:spcPts val="800"/>
+              </a:spcAft>
+            </a:pPr>
+            <a:r>
+              <a:rPr sz="1600" b="0">
+                <a:solidFill>
+                  <a:srgbClr val="FFFFFF"/>
+                </a:solidFill>
+                <a:latin typeface="맑은 고딕"/>
+              </a:rPr>
+              <a:t>•  최소 초기 파라미터 파일과 디렉터리</a:t>
+            </a:r>
+          </a:p>
+          <a:p>
+            <a:pPr algn="l">
+              <a:spcAft>
+                <a:spcPts val="800"/>
+              </a:spcAft>
+            </a:pPr>
+            <a:r>
+              <a:rPr sz="1600" b="0">
+                <a:solidFill>
+                  <a:srgbClr val="FFFFFF"/>
+                </a:solidFill>
+                <a:latin typeface="맑은 고딕"/>
+              </a:rPr>
+              <a:t>•  NOMOUNT 기동과 원격 접속</a:t>
             </a:r>
           </a:p>
         </p:txBody>
@@ -7870,7 +8179,7 @@
                 </a:solidFill>
                 <a:latin typeface="맑은 고딕"/>
               </a:rPr>
-              <a:t>convert 파라미터</a:t>
+              <a:t>패스워드 파일 복사</a:t>
             </a:r>
           </a:p>
         </p:txBody>
@@ -7909,7 +8218,7 @@
                 </a:solidFill>
                 <a:latin typeface="맑은 고딕"/>
               </a:rPr>
-              <a:t>접두만 바뀐다</a:t>
+              <a:t>orapwd로 새로 만들지 않는다</a:t>
             </a:r>
           </a:p>
         </p:txBody>
@@ -7948,7 +8257,7 @@
                 </a:solidFill>
                 <a:latin typeface="맑은 고딕"/>
               </a:rPr>
-              <a:t>•  `/u03/.../Chicago/` → `/u03/.../Boston/datafile/`</a:t>
+              <a:t>•  Primary의 orapw 파일을 orapwboston으로 복사</a:t>
             </a:r>
           </a:p>
           <a:p>
@@ -7964,7 +8273,7 @@
                 </a:solidFill>
                 <a:latin typeface="맑은 고딕"/>
               </a:rPr>
-              <a:t>•  `system01.dbf` → `Boston/datafile/system01.dbf`</a:t>
+              <a:t>•  같은 비밀번호로 새로 만든 파일은 피함</a:t>
             </a:r>
           </a:p>
           <a:p>
@@ -7980,7 +8289,7 @@
                 </a:solidFill>
                 <a:latin typeface="맑은 고딕"/>
               </a:rPr>
-              <a:t>•  `chicago_pdb1/users01.dbf` → `Boston/datafile/chicago_pdb1/users01.dbf`</a:t>
+              <a:t>•  auxiliary 접속을 위해 DUPLICATE 전에 필요</a:t>
             </a:r>
           </a:p>
           <a:p>
@@ -7996,7 +8305,7 @@
                 </a:solidFill>
                 <a:latin typeface="맑은 고딕"/>
               </a:rPr>
-              <a:t>•  로그는 목적지가 다르다 → `Boston/onlinelog/`</a:t>
+              <a:t>•  DUPLICATE가 실행 중 Primary 파일로 다시 덮어씀</a:t>
             </a:r>
           </a:p>
         </p:txBody>
@@ -8028,7 +8337,7 @@
         <p:spPr>
           <a:xfrm>
             <a:off x="0" y="0"/>
-            <a:ext cx="12191695" cy="6858000"/>
+            <a:ext cx="12191695" cy="1005840"/>
           </a:xfrm>
           <a:prstGeom prst="rect">
             <a:avLst/>
@@ -8071,8 +8380,8 @@
         </p:nvSpPr>
         <p:spPr>
           <a:xfrm>
-            <a:off x="822960" y="2011680"/>
-            <a:ext cx="10515600" cy="1097280"/>
+            <a:off x="548640" y="91440"/>
+            <a:ext cx="10972800" cy="777240"/>
           </a:xfrm>
           <a:prstGeom prst="rect">
             <a:avLst/>
@@ -8091,13 +8400,13 @@
               </a:spcAft>
             </a:pPr>
             <a:r>
-              <a:rPr sz="4000" b="1">
+              <a:rPr sz="2600" b="1">
                 <a:solidFill>
                   <a:srgbClr val="FFFFFF"/>
                 </a:solidFill>
                 <a:latin typeface="맑은 고딕"/>
               </a:rPr>
-              <a:t>5.6</a:t>
+              <a:t>최소 초기 파라미터 파일</a:t>
             </a:r>
           </a:p>
         </p:txBody>
@@ -8110,8 +8419,8 @@
         </p:nvSpPr>
         <p:spPr>
           <a:xfrm>
-            <a:off x="822960" y="3017520"/>
-            <a:ext cx="10515600" cy="914400"/>
+            <a:off x="640080" y="1078992"/>
+            <a:ext cx="10881360" cy="457200"/>
           </a:xfrm>
           <a:prstGeom prst="rect">
             <a:avLst/>
@@ -8130,71 +8439,27 @@
               </a:spcAft>
             </a:pPr>
             <a:r>
-              <a:rPr sz="2800" b="1">
-                <a:solidFill>
-                  <a:srgbClr val="FFFFFF"/>
-                </a:solidFill>
-                <a:latin typeface="맑은 고딕"/>
-              </a:rPr>
-              <a:t>실패 두 번</a:t>
-            </a:r>
-          </a:p>
-        </p:txBody>
-      </p:sp>
-      <p:sp>
-        <p:nvSpPr>
-          <p:cNvPr id="5" name="Rectangle 4"/>
-          <p:cNvSpPr/>
-          <p:nvPr/>
-        </p:nvSpPr>
-        <p:spPr>
-          <a:xfrm>
-            <a:off x="822960" y="4114800"/>
-            <a:ext cx="5486400" cy="54864"/>
-          </a:xfrm>
-          <a:prstGeom prst="rect">
-            <a:avLst/>
-          </a:prstGeom>
-          <a:solidFill>
-            <a:srgbClr val="FFFFFF"/>
-          </a:solidFill>
-          <a:ln>
-            <a:noFill/>
-          </a:ln>
-          <a:effectLst/>
-        </p:spPr>
-        <p:style>
-          <a:lnRef idx="1">
-            <a:schemeClr val="accent1"/>
-          </a:lnRef>
-          <a:fillRef idx="3">
-            <a:schemeClr val="accent1"/>
-          </a:fillRef>
-          <a:effectRef idx="2">
-            <a:schemeClr val="accent1"/>
-          </a:effectRef>
-          <a:fontRef idx="minor">
-            <a:schemeClr val="lt1"/>
-          </a:fontRef>
-        </p:style>
-        <p:txBody>
-          <a:bodyPr rtlCol="0" anchor="ctr"/>
-          <a:lstStyle/>
-          <a:p>
-            <a:pPr algn="ctr"/>
-          </a:p>
-        </p:txBody>
-      </p:sp>
-      <p:sp>
-        <p:nvSpPr>
-          <p:cNvPr id="6" name="TextBox 5"/>
+              <a:rPr sz="1500" b="0">
+                <a:solidFill>
+                  <a:srgbClr val="5A6672"/>
+                </a:solidFill>
+                <a:latin typeface="맑은 고딕"/>
+              </a:rPr>
+              <a:t>DB_NAME 한 줄이면 충분</a:t>
+            </a:r>
+          </a:p>
+        </p:txBody>
+      </p:sp>
+      <p:sp>
+        <p:nvSpPr>
+          <p:cNvPr id="5" name="TextBox 4"/>
           <p:cNvSpPr txBox="1"/>
           <p:nvPr/>
         </p:nvSpPr>
         <p:spPr>
           <a:xfrm>
-            <a:off x="822960" y="4297680"/>
-            <a:ext cx="10058400" cy="2011680"/>
+            <a:off x="640080" y="1737360"/>
+            <a:ext cx="10881360" cy="4754880"/>
           </a:xfrm>
           <a:prstGeom prst="rect">
             <a:avLst/>
@@ -8209,49 +8474,65 @@
           <a:p>
             <a:pPr algn="l">
               <a:spcAft>
-                <a:spcPts val="800"/>
-              </a:spcAft>
-            </a:pPr>
-            <a:r>
-              <a:rPr sz="1600" b="0">
-                <a:solidFill>
-                  <a:srgbClr val="FFFFFF"/>
-                </a:solidFill>
-                <a:latin typeface="맑은 고딕"/>
-              </a:rPr>
-              <a:t>•  첫 번째 — convert가 없으면</a:t>
-            </a:r>
-          </a:p>
-          <a:p>
-            <a:pPr algn="l">
-              <a:spcAft>
-                <a:spcPts val="800"/>
-              </a:spcAft>
-            </a:pPr>
-            <a:r>
-              <a:rPr sz="1600" b="0">
-                <a:solidFill>
-                  <a:srgbClr val="FFFFFF"/>
-                </a:solidFill>
-                <a:latin typeface="맑은 고딕"/>
-              </a:rPr>
-              <a:t>•  두 번째 — 디렉터리가 없으면</a:t>
-            </a:r>
-          </a:p>
-          <a:p>
-            <a:pPr algn="l">
-              <a:spcAft>
-                <a:spcPts val="800"/>
-              </a:spcAft>
-            </a:pPr>
-            <a:r>
-              <a:rPr sz="1600" b="0">
-                <a:solidFill>
-                  <a:srgbClr val="FFFFFF"/>
-                </a:solidFill>
-                <a:latin typeface="맑은 고딕"/>
-              </a:rPr>
-              <a:t>•  오류 스택 읽는 법</a:t>
+                <a:spcPts val="1000"/>
+              </a:spcAft>
+            </a:pPr>
+            <a:r>
+              <a:rPr sz="1700" b="0">
+                <a:solidFill>
+                  <a:srgbClr val="222222"/>
+                </a:solidFill>
+                <a:latin typeface="맑은 고딕"/>
+              </a:rPr>
+              <a:t>•  NOMOUNT 기동에 필요한 최소 값만 기록</a:t>
+            </a:r>
+          </a:p>
+          <a:p>
+            <a:pPr algn="l">
+              <a:spcAft>
+                <a:spcPts val="1000"/>
+              </a:spcAft>
+            </a:pPr>
+            <a:r>
+              <a:rPr sz="1700" b="0">
+                <a:solidFill>
+                  <a:srgbClr val="222222"/>
+                </a:solidFill>
+                <a:latin typeface="맑은 고딕"/>
+              </a:rPr>
+              <a:t>•  메모리 값이 없으면 기본 SGA로 기동</a:t>
+            </a:r>
+          </a:p>
+          <a:p>
+            <a:pPr algn="l">
+              <a:spcAft>
+                <a:spcPts val="1000"/>
+              </a:spcAft>
+            </a:pPr>
+            <a:r>
+              <a:rPr sz="1700" b="0">
+                <a:solidFill>
+                  <a:srgbClr val="222222"/>
+                </a:solidFill>
+                <a:latin typeface="맑은 고딕"/>
+              </a:rPr>
+              <a:t>•  SPFILE 절이 Primary 값으로 모두 대체</a:t>
+            </a:r>
+          </a:p>
+          <a:p>
+            <a:pPr algn="l">
+              <a:spcAft>
+                <a:spcPts val="1000"/>
+              </a:spcAft>
+            </a:pPr>
+            <a:r>
+              <a:rPr sz="1700" b="0">
+                <a:solidFill>
+                  <a:srgbClr val="222222"/>
+                </a:solidFill>
+                <a:latin typeface="맑은 고딕"/>
+              </a:rPr>
+              <a:t>•  CDB 복제 시 enable_pluggable_database=true</a:t>
             </a:r>
           </a:p>
         </p:txBody>
@@ -8352,7 +8633,7 @@
                 </a:solidFill>
                 <a:latin typeface="맑은 고딕"/>
               </a:rPr>
-              <a:t>학습 목표 (Objectives)</a:t>
+              <a:t>학습 목표</a:t>
             </a:r>
           </a:p>
         </p:txBody>
@@ -8391,7 +8672,7 @@
                 </a:solidFill>
                 <a:latin typeface="맑은 고딕"/>
               </a:rPr>
-              <a:t>•  `DUPLICATE ... FOR STANDBY FROM ACTIVE DATABASE`의 각 절이 무엇을 결정하는지 설명한다.</a:t>
+              <a:t>•  Standby가 Primary와 공유하는 것과 달라야 하는 것을 구분한다</a:t>
             </a:r>
           </a:p>
           <a:p>
@@ -8407,7 +8688,7 @@
                 </a:solidFill>
                 <a:latin typeface="맑은 고딕"/>
               </a:rPr>
-              <a:t>•  Standby 초기 pfile이 두 줄로 충분한 이유와 나머지 파라미터가 채워지는 시점을 안다.</a:t>
+              <a:t>•  Standby 생성 방법들을 비교하고 상황에 맞게 고른다</a:t>
             </a:r>
           </a:p>
           <a:p>
@@ -8423,7 +8704,7 @@
                 </a:solidFill>
                 <a:latin typeface="맑은 고딕"/>
               </a:rPr>
-              <a:t>•  convert 파라미터와 NOFILENAMECHECK의 관계를 설명하고, 한쪽만 쓰는 것의 위험을 안다.</a:t>
+              <a:t>•  패스워드 파일, 최소 pfile, NOMOUNT 기동의 이유를 설명한다</a:t>
             </a:r>
           </a:p>
           <a:p>
@@ -8439,7 +8720,7 @@
                 </a:solidFill>
                 <a:latin typeface="맑은 고딕"/>
               </a:rPr>
-              <a:t>•  DUPLICATE 실패 두 유형(RMAN-05001, ORA-19505)을 구분하고 진단 경로를 댄다.</a:t>
+              <a:t>•  DUPLICATE FOR STANDBY의 각 절과 옵션을 해석한다</a:t>
             </a:r>
           </a:p>
           <a:p>
@@ -8455,7 +8736,7 @@
                 </a:solidFill>
                 <a:latin typeface="맑은 고딕"/>
               </a:rPr>
-              <a:t>•  복제 결과를 기준값과 대조해 검증하고, MOUNTED에서 ADG로 전환한다.</a:t>
+              <a:t>•  convert 파라미터로 Standby 경로를 설계한다</a:t>
             </a:r>
           </a:p>
           <a:p>
@@ -8471,23 +8752,7 @@
                 </a:solidFill>
                 <a:latin typeface="맑은 고딕"/>
               </a:rPr>
-              <a:t>•  `DBMS_DBCOMP.DBCOMP`로 블록을 비교하고 보고서의 판정 열을 읽는다.</a:t>
-            </a:r>
-          </a:p>
-          <a:p>
-            <a:pPr algn="l">
-              <a:spcAft>
-                <a:spcPts val="1000"/>
-              </a:spcAft>
-            </a:pPr>
-            <a:r>
-              <a:rPr sz="1600" b="0">
-                <a:solidFill>
-                  <a:srgbClr val="222222"/>
-                </a:solidFill>
-                <a:latin typeface="맑은 고딕"/>
-              </a:rPr>
-              <a:t>•  경로 지정 방식의 구조적 약점을 설명하고 6장 OMF와 대비한다.</a:t>
+              <a:t>•  실패 원인을 분류하고 생성 후 확인 순서를 따른다</a:t>
             </a:r>
           </a:p>
         </p:txBody>
@@ -8588,7 +8853,7 @@
                 </a:solidFill>
                 <a:latin typeface="맑은 고딕"/>
               </a:rPr>
-              <a:t>첫 번째 실패</a:t>
+              <a:t>디렉터리 준비</a:t>
             </a:r>
           </a:p>
         </p:txBody>
@@ -8627,7 +8892,7 @@
                 </a:solidFill>
                 <a:latin typeface="맑은 고딕"/>
               </a:rPr>
-              <a:t>RMAN-05538 → RMAN-05001 ×11</a:t>
+              <a:t>convert는 이름만 바꾸고 디렉터리는 만들지 않음</a:t>
             </a:r>
           </a:p>
         </p:txBody>
@@ -8666,7 +8931,7 @@
                 </a:solidFill>
                 <a:latin typeface="맑은 고딕"/>
               </a:rPr>
-              <a:t>•  경고 : `warning: implicitly using DB_FILE_NAME_CONVERT`</a:t>
+              <a:t>•  데이터 파일: 루트, PDB 시드, 각 PDB 하위까지</a:t>
             </a:r>
           </a:p>
           <a:p>
@@ -8682,7 +8947,7 @@
                 </a:solidFill>
                 <a:latin typeface="맑은 고딕"/>
               </a:rPr>
-              <a:t>•  오류 : `auxiliary file name ... conflicts with a file used by the target database`</a:t>
+              <a:t>•  컨트롤 파일, 온라인 로그 위치</a:t>
             </a:r>
           </a:p>
           <a:p>
@@ -8698,7 +8963,7 @@
                 </a:solidFill>
                 <a:latin typeface="맑은 고딕"/>
               </a:rPr>
-              <a:t>•  경로가 **Chicago**다 — 변환이 전혀 없었다</a:t>
+              <a:t>•  AUDIT_FILE_DEST, FRA</a:t>
             </a:r>
           </a:p>
           <a:p>
@@ -8714,7 +8979,7 @@
                 </a:solidFill>
                 <a:latin typeface="맑은 고딕"/>
               </a:rPr>
-              <a:t>•  파일 열한 개마다 한 줄씩, 총 11줄</a:t>
+              <a:t>•  없으면 파일 생성 단계에서 실패</a:t>
             </a:r>
           </a:p>
         </p:txBody>
@@ -8815,7 +9080,7 @@
                 </a:solidFill>
                 <a:latin typeface="맑은 고딕"/>
               </a:rPr>
-              <a:t>여기서 하는 오해</a:t>
+              <a:t>NOMOUNT 기동과 원격 접속</a:t>
             </a:r>
           </a:p>
         </p:txBody>
@@ -8854,7 +9119,7 @@
                 </a:solidFill>
                 <a:latin typeface="맑은 고딕"/>
               </a:rPr>
-              <a:t>"검사를 끄면 되겠다"</a:t>
+              <a:t>정적 등록이 필요한 이유</a:t>
             </a:r>
           </a:p>
         </p:txBody>
@@ -8893,7 +9158,7 @@
                 </a:solidFill>
                 <a:latin typeface="맑은 고딕"/>
               </a:rPr>
-              <a:t>•  NOFILENAMECHECK를 넣으면 검사는 통과한다</a:t>
+              <a:t>•  ORACLE_SID=boston 지정 후 STARTUP NOMOUNT</a:t>
             </a:r>
           </a:p>
           <a:p>
@@ -8909,7 +9174,7 @@
                 </a:solidFill>
                 <a:latin typeface="맑은 고딕"/>
               </a:rPr>
-              <a:t>•  그러나 경로는 여전히 Chicago다</a:t>
+              <a:t>•  NOMOUNT 인스턴스는 리스너에서 BLOCKED</a:t>
             </a:r>
           </a:p>
           <a:p>
@@ -8925,7 +9190,7 @@
                 </a:solidFill>
                 <a:latin typeface="맑은 고딕"/>
               </a:rPr>
-              <a:t>•  결과 : **Primary 데이터 파일을 실제로 덮어쓴다**</a:t>
+              <a:t>•  서비스 접속 시 ORA-12528</a:t>
             </a:r>
           </a:p>
           <a:p>
@@ -8941,7 +9206,7 @@
                 </a:solidFill>
                 <a:latin typeface="맑은 고딕"/>
               </a:rPr>
-              <a:t>•  올바른 조치는 convert 파라미터를 넣는 것</a:t>
+              <a:t>•  정적 등록은 DUPLICATE 중 재기동에도 필요</a:t>
             </a:r>
           </a:p>
         </p:txBody>
@@ -8973,7 +9238,7 @@
         <p:spPr>
           <a:xfrm>
             <a:off x="0" y="0"/>
-            <a:ext cx="12191695" cy="1005840"/>
+            <a:ext cx="12191695" cy="6858000"/>
           </a:xfrm>
           <a:prstGeom prst="rect">
             <a:avLst/>
@@ -9016,8 +9281,8 @@
         </p:nvSpPr>
         <p:spPr>
           <a:xfrm>
-            <a:off x="548640" y="91440"/>
-            <a:ext cx="10972800" cy="777240"/>
+            <a:off x="822960" y="2011680"/>
+            <a:ext cx="10515600" cy="1097280"/>
           </a:xfrm>
           <a:prstGeom prst="rect">
             <a:avLst/>
@@ -9036,13 +9301,13 @@
               </a:spcAft>
             </a:pPr>
             <a:r>
-              <a:rPr sz="2600" b="1">
+              <a:rPr sz="4000" b="1">
                 <a:solidFill>
                   <a:srgbClr val="FFFFFF"/>
                 </a:solidFill>
                 <a:latin typeface="맑은 고딕"/>
               </a:rPr>
-              <a:t>두 번째 실패</a:t>
+              <a:t>5.6</a:t>
             </a:r>
           </a:p>
         </p:txBody>
@@ -9055,8 +9320,8 @@
         </p:nvSpPr>
         <p:spPr>
           <a:xfrm>
-            <a:off x="640080" y="1078992"/>
-            <a:ext cx="10881360" cy="457200"/>
+            <a:off x="822960" y="3017520"/>
+            <a:ext cx="10515600" cy="914400"/>
           </a:xfrm>
           <a:prstGeom prst="rect">
             <a:avLst/>
@@ -9075,27 +9340,71 @@
               </a:spcAft>
             </a:pPr>
             <a:r>
-              <a:rPr sz="1500" b="0">
-                <a:solidFill>
-                  <a:srgbClr val="5A6672"/>
-                </a:solidFill>
-                <a:latin typeface="맑은 고딕"/>
-              </a:rPr>
-              <a:t>ORA-17628 + ORA-19505</a:t>
-            </a:r>
-          </a:p>
-        </p:txBody>
-      </p:sp>
-      <p:sp>
-        <p:nvSpPr>
-          <p:cNvPr id="5" name="TextBox 4"/>
+              <a:rPr sz="2800" b="1">
+                <a:solidFill>
+                  <a:srgbClr val="FFFFFF"/>
+                </a:solidFill>
+                <a:latin typeface="맑은 고딕"/>
+              </a:rPr>
+              <a:t>DUPLICATE ... FOR STANDBY 명령 구성</a:t>
+            </a:r>
+          </a:p>
+        </p:txBody>
+      </p:sp>
+      <p:sp>
+        <p:nvSpPr>
+          <p:cNvPr id="5" name="Rectangle 4"/>
+          <p:cNvSpPr/>
+          <p:nvPr/>
+        </p:nvSpPr>
+        <p:spPr>
+          <a:xfrm>
+            <a:off x="822960" y="4114800"/>
+            <a:ext cx="5486400" cy="54864"/>
+          </a:xfrm>
+          <a:prstGeom prst="rect">
+            <a:avLst/>
+          </a:prstGeom>
+          <a:solidFill>
+            <a:srgbClr val="FFFFFF"/>
+          </a:solidFill>
+          <a:ln>
+            <a:noFill/>
+          </a:ln>
+          <a:effectLst/>
+        </p:spPr>
+        <p:style>
+          <a:lnRef idx="1">
+            <a:schemeClr val="accent1"/>
+          </a:lnRef>
+          <a:fillRef idx="3">
+            <a:schemeClr val="accent1"/>
+          </a:fillRef>
+          <a:effectRef idx="2">
+            <a:schemeClr val="accent1"/>
+          </a:effectRef>
+          <a:fontRef idx="minor">
+            <a:schemeClr val="lt1"/>
+          </a:fontRef>
+        </p:style>
+        <p:txBody>
+          <a:bodyPr rtlCol="0" anchor="ctr"/>
+          <a:lstStyle/>
+          <a:p>
+            <a:pPr algn="ctr"/>
+          </a:p>
+        </p:txBody>
+      </p:sp>
+      <p:sp>
+        <p:nvSpPr>
+          <p:cNvPr id="6" name="TextBox 5"/>
           <p:cNvSpPr txBox="1"/>
           <p:nvPr/>
         </p:nvSpPr>
         <p:spPr>
           <a:xfrm>
-            <a:off x="640080" y="1737360"/>
-            <a:ext cx="10881360" cy="4754880"/>
+            <a:off x="822960" y="4297680"/>
+            <a:ext cx="10058400" cy="2011680"/>
           </a:xfrm>
           <a:prstGeom prst="rect">
             <a:avLst/>
@@ -9110,65 +9419,65 @@
           <a:p>
             <a:pPr algn="l">
               <a:spcAft>
-                <a:spcPts val="1000"/>
-              </a:spcAft>
-            </a:pPr>
-            <a:r>
-              <a:rPr sz="1700" b="0">
-                <a:solidFill>
-                  <a:srgbClr val="222222"/>
-                </a:solidFill>
-                <a:latin typeface="맑은 고딕"/>
-              </a:rPr>
-              <a:t>•  올바른 스크립트인데도 실패했다</a:t>
-            </a:r>
-          </a:p>
-          <a:p>
-            <a:pPr algn="l">
-              <a:spcAft>
-                <a:spcPts val="1000"/>
-              </a:spcAft>
-            </a:pPr>
-            <a:r>
-              <a:rPr sz="1700" b="0">
-                <a:solidFill>
-                  <a:srgbClr val="222222"/>
-                </a:solidFill>
-                <a:latin typeface="맑은 고딕"/>
-              </a:rPr>
-              <a:t>•  1·3·4번 파일은 output이 나왔다 — 성공</a:t>
-            </a:r>
-          </a:p>
-          <a:p>
-            <a:pPr algn="l">
-              <a:spcAft>
-                <a:spcPts val="1000"/>
-              </a:spcAft>
-            </a:pPr>
-            <a:r>
-              <a:rPr sz="1700" b="0">
-                <a:solidFill>
-                  <a:srgbClr val="222222"/>
-                </a:solidFill>
-                <a:latin typeface="맑은 고딕"/>
-              </a:rPr>
-              <a:t>•  6번(`pdbseed/sysaux01.dbf`)에서 멈췄다</a:t>
-            </a:r>
-          </a:p>
-          <a:p>
-            <a:pPr algn="l">
-              <a:spcAft>
-                <a:spcPts val="1000"/>
-              </a:spcAft>
-            </a:pPr>
-            <a:r>
-              <a:rPr sz="1700" b="0">
-                <a:solidFill>
-                  <a:srgbClr val="222222"/>
-                </a:solidFill>
-                <a:latin typeface="맑은 고딕"/>
-              </a:rPr>
-              <a:t>•  공통점 : 실패한 파일은 **하위 디렉터리 아래** 있다</a:t>
+                <a:spcPts val="800"/>
+              </a:spcAft>
+            </a:pPr>
+            <a:r>
+              <a:rPr sz="1600" b="0">
+                <a:solidFill>
+                  <a:srgbClr val="FFFFFF"/>
+                </a:solidFill>
+                <a:latin typeface="맑은 고딕"/>
+              </a:rPr>
+              <a:t>•  접속과 채널, 파일 전송 방식</a:t>
+            </a:r>
+          </a:p>
+          <a:p>
+            <a:pPr algn="l">
+              <a:spcAft>
+                <a:spcPts val="800"/>
+              </a:spcAft>
+            </a:pPr>
+            <a:r>
+              <a:rPr sz="1600" b="0">
+                <a:solidFill>
+                  <a:srgbClr val="FFFFFF"/>
+                </a:solidFill>
+                <a:latin typeface="맑은 고딕"/>
+              </a:rPr>
+              <a:t>•  SPFILE 절, PARAMETER_VALUE_CONVERT, SET</a:t>
+            </a:r>
+          </a:p>
+          <a:p>
+            <a:pPr algn="l">
+              <a:spcAft>
+                <a:spcPts val="800"/>
+              </a:spcAft>
+            </a:pPr>
+            <a:r>
+              <a:rPr sz="1600" b="0">
+                <a:solidFill>
+                  <a:srgbClr val="FFFFFF"/>
+                </a:solidFill>
+                <a:latin typeface="맑은 고딕"/>
+              </a:rPr>
+              <a:t>•  DORECOVER, NOFILENAMECHECK</a:t>
+            </a:r>
+          </a:p>
+          <a:p>
+            <a:pPr algn="l">
+              <a:spcAft>
+                <a:spcPts val="800"/>
+              </a:spcAft>
+            </a:pPr>
+            <a:r>
+              <a:rPr sz="1600" b="0">
+                <a:solidFill>
+                  <a:srgbClr val="FFFFFF"/>
+                </a:solidFill>
+                <a:latin typeface="맑은 고딕"/>
+              </a:rPr>
+              <a:t>•  병렬 채널, SECTION SIZE, 압축</a:t>
             </a:r>
           </a:p>
         </p:txBody>
@@ -9269,7 +9578,7 @@
                 </a:solidFill>
                 <a:latin typeface="맑은 고딕"/>
               </a:rPr>
-              <a:t>빈 따옴표의 오류</a:t>
+              <a:t>명령의 전체 형태</a:t>
             </a:r>
           </a:p>
         </p:txBody>
@@ -9308,7 +9617,7 @@
                 </a:solidFill>
                 <a:latin typeface="맑은 고딕"/>
               </a:rPr>
-              <a:t>`failed to identify file ""`</a:t>
+              <a:t>한 명령에 Standby의 모양이 담김</a:t>
             </a:r>
           </a:p>
         </p:txBody>
@@ -9347,7 +9656,7 @@
                 </a:solidFill>
                 <a:latin typeface="맑은 고딕"/>
               </a:rPr>
-              <a:t>•  어느 파일인지 알려 주지 않는다</a:t>
+              <a:t>•  RUN 블록: target 채널과 auxiliary 채널</a:t>
             </a:r>
           </a:p>
           <a:p>
@@ -9363,7 +9672,7 @@
                 </a:solidFill>
                 <a:latin typeface="맑은 고딕"/>
               </a:rPr>
-              <a:t>•  해법 : 로그에서 **바로 앞의 input datafile 줄**을 본다</a:t>
+              <a:t>•  FOR STANDBY FROM ACTIVE DATABASE</a:t>
             </a:r>
           </a:p>
           <a:p>
@@ -9379,7 +9688,7 @@
                 </a:solidFill>
                 <a:latin typeface="맑은 고딕"/>
               </a:rPr>
-              <a:t>•  286번 줄 : `input datafile file number=00006 ... pdbseed/sysaux01.dbf`</a:t>
+              <a:t>•  DORECOVER, SPFILE 절과 SET 절</a:t>
             </a:r>
           </a:p>
           <a:p>
@@ -9395,7 +9704,7 @@
                 </a:solidFill>
                 <a:latin typeface="맑은 고딕"/>
               </a:rPr>
-              <a:t>•  287번 줄 : 오류</a:t>
+              <a:t>•  NOFILENAMECHECK로 마무리</a:t>
             </a:r>
           </a:p>
         </p:txBody>
@@ -9496,7 +9805,7 @@
                 </a:solidFill>
                 <a:latin typeface="맑은 고딕"/>
               </a:rPr>
-              <a:t>오류 스택은 아래에서 위로</a:t>
+              <a:t>접속과 채널</a:t>
             </a:r>
           </a:p>
         </p:txBody>
@@ -9535,7 +9844,7 @@
                 </a:solidFill>
                 <a:latin typeface="맑은 고딕"/>
               </a:rPr>
-              <a:t>안쪽이 원인</a:t>
+              <a:t>target은 Primary, auxiliary는 Standby</a:t>
             </a:r>
           </a:p>
         </p:txBody>
@@ -9574,7 +9883,7 @@
                 </a:solidFill>
                 <a:latin typeface="맑은 고딕"/>
               </a:rPr>
-              <a:t>•  ORA-19505 — 진짜 원인. 파일을 만들 수 없다</a:t>
+              <a:t>•  양쪽 모두 Oracle Net 서비스 이름으로 접속</a:t>
             </a:r>
           </a:p>
           <a:p>
@@ -9590,7 +9899,7 @@
                 </a:solidFill>
                 <a:latin typeface="맑은 고딕"/>
               </a:rPr>
-              <a:t>•  ORA-17628 — 방향. **원격(Standby) 쪽** 오류다</a:t>
+              <a:t>•  리커버리 카탈로그는 필수가 아님</a:t>
             </a:r>
           </a:p>
           <a:p>
@@ -9606,7 +9915,7 @@
                 </a:solidFill>
                 <a:latin typeface="맑은 고딕"/>
               </a:rPr>
-              <a:t>•  RMAN-03009 — 위치와 시각. c2 채널, 09:21:47</a:t>
+              <a:t>•  ALLOCATE CHANNEL은 target 쪽 프로세스</a:t>
             </a:r>
           </a:p>
           <a:p>
@@ -9622,7 +9931,7 @@
                 </a:solidFill>
                 <a:latin typeface="맑은 고딕"/>
               </a:rPr>
-              <a:t>•  RMAN-05501 / RMAN-03002 — 결과 통보일 뿐</a:t>
+              <a:t>•  auxiliary 채널은 최소 하나 필요</a:t>
             </a:r>
           </a:p>
         </p:txBody>
@@ -9723,7 +10032,7 @@
                 </a:solidFill>
                 <a:latin typeface="맑은 고딕"/>
               </a:rPr>
-              <a:t>두 실패의 대조</a:t>
+              <a:t>파일 전송 방식: push와 pull</a:t>
             </a:r>
           </a:p>
         </p:txBody>
@@ -9762,7 +10071,7 @@
                 </a:solidFill>
                 <a:latin typeface="맑은 고딕"/>
               </a:rPr>
-              <a:t>성격이 다르다</a:t>
+              <a:t>12c 이후 Active DUPLICATE의 두 형태</a:t>
             </a:r>
           </a:p>
         </p:txBody>
@@ -9801,7 +10110,7 @@
                 </a:solidFill>
                 <a:latin typeface="맑은 고딕"/>
               </a:rPr>
-              <a:t>•  첫 번째 : 전송 **전**에 막힘 — 남은 파일 없음</a:t>
+              <a:t>•  push: target 채널이 이미지 사본을 밀어 보냄</a:t>
             </a:r>
           </a:p>
           <a:p>
@@ -9817,7 +10126,7 @@
                 </a:solidFill>
                 <a:latin typeface="맑은 고딕"/>
               </a:rPr>
-              <a:t>•  두 번째 : 전송 **도중** 막힘 — 일부 파일이 남는다</a:t>
+              <a:t>•  pull: auxiliary 채널이 백업 셋을 끌어옴</a:t>
             </a:r>
           </a:p>
           <a:p>
@@ -9833,7 +10142,7 @@
                 </a:solidFill>
                 <a:latin typeface="맑은 고딕"/>
               </a:rPr>
-              <a:t>•  첫 번째는 스크립트 문제, 두 번째는 환경 문제</a:t>
+              <a:t>•  USING BACKUPSET, SECTION SIZE 지정 시 pull</a:t>
             </a:r>
           </a:p>
           <a:p>
@@ -9849,7 +10158,7 @@
                 </a:solidFill>
                 <a:latin typeface="맑은 고딕"/>
               </a:rPr>
-              <a:t>•  두 경우 모두 Primary는 무사하다</a:t>
+              <a:t>•  auxiliary 채널 수가 target 이상이어도 pull</a:t>
             </a:r>
           </a:p>
         </p:txBody>
@@ -9881,7 +10190,7 @@
         <p:spPr>
           <a:xfrm>
             <a:off x="0" y="0"/>
-            <a:ext cx="12191695" cy="6858000"/>
+            <a:ext cx="12191695" cy="1005840"/>
           </a:xfrm>
           <a:prstGeom prst="rect">
             <a:avLst/>
@@ -9924,8 +10233,8 @@
         </p:nvSpPr>
         <p:spPr>
           <a:xfrm>
-            <a:off x="822960" y="2011680"/>
-            <a:ext cx="10515600" cy="1097280"/>
+            <a:off x="548640" y="91440"/>
+            <a:ext cx="10972800" cy="777240"/>
           </a:xfrm>
           <a:prstGeom prst="rect">
             <a:avLst/>
@@ -9944,13 +10253,13 @@
               </a:spcAft>
             </a:pPr>
             <a:r>
-              <a:rPr sz="4000" b="1">
+              <a:rPr sz="2600" b="1">
                 <a:solidFill>
                   <a:srgbClr val="FFFFFF"/>
                 </a:solidFill>
                 <a:latin typeface="맑은 고딕"/>
               </a:rPr>
-              <a:t>5.7</a:t>
+              <a:t>SPFILE 절과 PARAMETER_VALUE_CONVERT</a:t>
             </a:r>
           </a:p>
         </p:txBody>
@@ -9963,8 +10272,8 @@
         </p:nvSpPr>
         <p:spPr>
           <a:xfrm>
-            <a:off x="822960" y="3017520"/>
-            <a:ext cx="10515600" cy="914400"/>
+            <a:off x="640080" y="1078992"/>
+            <a:ext cx="10881360" cy="457200"/>
           </a:xfrm>
           <a:prstGeom prst="rect">
             <a:avLst/>
@@ -9983,71 +10292,27 @@
               </a:spcAft>
             </a:pPr>
             <a:r>
-              <a:rPr sz="2800" b="1">
-                <a:solidFill>
-                  <a:srgbClr val="FFFFFF"/>
-                </a:solidFill>
-                <a:latin typeface="맑은 고딕"/>
-              </a:rPr>
-              <a:t>성공한 DUPLICATE</a:t>
-            </a:r>
-          </a:p>
-        </p:txBody>
-      </p:sp>
-      <p:sp>
-        <p:nvSpPr>
-          <p:cNvPr id="5" name="Rectangle 4"/>
-          <p:cNvSpPr/>
-          <p:nvPr/>
-        </p:nvSpPr>
-        <p:spPr>
-          <a:xfrm>
-            <a:off x="822960" y="4114800"/>
-            <a:ext cx="5486400" cy="54864"/>
-          </a:xfrm>
-          <a:prstGeom prst="rect">
-            <a:avLst/>
-          </a:prstGeom>
-          <a:solidFill>
-            <a:srgbClr val="FFFFFF"/>
-          </a:solidFill>
-          <a:ln>
-            <a:noFill/>
-          </a:ln>
-          <a:effectLst/>
-        </p:spPr>
-        <p:style>
-          <a:lnRef idx="1">
-            <a:schemeClr val="accent1"/>
-          </a:lnRef>
-          <a:fillRef idx="3">
-            <a:schemeClr val="accent1"/>
-          </a:fillRef>
-          <a:effectRef idx="2">
-            <a:schemeClr val="accent1"/>
-          </a:effectRef>
-          <a:fontRef idx="minor">
-            <a:schemeClr val="lt1"/>
-          </a:fontRef>
-        </p:style>
-        <p:txBody>
-          <a:bodyPr rtlCol="0" anchor="ctr"/>
-          <a:lstStyle/>
-          <a:p>
-            <a:pPr algn="ctr"/>
-          </a:p>
-        </p:txBody>
-      </p:sp>
-      <p:sp>
-        <p:nvSpPr>
-          <p:cNvPr id="6" name="TextBox 5"/>
+              <a:rPr sz="1500" b="0">
+                <a:solidFill>
+                  <a:srgbClr val="5A6672"/>
+                </a:solidFill>
+                <a:latin typeface="맑은 고딕"/>
+              </a:rPr>
+              <a:t>일괄 치환과 그 부작용</a:t>
+            </a:r>
+          </a:p>
+        </p:txBody>
+      </p:sp>
+      <p:sp>
+        <p:nvSpPr>
+          <p:cNvPr id="5" name="TextBox 4"/>
           <p:cNvSpPr txBox="1"/>
           <p:nvPr/>
         </p:nvSpPr>
         <p:spPr>
           <a:xfrm>
-            <a:off x="822960" y="4297680"/>
-            <a:ext cx="10058400" cy="2011680"/>
+            <a:off x="640080" y="1737360"/>
+            <a:ext cx="10881360" cy="4754880"/>
           </a:xfrm>
           <a:prstGeom prst="rect">
             <a:avLst/>
@@ -10062,49 +10327,65 @@
           <a:p>
             <a:pPr algn="l">
               <a:spcAft>
-                <a:spcPts val="800"/>
-              </a:spcAft>
-            </a:pPr>
-            <a:r>
-              <a:rPr sz="1600" b="0">
-                <a:solidFill>
-                  <a:srgbClr val="FFFFFF"/>
-                </a:solidFill>
-                <a:latin typeface="맑은 고딕"/>
-              </a:rPr>
-              <a:t>•  성공의 세 조건</a:t>
-            </a:r>
-          </a:p>
-          <a:p>
-            <a:pPr algn="l">
-              <a:spcAft>
-                <a:spcPts val="800"/>
-              </a:spcAft>
-            </a:pPr>
-            <a:r>
-              <a:rPr sz="1600" b="0">
-                <a:solidFill>
-                  <a:srgbClr val="FFFFFF"/>
-                </a:solidFill>
-                <a:latin typeface="맑은 고딕"/>
-              </a:rPr>
-              <a:t>•  로그 읽는 순서</a:t>
-            </a:r>
-          </a:p>
-          <a:p>
-            <a:pPr algn="l">
-              <a:spcAft>
-                <a:spcPts val="800"/>
-              </a:spcAft>
-            </a:pPr>
-            <a:r>
-              <a:rPr sz="1600" b="0">
-                <a:solidFill>
-                  <a:srgbClr val="FFFFFF"/>
-                </a:solidFill>
-                <a:latin typeface="맑은 고딕"/>
-              </a:rPr>
-              <a:t>•  MRP 자동 기동</a:t>
+                <a:spcPts val="1000"/>
+              </a:spcAft>
+            </a:pPr>
+            <a:r>
+              <a:rPr sz="1700" b="0">
+                <a:solidFill>
+                  <a:srgbClr val="222222"/>
+                </a:solidFill>
+                <a:latin typeface="맑은 고딕"/>
+              </a:rPr>
+              <a:t>•  Primary SPFILE을 가져와 Standby용으로 생성</a:t>
+            </a:r>
+          </a:p>
+          <a:p>
+            <a:pPr algn="l">
+              <a:spcAft>
+                <a:spcPts val="1000"/>
+              </a:spcAft>
+            </a:pPr>
+            <a:r>
+              <a:rPr sz="1700" b="0">
+                <a:solidFill>
+                  <a:srgbClr val="222222"/>
+                </a:solidFill>
+                <a:latin typeface="맑은 고딕"/>
+              </a:rPr>
+              <a:t>•  문자열 값의 chicago를 boston으로 일괄 치환</a:t>
+            </a:r>
+          </a:p>
+          <a:p>
+            <a:pPr algn="l">
+              <a:spcAft>
+                <a:spcPts val="1000"/>
+              </a:spcAft>
+            </a:pPr>
+            <a:r>
+              <a:rPr sz="1700" b="0">
+                <a:solidFill>
+                  <a:srgbClr val="222222"/>
+                </a:solidFill>
+                <a:latin typeface="맑은 고딕"/>
+              </a:rPr>
+              <a:t>•  FAL_SERVER='boston'은 그대로 남음</a:t>
+            </a:r>
+          </a:p>
+          <a:p>
+            <a:pPr algn="l">
+              <a:spcAft>
+                <a:spcPts val="1000"/>
+              </a:spcAft>
+            </a:pPr>
+            <a:r>
+              <a:rPr sz="1700" b="0">
+                <a:solidFill>
+                  <a:srgbClr val="222222"/>
+                </a:solidFill>
+                <a:latin typeface="맑은 고딕"/>
+              </a:rPr>
+              <a:t>•  대소문자 구분, convert 파라미터는 SET으로 명시</a:t>
             </a:r>
           </a:p>
         </p:txBody>
@@ -10205,7 +10486,7 @@
                 </a:solidFill>
                 <a:latin typeface="맑은 고딕"/>
               </a:rPr>
-              <a:t>성공의 세 조건</a:t>
+              <a:t>SET 절에 넣는 파라미터</a:t>
             </a:r>
           </a:p>
         </p:txBody>
@@ -10244,7 +10525,7 @@
                 </a:solidFill>
                 <a:latin typeface="맑은 고딕"/>
               </a:rPr>
-              <a:t>이것만 보면 된다</a:t>
+              <a:t>PARAMETER_VALUE_CONVERT 다음에 적용</a:t>
             </a:r>
           </a:p>
         </p:txBody>
@@ -10283,7 +10564,7 @@
                 </a:solidFill>
                 <a:latin typeface="맑은 고딕"/>
               </a:rPr>
-              <a:t>•  `rc=0` — 종료 코드</a:t>
+              <a:t>•  DB_UNIQUE_NAME, CONTROL_FILES</a:t>
             </a:r>
           </a:p>
           <a:p>
@@ -10299,7 +10580,7 @@
                 </a:solidFill>
                 <a:latin typeface="맑은 고딕"/>
               </a:rPr>
-              <a:t>•  `grep -cE 'RMAN-|ORA-'` = **0**</a:t>
+              <a:t>•  DB_FILE_NAME_CONVERT, LOG_FILE_NAME_CONVERT</a:t>
             </a:r>
           </a:p>
           <a:p>
@@ -10315,7 +10596,7 @@
                 </a:solidFill>
                 <a:latin typeface="맑은 고딕"/>
               </a:rPr>
-              <a:t>•  `Finished Duplicate Db` 존재</a:t>
+              <a:t>•  FAL_SERVER, LOG_ARCHIVE_DEST_2</a:t>
             </a:r>
           </a:p>
           <a:p>
@@ -10331,7 +10612,7 @@
                 </a:solidFill>
                 <a:latin typeface="맑은 고딕"/>
               </a:rPr>
-              <a:t>•  실측 : 418줄 로그, 54번 Starting, 413번 Finished</a:t>
+              <a:t>•  STANDBY_FILE_MANAGEMENT=AUTO</a:t>
             </a:r>
           </a:p>
         </p:txBody>
@@ -10432,7 +10713,7 @@
                 </a:solidFill>
                 <a:latin typeface="맑은 고딕"/>
               </a:rPr>
-              <a:t>로그의 단계</a:t>
+              <a:t>DORECOVER와 NOFILENAMECHECK</a:t>
             </a:r>
           </a:p>
         </p:txBody>
@@ -10471,7 +10752,7 @@
                 </a:solidFill>
                 <a:latin typeface="맑은 고딕"/>
               </a:rPr>
-              <a:t>어디서 무엇이 일어나는가</a:t>
+              <a:t>복구 시점과 이름 검사</a:t>
             </a:r>
           </a:p>
         </p:txBody>
@@ -10510,7 +10791,7 @@
                 </a:solidFill>
                 <a:latin typeface="맑은 고딕"/>
               </a:rPr>
-              <a:t>•  ~53 : 접속과 채널 할당</a:t>
+              <a:t>•  온라인 복사본은 파일마다 시점이 다름</a:t>
             </a:r>
           </a:p>
           <a:p>
@@ -10526,7 +10807,7 @@
                 </a:solidFill>
                 <a:latin typeface="맑은 고딕"/>
               </a:rPr>
-              <a:t>•  ~230 : spfile 생성, standby 컨트롤 파일 복원</a:t>
+              <a:t>•  DORECOVER: 복사 중 생긴 리두까지 적용</a:t>
             </a:r>
           </a:p>
           <a:p>
@@ -10542,7 +10823,7 @@
                 </a:solidFill>
                 <a:latin typeface="맑은 고딕"/>
               </a:rPr>
-              <a:t>•  276~400 : 데이터 파일 11개 전송 — 로그의 30%</a:t>
+              <a:t>•  생략하면 Redo Apply가 이후에 맞춤</a:t>
             </a:r>
           </a:p>
           <a:p>
@@ -10558,23 +10839,7 @@
                 </a:solidFill>
                 <a:latin typeface="맑은 고딕"/>
               </a:rPr>
-              <a:t>•  ~410 : DORECOVER — 아카이브 적용 후 삭제</a:t>
-            </a:r>
-          </a:p>
-          <a:p>
-            <a:pPr algn="l">
-              <a:spcAft>
-                <a:spcPts val="1000"/>
-              </a:spcAft>
-            </a:pPr>
-            <a:r>
-              <a:rPr sz="1700" b="0">
-                <a:solidFill>
-                  <a:srgbClr val="222222"/>
-                </a:solidFill>
-                <a:latin typeface="맑은 고딕"/>
-              </a:rPr>
-              <a:t>•  413~418 : 완료와 채널 해제</a:t>
+              <a:t>•  NOFILENAMECHECK: 이름 중복 검사 생략</a:t>
             </a:r>
           </a:p>
         </p:txBody>
@@ -10675,7 +10940,7 @@
                 </a:solidFill>
                 <a:latin typeface="맑은 고딕"/>
               </a:rPr>
-              <a:t>MRP가 이미 돌고 있다</a:t>
+              <a:t>병렬 채널, SECTION SIZE, 압축</a:t>
             </a:r>
           </a:p>
         </p:txBody>
@@ -10714,7 +10979,7 @@
                 </a:solidFill>
                 <a:latin typeface="맑은 고딕"/>
               </a:rPr>
-              <a:t>sql channel sby 절의 효과</a:t>
+              <a:t>생성 시간과 부하의 조절</a:t>
             </a:r>
           </a:p>
         </p:txBody>
@@ -10753,7 +11018,7 @@
                 </a:solidFill>
                 <a:latin typeface="맑은 고딕"/>
               </a:rPr>
-              <a:t>•  로그 끝 : `sql statement: alter database recover managed standby database ...`</a:t>
+              <a:t>•  채널 수: 동시에 복사하는 파일 수</a:t>
             </a:r>
           </a:p>
           <a:p>
@@ -10769,7 +11034,7 @@
                 </a:solidFill>
                 <a:latin typeface="맑은 고딕"/>
               </a:rPr>
-              <a:t>•  복제 종료와 동시에 MRP 기동</a:t>
+              <a:t>•  SECTION SIZE: 큰 파일을 구간으로 나눠 병렬</a:t>
             </a:r>
           </a:p>
           <a:p>
@@ -10785,7 +11050,7 @@
                 </a:solidFill>
                 <a:latin typeface="맑은 고딕"/>
               </a:rPr>
-              <a:t>•  실측 : MRP0 / WAIT_FOR_LOG / 시퀀스 58</a:t>
+              <a:t>•  USING COMPRESSED BACKUPSET: 대역 절약, CPU 사용</a:t>
             </a:r>
           </a:p>
           <a:p>
@@ -10801,7 +11066,7 @@
                 </a:solidFill>
                 <a:latin typeface="맑은 고딕"/>
               </a:rPr>
-              <a:t>•  별도로 MRP를 띄울 필요가 없다</a:t>
+              <a:t>•  BASIC 외 압축 알고리즘은 ACO 라이선스</a:t>
             </a:r>
           </a:p>
         </p:txBody>
@@ -10902,7 +11167,7 @@
                 </a:solidFill>
                 <a:latin typeface="맑은 고딕"/>
               </a:rPr>
-              <a:t>이 장의 구성 (Agenda)</a:t>
+              <a:t>Agenda</a:t>
             </a:r>
           </a:p>
         </p:txBody>
@@ -10941,7 +11206,7 @@
                 </a:solidFill>
                 <a:latin typeface="맑은 고딕"/>
               </a:rPr>
-              <a:t>•  5.2  BR 17장과 무엇이 다른가</a:t>
+              <a:t>•  5.2  Standby 생성이라는 작업의 성격  /  5.3  Standby를 만드는 방법들</a:t>
             </a:r>
           </a:p>
           <a:p>
@@ -10957,7 +11222,7 @@
                 </a:solidFill>
                 <a:latin typeface="맑은 고딕"/>
               </a:rPr>
-              <a:t>•  5.3  Primary 쪽 준비 확인</a:t>
+              <a:t>•  5.4  생성 전체 흐름  /  5.5  Standby 인스턴스 준비</a:t>
             </a:r>
           </a:p>
           <a:p>
@@ -10973,7 +11238,7 @@
                 </a:solidFill>
                 <a:latin typeface="맑은 고딕"/>
               </a:rPr>
-              <a:t>•  5.4  Standby 인스턴스 준비</a:t>
+              <a:t>•  5.6  DUPLICATE ... FOR STANDBY 명령 구성</a:t>
             </a:r>
           </a:p>
           <a:p>
@@ -10989,7 +11254,7 @@
                 </a:solidFill>
                 <a:latin typeface="맑은 고딕"/>
               </a:rPr>
-              <a:t>•  5.5  DUPLICATE 스크립트 읽기</a:t>
+              <a:t>•  5.7  경로 지정: DB_FILE_NAME_CONVERT와 LOG_FILE_NAME_CONVERT</a:t>
             </a:r>
           </a:p>
           <a:p>
@@ -11005,7 +11270,7 @@
                 </a:solidFill>
                 <a:latin typeface="맑은 고딕"/>
               </a:rPr>
-              <a:t>•  5.6  실패 두 번</a:t>
+              <a:t>•  5.8  내부 단계  /  5.9  흔한 실패 원인 분류</a:t>
             </a:r>
           </a:p>
           <a:p>
@@ -11021,39 +11286,7 @@
                 </a:solidFill>
                 <a:latin typeface="맑은 고딕"/>
               </a:rPr>
-              <a:t>•  5.7  성공한 DUPLICATE</a:t>
-            </a:r>
-          </a:p>
-          <a:p>
-            <a:pPr algn="l">
-              <a:spcAft>
-                <a:spcPts val="1000"/>
-              </a:spcAft>
-            </a:pPr>
-            <a:r>
-              <a:rPr sz="1600" b="0">
-                <a:solidFill>
-                  <a:srgbClr val="222222"/>
-                </a:solidFill>
-                <a:latin typeface="맑은 고딕"/>
-              </a:rPr>
-              <a:t>•  5.8  결과 검증</a:t>
-            </a:r>
-          </a:p>
-          <a:p>
-            <a:pPr algn="l">
-              <a:spcAft>
-                <a:spcPts val="1000"/>
-              </a:spcAft>
-            </a:pPr>
-            <a:r>
-              <a:rPr sz="1600" b="0">
-                <a:solidFill>
-                  <a:srgbClr val="222222"/>
-                </a:solidFill>
-                <a:latin typeface="맑은 고딕"/>
-              </a:rPr>
-              <a:t>•  5.9  DBMS_DBCOMP로 블록 비교</a:t>
+              <a:t>•  5.10  생성 후 확인과 Redo Apply 연결  /  5.11  운영 시 주의점</a:t>
             </a:r>
           </a:p>
         </p:txBody>
@@ -11154,7 +11387,7 @@
                 </a:solidFill>
                 <a:latin typeface="맑은 고딕"/>
               </a:rPr>
-              <a:t>5.8</a:t>
+              <a:t>5.7</a:t>
             </a:r>
           </a:p>
         </p:txBody>
@@ -11193,7 +11426,7 @@
                 </a:solidFill>
                 <a:latin typeface="맑은 고딕"/>
               </a:rPr>
-              <a:t>결과 검증</a:t>
+              <a:t>경로 지정: DB_FILE_NAME_CONVERT와 LOG_FILE_NAME_CONVERT</a:t>
             </a:r>
           </a:p>
         </p:txBody>
@@ -11276,7 +11509,7 @@
                 </a:solidFill>
                 <a:latin typeface="맑은 고딕"/>
               </a:rPr>
-              <a:t>•  DBID 대조</a:t>
+              <a:t>•  문자열 치환 규칙</a:t>
             </a:r>
           </a:p>
           <a:p>
@@ -11292,7 +11525,7 @@
                 </a:solidFill>
                 <a:latin typeface="맑은 고딕"/>
               </a:rPr>
-              <a:t>•  파일 목록 대조</a:t>
+              <a:t>•  두 파라미터가 쓰이는 두 시점</a:t>
             </a:r>
           </a:p>
           <a:p>
@@ -11308,7 +11541,7 @@
                 </a:solidFill>
                 <a:latin typeface="맑은 고딕"/>
               </a:rPr>
-              <a:t>•  ADG 전환과 동기화 확인</a:t>
+              <a:t>•  컨트롤·임시·로그 파일의 처리, ASM과 OMF</a:t>
             </a:r>
           </a:p>
         </p:txBody>
@@ -11409,7 +11642,7 @@
                 </a:solidFill>
                 <a:latin typeface="맑은 고딕"/>
               </a:rPr>
-              <a:t>복제 직후는 아직 ADG가 아니다</a:t>
+              <a:t>문자열 치환 규칙</a:t>
             </a:r>
           </a:p>
         </p:txBody>
@@ -11448,7 +11681,7 @@
                 </a:solidFill>
                 <a:latin typeface="맑은 고딕"/>
               </a:rPr>
-              <a:t>OPEN_MODE = MOUNTED</a:t>
+              <a:t>Primary 문자열, Standby 문자열의 쌍</a:t>
             </a:r>
           </a:p>
         </p:txBody>
@@ -11487,7 +11720,7 @@
                 </a:solidFill>
                 <a:latin typeface="맑은 고딕"/>
               </a:rPr>
-              <a:t>•  DBID 1852041610 · ROLE PHYSICAL STANDBY · CONTROLFILE_TYPE STANDBY</a:t>
+              <a:t>•  파일 이름의 부분 문자열을 찾아 바꿈</a:t>
             </a:r>
           </a:p>
           <a:p>
@@ -11503,7 +11736,7 @@
                 </a:solidFill>
                 <a:latin typeface="맑은 고딕"/>
               </a:rPr>
-              <a:t>•  그러나 OPEN_MODE는 **MOUNTED**</a:t>
+              <a:t>•  쌍은 여러 개, 먼저 일치하는 쌍이 적용</a:t>
             </a:r>
           </a:p>
           <a:p>
@@ -11519,7 +11752,7 @@
                 </a:solidFill>
                 <a:latin typeface="맑은 고딕"/>
               </a:rPr>
-              <a:t>•  적용은 되지만 조회는 불가능하다</a:t>
+              <a:t>•  대소문자 구분, 끝의 / 까지 맞추기</a:t>
             </a:r>
           </a:p>
           <a:p>
@@ -11535,7 +11768,7 @@
                 </a:solidFill>
                 <a:latin typeface="맑은 고딕"/>
               </a:rPr>
-              <a:t>•  READ ONLY로 열어야 READ ONLY WITH APPLY가 된다</a:t>
+              <a:t>•  교재는 값 길이 제한(255자)을 언급</a:t>
             </a:r>
           </a:p>
         </p:txBody>
@@ -11636,7 +11869,7 @@
                 </a:solidFill>
                 <a:latin typeface="맑은 고딕"/>
               </a:rPr>
-              <a:t>가이드의 결함 둘</a:t>
+              <a:t>두 파라미터가 쓰이는 두 시점</a:t>
             </a:r>
           </a:p>
         </p:txBody>
@@ -11675,7 +11908,7 @@
                 </a:solidFill>
                 <a:latin typeface="맑은 고딕"/>
               </a:rPr>
-              <a:t>ORA-32002와 누락된 한 줄</a:t>
+              <a:t>생성 때와 운영 중</a:t>
             </a:r>
           </a:p>
         </p:txBody>
@@ -11714,7 +11947,7 @@
                 </a:solidFill>
                 <a:latin typeface="맑은 고딕"/>
               </a:rPr>
-              <a:t>•  `CREATE SPFILE FROM MEMORY` → **ORA-32002**</a:t>
+              <a:t>•  생성: DUPLICATE가 Standby 파일 이름 결정</a:t>
             </a:r>
           </a:p>
           <a:p>
@@ -11730,7 +11963,7 @@
                 </a:solidFill>
                 <a:latin typeface="맑은 고딕"/>
               </a:rPr>
-              <a:t>•  이미 spfile로 돌고 있다 — SPFILE 절이 만들었다</a:t>
+              <a:t>•  운영: STANDBY_FILE_MANAGEMENT=AUTO와 함께</a:t>
             </a:r>
           </a:p>
           <a:p>
@@ -11746,7 +11979,7 @@
                 </a:solidFill>
                 <a:latin typeface="맑은 고딕"/>
               </a:rPr>
-              <a:t>•  가이드에 `ALTER PLUGGABLE DATABASE ... OPEN READ ONLY`가 **없다**</a:t>
+              <a:t>•  Primary에 추가된 파일의 Standby 이름 결정</a:t>
             </a:r>
           </a:p>
           <a:p>
@@ -11762,7 +11995,7 @@
                 </a:solidFill>
                 <a:latin typeface="맑은 고딕"/>
               </a:rPr>
-              <a:t>•  CDB를 열어도 PDB는 열리지 않는다</a:t>
+              <a:t>•  역할 전환 대비 Primary에도 반대 방향 값</a:t>
             </a:r>
           </a:p>
         </p:txBody>
@@ -11863,7 +12096,7 @@
                 </a:solidFill>
                 <a:latin typeface="맑은 고딕"/>
               </a:rPr>
-              <a:t>대조표</a:t>
+              <a:t>컨트롤·임시·로그 파일의 처리</a:t>
             </a:r>
           </a:p>
         </p:txBody>
@@ -11902,7 +12135,7 @@
                 </a:solidFill>
                 <a:latin typeface="맑은 고딕"/>
               </a:rPr>
-              <a:t>열네 항목</a:t>
+              <a:t>convert가 닿는 곳과 닿지 않는 곳</a:t>
             </a:r>
           </a:p>
         </p:txBody>
@@ -11941,7 +12174,7 @@
                 </a:solidFill>
                 <a:latin typeface="맑은 고딕"/>
               </a:rPr>
-              <a:t>•  DBID · DB_NAME · DB_UNIQUE_NAME · ROLE · CONTROLFILE_TYPE</a:t>
+              <a:t>•  컨트롤 파일: CONTROL_FILES로 직접 지정</a:t>
             </a:r>
           </a:p>
           <a:p>
@@ -11957,7 +12190,7 @@
                 </a:solidFill>
                 <a:latin typeface="맑은 고딕"/>
               </a:rPr>
-              <a:t>•  데이터 파일 개수 11 · 번호 동일 · 경로 접두만 변경</a:t>
+              <a:t>•  임시 파일: DB_FILE_NAME_CONVERT를 따름</a:t>
             </a:r>
           </a:p>
           <a:p>
@@ -11973,7 +12206,7 @@
                 </a:solidFill>
                 <a:latin typeface="맑은 고딕"/>
               </a:rPr>
-              <a:t>•  온라인 3그룹 · SRL 4그룹 · PDB 두 개 READ ONLY</a:t>
+              <a:t>•  온라인 로그: Redo Apply 시작 시 새로 생성</a:t>
             </a:r>
           </a:p>
           <a:p>
@@ -11989,7 +12222,7 @@
                 </a:solidFill>
                 <a:latin typeface="맑은 고딕"/>
               </a:rPr>
-              <a:t>•  transport lag 0 · apply lag 0 · dest 1,2 VALID</a:t>
+              <a:t>•  SRL: Primary에 있으면 DUPLICATE가 생성</a:t>
             </a:r>
           </a:p>
         </p:txBody>
@@ -12090,7 +12323,7 @@
                 </a:solidFill>
                 <a:latin typeface="맑은 고딕"/>
               </a:rPr>
-              <a:t>동기화 확인</a:t>
+              <a:t>ASM과 OMF의 경우</a:t>
             </a:r>
           </a:p>
         </p:txBody>
@@ -12129,7 +12362,7 @@
                 </a:solidFill>
                 <a:latin typeface="맑은 고딕"/>
               </a:rPr>
-              <a:t>숫자가 움직이는 것을 본다</a:t>
+              <a:t>6장으로 이어지는 대조</a:t>
             </a:r>
           </a:p>
         </p:txBody>
@@ -12168,7 +12401,7 @@
                 </a:solidFill>
                 <a:latin typeface="맑은 고딕"/>
               </a:rPr>
-              <a:t>•  Primary에서 `ALTER SYSTEM ARCHIVE LOG CURRENT`</a:t>
+              <a:t>•  디스크 그룹 이름도 치환 가능 (+DATA → +SBDAT)</a:t>
             </a:r>
           </a:p>
           <a:p>
@@ -12184,7 +12417,7 @@
                 </a:solidFill>
                 <a:latin typeface="맑은 고딕"/>
               </a:rPr>
-              <a:t>•  transport lag / apply lag = `+00 00:00:00`</a:t>
+              <a:t>•  OMF Standby는 convert 파라미터를 설정하지 않음</a:t>
             </a:r>
           </a:p>
           <a:p>
@@ -12200,7 +12433,7 @@
                 </a:solidFill>
                 <a:latin typeface="맑은 고딕"/>
               </a:rPr>
-              <a:t>•  MRP0 상태가 WAIT_FOR_LOG → **APPLYING_LOG**</a:t>
+              <a:t>•  파일 이름을 오라클이 생성</a:t>
             </a:r>
           </a:p>
           <a:p>
@@ -12216,7 +12449,7 @@
                 </a:solidFill>
                 <a:latin typeface="맑은 고딕"/>
               </a:rPr>
-              <a:t>•  시퀀스 58 → 59</a:t>
+              <a:t>•  경로 지정 방식과의 비교는 6장</a:t>
             </a:r>
           </a:p>
         </p:txBody>
@@ -12317,7 +12550,7 @@
                 </a:solidFill>
                 <a:latin typeface="맑은 고딕"/>
               </a:rPr>
-              <a:t>5.9</a:t>
+              <a:t>5.8</a:t>
             </a:r>
           </a:p>
         </p:txBody>
@@ -12356,7 +12589,7 @@
                 </a:solidFill>
                 <a:latin typeface="맑은 고딕"/>
               </a:rPr>
-              <a:t>DBMS_DBCOMP로 블록 비교</a:t>
+              <a:t>DUPLICATE 내부에서 일어나는 단계</a:t>
             </a:r>
           </a:p>
         </p:txBody>
@@ -12439,7 +12672,7 @@
                 </a:solidFill>
                 <a:latin typeface="맑은 고딕"/>
               </a:rPr>
-              <a:t>•  두 번째 인자의 정체</a:t>
+              <a:t>•  메모리 스크립트로 나뉜 단계들</a:t>
             </a:r>
           </a:p>
           <a:p>
@@ -12455,23 +12688,7 @@
                 </a:solidFill>
                 <a:latin typeface="맑은 고딕"/>
               </a:rPr>
-              <a:t>•  세 가지 함정</a:t>
-            </a:r>
-          </a:p>
-          <a:p>
-            <a:pPr algn="l">
-              <a:spcAft>
-                <a:spcPts val="800"/>
-              </a:spcAft>
-            </a:pPr>
-            <a:r>
-              <a:rPr sz="1600" b="0">
-                <a:solidFill>
-                  <a:srgbClr val="FFFFFF"/>
-                </a:solidFill>
-                <a:latin typeface="맑은 고딕"/>
-              </a:rPr>
-              <a:t>•  결과 판독</a:t>
+              <a:t>•  로그에서 단계를 찾는 단서</a:t>
             </a:r>
           </a:p>
         </p:txBody>
@@ -12572,7 +12789,7 @@
                 </a:solidFill>
                 <a:latin typeface="맑은 고딕"/>
               </a:rPr>
-              <a:t>메타데이터를 넘어</a:t>
+              <a:t>내부 단계</a:t>
             </a:r>
           </a:p>
         </p:txBody>
@@ -12611,7 +12828,7 @@
                 </a:solidFill>
                 <a:latin typeface="맑은 고딕"/>
               </a:rPr>
-              <a:t>블록을 직접 맞춘다</a:t>
+              <a:t>메모리 스크립트가 차례로 실행됨</a:t>
             </a:r>
           </a:p>
         </p:txBody>
@@ -12650,7 +12867,7 @@
                 </a:solidFill>
                 <a:latin typeface="맑은 고딕"/>
               </a:rPr>
-              <a:t>•  지금까지의 검증은 파일 개수·경로·지연 — 메타데이터</a:t>
+              <a:t>•  SPFILE 생성 후 auxiliary 재기동</a:t>
             </a:r>
           </a:p>
           <a:p>
@@ -12666,7 +12883,7 @@
                 </a:solidFill>
                 <a:latin typeface="맑은 고딕"/>
               </a:rPr>
-              <a:t>•  `DBMS_DBCOMP.DBCOMP`는 데이터 블록을 하나씩 비교한다</a:t>
+              <a:t>•  스냅샷에서 Standby 컨트롤 파일 생성, 마운트</a:t>
             </a:r>
           </a:p>
           <a:p>
@@ -12682,7 +12899,7 @@
                 </a:solidFill>
                 <a:latin typeface="맑은 고딕"/>
               </a:rPr>
-              <a:t>•  19c에서 추가된 패키지</a:t>
+              <a:t>•  set newname 후 데이터 파일 복사</a:t>
             </a:r>
           </a:p>
           <a:p>
@@ -12698,7 +12915,7 @@
                 </a:solidFill>
                 <a:latin typeface="맑은 고딕"/>
               </a:rPr>
-              <a:t>•  용도 : 복제 정확성 확인, lost write 탐지</a:t>
+              <a:t>•  복구, 파일 전환, SRL 생성, 완료</a:t>
             </a:r>
           </a:p>
         </p:txBody>
@@ -12799,7 +13016,7 @@
                 </a:solidFill>
                 <a:latin typeface="맑은 고딕"/>
               </a:rPr>
-              <a:t>두 번째 인자의 함정</a:t>
+              <a:t>로그 읽기와 오류 스택</a:t>
             </a:r>
           </a:p>
         </p:txBody>
@@ -12838,7 +13055,7 @@
                 </a:solidFill>
                 <a:latin typeface="맑은 고딕"/>
               </a:rPr>
-              <a:t>디렉터리 객체가 아니다</a:t>
+              <a:t>아래에서 위로 읽는다</a:t>
             </a:r>
           </a:p>
         </p:txBody>
@@ -12877,7 +13094,7 @@
                 </a:solidFill>
                 <a:latin typeface="맑은 고딕"/>
               </a:rPr>
-              <a:t>•  이름은 `output_file` — 디렉터리 객체를 넣고 싶어진다</a:t>
+              <a:t>•  Memory Script 내용으로 실패 단계 확인</a:t>
             </a:r>
           </a:p>
           <a:p>
@@ -12893,7 +13110,7 @@
                 </a:solidFill>
                 <a:latin typeface="맑은 고딕"/>
               </a:rPr>
-              <a:t>•  실제로는 **파일 이름 접두어**</a:t>
+              <a:t>•  채널 여러 개면 input, output 순서가 섞임</a:t>
             </a:r>
           </a:p>
           <a:p>
@@ -12909,7 +13126,7 @@
                 </a:solidFill>
                 <a:latin typeface="맑은 고딕"/>
               </a:rPr>
-              <a:t>•  결과는 `$ORACLE_HOME/dbs` 아래에 생긴다</a:t>
+              <a:t>•  맨 위 RMAN-03002, 05501은 결과</a:t>
             </a:r>
           </a:p>
           <a:p>
@@ -12925,7 +13142,7 @@
                 </a:solidFill>
                 <a:latin typeface="맑은 고딕"/>
               </a:rPr>
-              <a:t>•  `&lt;접두어&gt;` 와 `&lt;접두어&gt;_&lt;상대 DB_UNIQUE_NAME&gt;_&lt;파일번호&gt;`</a:t>
+              <a:t>•  원인은 가장 아래쪽 ORA 오류</a:t>
             </a:r>
           </a:p>
         </p:txBody>
@@ -12957,7 +13174,7 @@
         <p:spPr>
           <a:xfrm>
             <a:off x="0" y="0"/>
-            <a:ext cx="12191695" cy="1005840"/>
+            <a:ext cx="12191695" cy="6858000"/>
           </a:xfrm>
           <a:prstGeom prst="rect">
             <a:avLst/>
@@ -13000,8 +13217,8 @@
         </p:nvSpPr>
         <p:spPr>
           <a:xfrm>
-            <a:off x="548640" y="91440"/>
-            <a:ext cx="10972800" cy="777240"/>
+            <a:off x="822960" y="2011680"/>
+            <a:ext cx="10515600" cy="1097280"/>
           </a:xfrm>
           <a:prstGeom prst="rect">
             <a:avLst/>
@@ -13020,13 +13237,13 @@
               </a:spcAft>
             </a:pPr>
             <a:r>
-              <a:rPr sz="2600" b="1">
+              <a:rPr sz="4000" b="1">
                 <a:solidFill>
                   <a:srgbClr val="FFFFFF"/>
                 </a:solidFill>
                 <a:latin typeface="맑은 고딕"/>
               </a:rPr>
-              <a:t>세 가지 함정</a:t>
+              <a:t>5.9</a:t>
             </a:r>
           </a:p>
         </p:txBody>
@@ -13039,8 +13256,8 @@
         </p:nvSpPr>
         <p:spPr>
           <a:xfrm>
-            <a:off x="640080" y="1078992"/>
-            <a:ext cx="10881360" cy="457200"/>
+            <a:off x="822960" y="3017520"/>
+            <a:ext cx="10515600" cy="914400"/>
           </a:xfrm>
           <a:prstGeom prst="rect">
             <a:avLst/>
@@ -13059,27 +13276,71 @@
               </a:spcAft>
             </a:pPr>
             <a:r>
-              <a:rPr sz="1500" b="0">
-                <a:solidFill>
-                  <a:srgbClr val="5A6672"/>
-                </a:solidFill>
-                <a:latin typeface="맑은 고딕"/>
-              </a:rPr>
-              <a:t>둘은 시끄럽고 하나는 조용하다</a:t>
-            </a:r>
-          </a:p>
-        </p:txBody>
-      </p:sp>
-      <p:sp>
-        <p:nvSpPr>
-          <p:cNvPr id="5" name="TextBox 4"/>
+              <a:rPr sz="2800" b="1">
+                <a:solidFill>
+                  <a:srgbClr val="FFFFFF"/>
+                </a:solidFill>
+                <a:latin typeface="맑은 고딕"/>
+              </a:rPr>
+              <a:t>흔한 실패 원인 분류</a:t>
+            </a:r>
+          </a:p>
+        </p:txBody>
+      </p:sp>
+      <p:sp>
+        <p:nvSpPr>
+          <p:cNvPr id="5" name="Rectangle 4"/>
+          <p:cNvSpPr/>
+          <p:nvPr/>
+        </p:nvSpPr>
+        <p:spPr>
+          <a:xfrm>
+            <a:off x="822960" y="4114800"/>
+            <a:ext cx="5486400" cy="54864"/>
+          </a:xfrm>
+          <a:prstGeom prst="rect">
+            <a:avLst/>
+          </a:prstGeom>
+          <a:solidFill>
+            <a:srgbClr val="FFFFFF"/>
+          </a:solidFill>
+          <a:ln>
+            <a:noFill/>
+          </a:ln>
+          <a:effectLst/>
+        </p:spPr>
+        <p:style>
+          <a:lnRef idx="1">
+            <a:schemeClr val="accent1"/>
+          </a:lnRef>
+          <a:fillRef idx="3">
+            <a:schemeClr val="accent1"/>
+          </a:fillRef>
+          <a:effectRef idx="2">
+            <a:schemeClr val="accent1"/>
+          </a:effectRef>
+          <a:fontRef idx="minor">
+            <a:schemeClr val="lt1"/>
+          </a:fontRef>
+        </p:style>
+        <p:txBody>
+          <a:bodyPr rtlCol="0" anchor="ctr"/>
+          <a:lstStyle/>
+          <a:p>
+            <a:pPr algn="ctr"/>
+          </a:p>
+        </p:txBody>
+      </p:sp>
+      <p:sp>
+        <p:nvSpPr>
+          <p:cNvPr id="6" name="TextBox 5"/>
           <p:cNvSpPr txBox="1"/>
           <p:nvPr/>
         </p:nvSpPr>
         <p:spPr>
           <a:xfrm>
-            <a:off x="640080" y="1737360"/>
-            <a:ext cx="10881360" cy="4754880"/>
+            <a:off x="822960" y="4297680"/>
+            <a:ext cx="10058400" cy="2011680"/>
           </a:xfrm>
           <a:prstGeom prst="rect">
             <a:avLst/>
@@ -13094,49 +13355,49 @@
           <a:p>
             <a:pPr algn="l">
               <a:spcAft>
-                <a:spcPts val="1000"/>
-              </a:spcAft>
-            </a:pPr>
-            <a:r>
-              <a:rPr sz="1700" b="0">
-                <a:solidFill>
-                  <a:srgbClr val="222222"/>
-                </a:solidFill>
-                <a:latin typeface="맑은 고딕"/>
-              </a:rPr>
-              <a:t>•  같은 접두어 재사용 → **ORA-24258** (덮어쓰지 않는다)</a:t>
-            </a:r>
-          </a:p>
-          <a:p>
-            <a:pPr algn="l">
-              <a:spcAft>
-                <a:spcPts val="1000"/>
-              </a:spcAft>
-            </a:pPr>
-            <a:r>
-              <a:rPr sz="1700" b="0">
-                <a:solidFill>
-                  <a:srgbClr val="222222"/>
-                </a:solidFill>
-                <a:latin typeface="맑은 고딕"/>
-              </a:rPr>
-              <a:t>•  NULL이나 없는 파일 → **ORA-53201** (한 번에 한 파일만)</a:t>
-            </a:r>
-          </a:p>
-          <a:p>
-            <a:pPr algn="l">
-              <a:spcAft>
-                <a:spcPts val="1000"/>
-              </a:spcAft>
-            </a:pPr>
-            <a:r>
-              <a:rPr sz="1700" b="0">
-                <a:solidFill>
-                  <a:srgbClr val="222222"/>
-                </a:solidFill>
-                <a:latin typeface="맑은 고딕"/>
-              </a:rPr>
-              <a:t>•  없는 디렉터리 객체 이름 → **오류 없이 성공**</a:t>
+                <a:spcPts val="800"/>
+              </a:spcAft>
+            </a:pPr>
+            <a:r>
+              <a:rPr sz="1600" b="0">
+                <a:solidFill>
+                  <a:srgbClr val="FFFFFF"/>
+                </a:solidFill>
+                <a:latin typeface="맑은 고딕"/>
+              </a:rPr>
+              <a:t>•  단계별 실패 분류</a:t>
+            </a:r>
+          </a:p>
+          <a:p>
+            <a:pPr algn="l">
+              <a:spcAft>
+                <a:spcPts val="800"/>
+              </a:spcAft>
+            </a:pPr>
+            <a:r>
+              <a:rPr sz="1600" b="0">
+                <a:solidFill>
+                  <a:srgbClr val="FFFFFF"/>
+                </a:solidFill>
+                <a:latin typeface="맑은 고딕"/>
+              </a:rPr>
+              <a:t>•  원격 오류의 방향, 파일 이름 충돌</a:t>
+            </a:r>
+          </a:p>
+          <a:p>
+            <a:pPr algn="l">
+              <a:spcAft>
+                <a:spcPts val="800"/>
+              </a:spcAft>
+            </a:pPr>
+            <a:r>
+              <a:rPr sz="1600" b="0">
+                <a:solidFill>
+                  <a:srgbClr val="FFFFFF"/>
+                </a:solidFill>
+                <a:latin typeface="맑은 고딕"/>
+              </a:rPr>
+              <a:t>•  실패 후 다시 시작하기</a:t>
             </a:r>
           </a:p>
         </p:txBody>
@@ -13237,7 +13498,7 @@
                 </a:solidFill>
                 <a:latin typeface="맑은 고딕"/>
               </a:rPr>
-              <a:t>판정은 세 열</a:t>
+              <a:t>실패 원인 분류</a:t>
             </a:r>
           </a:p>
         </p:txBody>
@@ -13276,7 +13537,7 @@
                 </a:solidFill>
                 <a:latin typeface="맑은 고딕"/>
               </a:rPr>
-              <a:t>DIFFPAIR · LWLOC · LWRMT</a:t>
+              <a:t>오류 번호보다 단계로 먼저 나눈다</a:t>
             </a:r>
           </a:p>
         </p:txBody>
@@ -13315,7 +13576,7 @@
                 </a:solidFill>
                 <a:latin typeface="맑은 고딕"/>
               </a:rPr>
-              <a:t>•  **DIFFPAIR** : 버전은 같은데 내용이 다르다 — 있을 수 없는 상태</a:t>
+              <a:t>•  접속: ORA-01017, ORA-12528</a:t>
             </a:r>
           </a:p>
           <a:p>
@@ -13331,7 +13592,7 @@
                 </a:solidFill>
                 <a:latin typeface="맑은 고딕"/>
               </a:rPr>
-              <a:t>•  **LWLOC / LWRMT** : 로컬·원격의 lost write</a:t>
+              <a:t>•  파일 이름: RMAN-05001, RMAN-05538 경고</a:t>
             </a:r>
           </a:p>
           <a:p>
@@ -13347,7 +13608,7 @@
                 </a:solidFill>
                 <a:latin typeface="맑은 고딕"/>
               </a:rPr>
-              <a:t>•  실측 : 모든 블록 타입에서 세 열 모두 0</a:t>
+              <a:t>•  디렉터리: ORA-17628 아래의 ORA-19505</a:t>
             </a:r>
           </a:p>
           <a:p>
@@ -13363,7 +13624,7 @@
                 </a:solidFill>
                 <a:latin typeface="맑은 고딕"/>
               </a:rPr>
-              <a:t>•  나머지 열은 참고 정보다</a:t>
+              <a:t>•  공간, 파라미터 오타, 작업 중 인스턴스 종료</a:t>
             </a:r>
           </a:p>
         </p:txBody>
@@ -13503,7 +13764,7 @@
                 </a:solidFill>
                 <a:latin typeface="맑은 고딕"/>
               </a:rPr>
-              <a:t>BR 17장과 무엇이 다른가</a:t>
+              <a:t>Standby 생성이라는 작업의 성격</a:t>
             </a:r>
           </a:p>
         </p:txBody>
@@ -13586,7 +13847,7 @@
                 </a:solidFill>
                 <a:latin typeface="맑은 고딕"/>
               </a:rPr>
-              <a:t>•  같은 DUPLICATE, 다른 목적</a:t>
+              <a:t>•  Primary의 블록 사본으로서의 Standby</a:t>
             </a:r>
           </a:p>
           <a:p>
@@ -13602,7 +13863,7 @@
                 </a:solidFill>
                 <a:latin typeface="맑은 고딕"/>
               </a:rPr>
-              <a:t>•  FOR STANDBY가 바꾸는 것</a:t>
+              <a:t>•  BR 과정의 DUPLICATE와 다른 점</a:t>
             </a:r>
           </a:p>
           <a:p>
@@ -13618,7 +13879,7 @@
                 </a:solidFill>
                 <a:latin typeface="맑은 고딕"/>
               </a:rPr>
-              <a:t>•  FROM ACTIVE DATABASE의 이점</a:t>
+              <a:t>•  만들어야 하는 재료</a:t>
             </a:r>
           </a:p>
         </p:txBody>
@@ -13719,7 +13980,7 @@
                 </a:solidFill>
                 <a:latin typeface="맑은 고딕"/>
               </a:rPr>
-              <a:t>정상인데 0이 아닌 값들</a:t>
+              <a:t>원격 오류와 이름 충돌</a:t>
             </a:r>
           </a:p>
         </p:txBody>
@@ -13758,7 +14019,7 @@
                 </a:solidFill>
                 <a:latin typeface="맑은 고딕"/>
               </a:rPr>
-              <a:t>오해하기 쉬운 열</a:t>
+              <a:t>어디를 볼지 오류가 알려 준다</a:t>
             </a:r>
           </a:p>
         </p:txBody>
@@ -13797,7 +14058,7 @@
                 </a:solidFill>
                 <a:latin typeface="맑은 고딕"/>
               </a:rPr>
-              <a:t>•  DIFFV 1,645 — 운영 중 비교라 버전 차이는 당연하다</a:t>
+              <a:t>•  ORA-17628: 원격 서버(대개 Standby)의 오류</a:t>
             </a:r>
           </a:p>
           <a:p>
@@ -13813,7 +14074,7 @@
                 </a:solidFill>
                 <a:latin typeface="맑은 고딕"/>
               </a:rPr>
-              <a:t>•  SAMEV 91,295 vs SAMEV&amp;C 91,148 — 차이 147도 정상</a:t>
+              <a:t>•  ORA-19505: 파일 생성·열기 실패</a:t>
             </a:r>
           </a:p>
           <a:p>
@@ -13829,7 +14090,7 @@
                 </a:solidFill>
                 <a:latin typeface="맑은 고딕"/>
               </a:rPr>
-              <a:t>•  SKIPPED — 빈 블록, 직접 로드 블록</a:t>
+              <a:t>•  RMAN-05001 일부 파일: convert 쌍 누락</a:t>
             </a:r>
           </a:p>
           <a:p>
@@ -13845,7 +14106,7 @@
                 </a:solidFill>
                 <a:latin typeface="맑은 고딕"/>
               </a:rPr>
-              <a:t>•  CORR가 잡히면 **재실행과 RMAN VALIDATE로 교차 확인**</a:t>
+              <a:t>•  RMAN-05001 전체 파일: 규칙 미적용, 대소문자</a:t>
             </a:r>
           </a:p>
         </p:txBody>
@@ -13877,7 +14138,7 @@
         <p:spPr>
           <a:xfrm>
             <a:off x="0" y="0"/>
-            <a:ext cx="12191695" cy="6858000"/>
+            <a:ext cx="12191695" cy="1005840"/>
           </a:xfrm>
           <a:prstGeom prst="rect">
             <a:avLst/>
@@ -13920,8 +14181,8 @@
         </p:nvSpPr>
         <p:spPr>
           <a:xfrm>
-            <a:off x="822960" y="2011680"/>
-            <a:ext cx="10515600" cy="1097280"/>
+            <a:off x="548640" y="91440"/>
+            <a:ext cx="10972800" cy="777240"/>
           </a:xfrm>
           <a:prstGeom prst="rect">
             <a:avLst/>
@@ -13940,13 +14201,13 @@
               </a:spcAft>
             </a:pPr>
             <a:r>
-              <a:rPr sz="4000" b="1">
+              <a:rPr sz="2600" b="1">
                 <a:solidFill>
                   <a:srgbClr val="FFFFFF"/>
                 </a:solidFill>
                 <a:latin typeface="맑은 고딕"/>
               </a:rPr>
-              <a:t>5.10</a:t>
+              <a:t>실패 후 다시 시작하기</a:t>
             </a:r>
           </a:p>
         </p:txBody>
@@ -13959,8 +14220,8 @@
         </p:nvSpPr>
         <p:spPr>
           <a:xfrm>
-            <a:off x="822960" y="3017520"/>
-            <a:ext cx="10515600" cy="914400"/>
+            <a:off x="640080" y="1078992"/>
+            <a:ext cx="10881360" cy="457200"/>
           </a:xfrm>
           <a:prstGeom prst="rect">
             <a:avLst/>
@@ -13979,71 +14240,27 @@
               </a:spcAft>
             </a:pPr>
             <a:r>
-              <a:rPr sz="2800" b="1">
-                <a:solidFill>
-                  <a:srgbClr val="FFFFFF"/>
-                </a:solidFill>
-                <a:latin typeface="맑은 고딕"/>
-              </a:rPr>
-              <a:t>정리와 6장 예고</a:t>
-            </a:r>
-          </a:p>
-        </p:txBody>
-      </p:sp>
-      <p:sp>
-        <p:nvSpPr>
-          <p:cNvPr id="5" name="Rectangle 4"/>
-          <p:cNvSpPr/>
-          <p:nvPr/>
-        </p:nvSpPr>
-        <p:spPr>
-          <a:xfrm>
-            <a:off x="822960" y="4114800"/>
-            <a:ext cx="5486400" cy="54864"/>
-          </a:xfrm>
-          <a:prstGeom prst="rect">
-            <a:avLst/>
-          </a:prstGeom>
-          <a:solidFill>
-            <a:srgbClr val="FFFFFF"/>
-          </a:solidFill>
-          <a:ln>
-            <a:noFill/>
-          </a:ln>
-          <a:effectLst/>
-        </p:spPr>
-        <p:style>
-          <a:lnRef idx="1">
-            <a:schemeClr val="accent1"/>
-          </a:lnRef>
-          <a:fillRef idx="3">
-            <a:schemeClr val="accent1"/>
-          </a:fillRef>
-          <a:effectRef idx="2">
-            <a:schemeClr val="accent1"/>
-          </a:effectRef>
-          <a:fontRef idx="minor">
-            <a:schemeClr val="lt1"/>
-          </a:fontRef>
-        </p:style>
-        <p:txBody>
-          <a:bodyPr rtlCol="0" anchor="ctr"/>
-          <a:lstStyle/>
-          <a:p>
-            <a:pPr algn="ctr"/>
-          </a:p>
-        </p:txBody>
-      </p:sp>
-      <p:sp>
-        <p:nvSpPr>
-          <p:cNvPr id="6" name="TextBox 5"/>
+              <a:rPr sz="1500" b="0">
+                <a:solidFill>
+                  <a:srgbClr val="5A6672"/>
+                </a:solidFill>
+                <a:latin typeface="맑은 고딕"/>
+              </a:rPr>
+              <a:t>DUPLICATE는 뒷정리를 하지 않는다</a:t>
+            </a:r>
+          </a:p>
+        </p:txBody>
+      </p:sp>
+      <p:sp>
+        <p:nvSpPr>
+          <p:cNvPr id="5" name="TextBox 4"/>
           <p:cNvSpPr txBox="1"/>
           <p:nvPr/>
         </p:nvSpPr>
         <p:spPr>
           <a:xfrm>
-            <a:off x="822960" y="4297680"/>
-            <a:ext cx="10058400" cy="2011680"/>
+            <a:off x="640080" y="1737360"/>
+            <a:ext cx="10881360" cy="4754880"/>
           </a:xfrm>
           <a:prstGeom prst="rect">
             <a:avLst/>
@@ -14058,49 +14275,65 @@
           <a:p>
             <a:pPr algn="l">
               <a:spcAft>
-                <a:spcPts val="800"/>
-              </a:spcAft>
-            </a:pPr>
-            <a:r>
-              <a:rPr sz="1600" b="0">
-                <a:solidFill>
-                  <a:srgbClr val="FFFFFF"/>
-                </a:solidFill>
-                <a:latin typeface="맑은 고딕"/>
-              </a:rPr>
-              <a:t>•  경로 지정 방식의 약점</a:t>
-            </a:r>
-          </a:p>
-          <a:p>
-            <a:pPr algn="l">
-              <a:spcAft>
-                <a:spcPts val="800"/>
-              </a:spcAft>
-            </a:pPr>
-            <a:r>
-              <a:rPr sz="1600" b="0">
-                <a:solidFill>
-                  <a:srgbClr val="FFFFFF"/>
-                </a:solidFill>
-                <a:latin typeface="맑은 고딕"/>
-              </a:rPr>
-              <a:t>•  OMF가 없애는 것</a:t>
-            </a:r>
-          </a:p>
-          <a:p>
-            <a:pPr algn="l">
-              <a:spcAft>
-                <a:spcPts val="800"/>
-              </a:spcAft>
-            </a:pPr>
-            <a:r>
-              <a:rPr sz="1600" b="0">
-                <a:solidFill>
-                  <a:srgbClr val="FFFFFF"/>
-                </a:solidFill>
-                <a:latin typeface="맑은 고딕"/>
-              </a:rPr>
-              <a:t>•  실습 안내</a:t>
+                <a:spcPts val="1000"/>
+              </a:spcAft>
+            </a:pPr>
+            <a:r>
+              <a:rPr sz="1700" b="0">
+                <a:solidFill>
+                  <a:srgbClr val="222222"/>
+                </a:solidFill>
+                <a:latin typeface="맑은 고딕"/>
+              </a:rPr>
+              <a:t>•  반쯤 복사된 파일과 SPFILE이 남음</a:t>
+            </a:r>
+          </a:p>
+          <a:p>
+            <a:pPr algn="l">
+              <a:spcAft>
+                <a:spcPts val="1000"/>
+              </a:spcAft>
+            </a:pPr>
+            <a:r>
+              <a:rPr sz="1700" b="0">
+                <a:solidFill>
+                  <a:srgbClr val="222222"/>
+                </a:solidFill>
+                <a:latin typeface="맑은 고딕"/>
+              </a:rPr>
+              <a:t>•  인스턴스를 내리고 남은 파일 삭제</a:t>
+            </a:r>
+          </a:p>
+          <a:p>
+            <a:pPr algn="l">
+              <a:spcAft>
+                <a:spcPts val="1000"/>
+              </a:spcAft>
+            </a:pPr>
+            <a:r>
+              <a:rPr sz="1700" b="0">
+                <a:solidFill>
+                  <a:srgbClr val="222222"/>
+                </a:solidFill>
+                <a:latin typeface="맑은 고딕"/>
+              </a:rPr>
+              <a:t>•  spfileboston.ora 삭제 후 PFILE로 NOMOUNT</a:t>
+            </a:r>
+          </a:p>
+          <a:p>
+            <a:pPr algn="l">
+              <a:spcAft>
+                <a:spcPts val="1000"/>
+              </a:spcAft>
+            </a:pPr>
+            <a:r>
+              <a:rPr sz="1700" b="0">
+                <a:solidFill>
+                  <a:srgbClr val="222222"/>
+                </a:solidFill>
+                <a:latin typeface="맑은 고딕"/>
+              </a:rPr>
+              <a:t>•  Primary는 읽기만 하므로 재시도에 부담 없음</a:t>
             </a:r>
           </a:p>
         </p:txBody>
@@ -14132,7 +14365,7 @@
         <p:spPr>
           <a:xfrm>
             <a:off x="0" y="0"/>
-            <a:ext cx="12191695" cy="1005840"/>
+            <a:ext cx="12191695" cy="6858000"/>
           </a:xfrm>
           <a:prstGeom prst="rect">
             <a:avLst/>
@@ -14175,8 +14408,8 @@
         </p:nvSpPr>
         <p:spPr>
           <a:xfrm>
-            <a:off x="548640" y="91440"/>
-            <a:ext cx="10972800" cy="777240"/>
+            <a:off x="822960" y="2011680"/>
+            <a:ext cx="10515600" cy="1097280"/>
           </a:xfrm>
           <a:prstGeom prst="rect">
             <a:avLst/>
@@ -14195,13 +14428,13 @@
               </a:spcAft>
             </a:pPr>
             <a:r>
-              <a:rPr sz="2600" b="1">
+              <a:rPr sz="4000" b="1">
                 <a:solidFill>
                   <a:srgbClr val="FFFFFF"/>
                 </a:solidFill>
                 <a:latin typeface="맑은 고딕"/>
               </a:rPr>
-              <a:t>경로 지정 방식의 약점</a:t>
+              <a:t>5.10</a:t>
             </a:r>
           </a:p>
         </p:txBody>
@@ -14214,8 +14447,8 @@
         </p:nvSpPr>
         <p:spPr>
           <a:xfrm>
-            <a:off x="640080" y="1078992"/>
-            <a:ext cx="10881360" cy="457200"/>
+            <a:off x="822960" y="3017520"/>
+            <a:ext cx="10515600" cy="914400"/>
           </a:xfrm>
           <a:prstGeom prst="rect">
             <a:avLst/>
@@ -14234,27 +14467,71 @@
               </a:spcAft>
             </a:pPr>
             <a:r>
-              <a:rPr sz="1500" b="0">
-                <a:solidFill>
-                  <a:srgbClr val="5A6672"/>
-                </a:solidFill>
-                <a:latin typeface="맑은 고딕"/>
-              </a:rPr>
-              <a:t>6장의 출발점</a:t>
-            </a:r>
-          </a:p>
-        </p:txBody>
-      </p:sp>
-      <p:sp>
-        <p:nvSpPr>
-          <p:cNvPr id="5" name="TextBox 4"/>
+              <a:rPr sz="2800" b="1">
+                <a:solidFill>
+                  <a:srgbClr val="FFFFFF"/>
+                </a:solidFill>
+                <a:latin typeface="맑은 고딕"/>
+              </a:rPr>
+              <a:t>생성 후 확인과 Redo Apply 연결</a:t>
+            </a:r>
+          </a:p>
+        </p:txBody>
+      </p:sp>
+      <p:sp>
+        <p:nvSpPr>
+          <p:cNvPr id="5" name="Rectangle 4"/>
+          <p:cNvSpPr/>
+          <p:nvPr/>
+        </p:nvSpPr>
+        <p:spPr>
+          <a:xfrm>
+            <a:off x="822960" y="4114800"/>
+            <a:ext cx="5486400" cy="54864"/>
+          </a:xfrm>
+          <a:prstGeom prst="rect">
+            <a:avLst/>
+          </a:prstGeom>
+          <a:solidFill>
+            <a:srgbClr val="FFFFFF"/>
+          </a:solidFill>
+          <a:ln>
+            <a:noFill/>
+          </a:ln>
+          <a:effectLst/>
+        </p:spPr>
+        <p:style>
+          <a:lnRef idx="1">
+            <a:schemeClr val="accent1"/>
+          </a:lnRef>
+          <a:fillRef idx="3">
+            <a:schemeClr val="accent1"/>
+          </a:fillRef>
+          <a:effectRef idx="2">
+            <a:schemeClr val="accent1"/>
+          </a:effectRef>
+          <a:fontRef idx="minor">
+            <a:schemeClr val="lt1"/>
+          </a:fontRef>
+        </p:style>
+        <p:txBody>
+          <a:bodyPr rtlCol="0" anchor="ctr"/>
+          <a:lstStyle/>
+          <a:p>
+            <a:pPr algn="ctr"/>
+          </a:p>
+        </p:txBody>
+      </p:sp>
+      <p:sp>
+        <p:nvSpPr>
+          <p:cNvPr id="6" name="TextBox 5"/>
           <p:cNvSpPr txBox="1"/>
           <p:nvPr/>
         </p:nvSpPr>
         <p:spPr>
           <a:xfrm>
-            <a:off x="640080" y="1737360"/>
-            <a:ext cx="10881360" cy="4754880"/>
+            <a:off x="822960" y="4297680"/>
+            <a:ext cx="10058400" cy="2011680"/>
           </a:xfrm>
           <a:prstGeom prst="rect">
             <a:avLst/>
@@ -14269,65 +14546,65 @@
           <a:p>
             <a:pPr algn="l">
               <a:spcAft>
-                <a:spcPts val="1000"/>
-              </a:spcAft>
-            </a:pPr>
-            <a:r>
-              <a:rPr sz="1700" b="0">
-                <a:solidFill>
-                  <a:srgbClr val="222222"/>
-                </a:solidFill>
-                <a:latin typeface="맑은 고딕"/>
-              </a:rPr>
-              <a:t>•  convert는 문자열만 바꾼다 — 디렉터리를 만들지 않는다</a:t>
-            </a:r>
-          </a:p>
-          <a:p>
-            <a:pPr algn="l">
-              <a:spcAft>
-                <a:spcPts val="1000"/>
-              </a:spcAft>
-            </a:pPr>
-            <a:r>
-              <a:rPr sz="1700" b="0">
-                <a:solidFill>
-                  <a:srgbClr val="222222"/>
-                </a:solidFill>
-                <a:latin typeface="맑은 고딕"/>
-              </a:rPr>
-              <a:t>•  Primary 구조를 사람이 Standby에 미리 만들어야 한다</a:t>
-            </a:r>
-          </a:p>
-          <a:p>
-            <a:pPr algn="l">
-              <a:spcAft>
-                <a:spcPts val="1000"/>
-              </a:spcAft>
-            </a:pPr>
-            <a:r>
-              <a:rPr sz="1700" b="0">
-                <a:solidFill>
-                  <a:srgbClr val="222222"/>
-                </a:solidFill>
-                <a:latin typeface="맑은 고딕"/>
-              </a:rPr>
-              <a:t>•  PDB를 추가할 때마다 반복된다. 잊으면 복제가 깨진다</a:t>
-            </a:r>
-          </a:p>
-          <a:p>
-            <a:pPr algn="l">
-              <a:spcAft>
-                <a:spcPts val="1000"/>
-              </a:spcAft>
-            </a:pPr>
-            <a:r>
-              <a:rPr sz="1700" b="0">
-                <a:solidFill>
-                  <a:srgbClr val="222222"/>
-                </a:solidFill>
-                <a:latin typeface="맑은 고딕"/>
-              </a:rPr>
-              <a:t>•  6장 OMF : `DB_CREATE_FILE_DEST` 하나면 끝난다</a:t>
+                <a:spcPts val="800"/>
+              </a:spcAft>
+            </a:pPr>
+            <a:r>
+              <a:rPr sz="1600" b="0">
+                <a:solidFill>
+                  <a:srgbClr val="FFFFFF"/>
+                </a:solidFill>
+                <a:latin typeface="맑은 고딕"/>
+              </a:rPr>
+              <a:t>•  식별 정보와 역할</a:t>
+            </a:r>
+          </a:p>
+          <a:p>
+            <a:pPr algn="l">
+              <a:spcAft>
+                <a:spcPts val="800"/>
+              </a:spcAft>
+            </a:pPr>
+            <a:r>
+              <a:rPr sz="1600" b="0">
+                <a:solidFill>
+                  <a:srgbClr val="FFFFFF"/>
+                </a:solidFill>
+                <a:latin typeface="맑은 고딕"/>
+              </a:rPr>
+              <a:t>•  파일, 로그, 파라미터 구성</a:t>
+            </a:r>
+          </a:p>
+          <a:p>
+            <a:pPr algn="l">
+              <a:spcAft>
+                <a:spcPts val="800"/>
+              </a:spcAft>
+            </a:pPr>
+            <a:r>
+              <a:rPr sz="1600" b="0">
+                <a:solidFill>
+                  <a:srgbClr val="FFFFFF"/>
+                </a:solidFill>
+                <a:latin typeface="맑은 고딕"/>
+              </a:rPr>
+              <a:t>•  전송 시작과 Redo Apply 기동</a:t>
+            </a:r>
+          </a:p>
+          <a:p>
+            <a:pPr algn="l">
+              <a:spcAft>
+                <a:spcPts val="800"/>
+              </a:spcAft>
+            </a:pPr>
+            <a:r>
+              <a:rPr sz="1600" b="0">
+                <a:solidFill>
+                  <a:srgbClr val="FFFFFF"/>
+                </a:solidFill>
+                <a:latin typeface="맑은 고딕"/>
+              </a:rPr>
+              <a:t>•  DBMS_DBCOMP 블록 비교</a:t>
             </a:r>
           </a:p>
         </p:txBody>
@@ -14428,7 +14705,7 @@
                 </a:solidFill>
                 <a:latin typeface="맑은 고딕"/>
               </a:rPr>
-              <a:t>퀴즈 (Quiz)</a:t>
+              <a:t>식별 정보와 역할</a:t>
             </a:r>
           </a:p>
         </p:txBody>
@@ -14441,8 +14718,8 @@
         </p:nvSpPr>
         <p:spPr>
           <a:xfrm>
-            <a:off x="640080" y="1371600"/>
-            <a:ext cx="10881360" cy="5120640"/>
+            <a:off x="640080" y="1078992"/>
+            <a:ext cx="10881360" cy="457200"/>
           </a:xfrm>
           <a:prstGeom prst="rect">
             <a:avLst/>
@@ -14457,17 +14734,56 @@
           <a:p>
             <a:pPr algn="l">
               <a:spcAft>
+                <a:spcPts val="600"/>
+              </a:spcAft>
+            </a:pPr>
+            <a:r>
+              <a:rPr sz="1500" b="0">
+                <a:solidFill>
+                  <a:srgbClr val="5A6672"/>
+                </a:solidFill>
+                <a:latin typeface="맑은 고딕"/>
+              </a:rPr>
+              <a:t>V$DATABASE부터 본다</a:t>
+            </a:r>
+          </a:p>
+        </p:txBody>
+      </p:sp>
+      <p:sp>
+        <p:nvSpPr>
+          <p:cNvPr id="5" name="TextBox 4"/>
+          <p:cNvSpPr txBox="1"/>
+          <p:nvPr/>
+        </p:nvSpPr>
+        <p:spPr>
+          <a:xfrm>
+            <a:off x="640080" y="1737360"/>
+            <a:ext cx="10881360" cy="4754880"/>
+          </a:xfrm>
+          <a:prstGeom prst="rect">
+            <a:avLst/>
+          </a:prstGeom>
+          <a:noFill/>
+        </p:spPr>
+        <p:txBody>
+          <a:bodyPr wrap="square">
+            <a:spAutoFit/>
+          </a:bodyPr>
+          <a:lstStyle/>
+          <a:p>
+            <a:pPr algn="l">
+              <a:spcAft>
                 <a:spcPts val="1000"/>
               </a:spcAft>
             </a:pPr>
             <a:r>
-              <a:rPr sz="1600" b="0">
+              <a:rPr sz="1700" b="0">
                 <a:solidFill>
                   <a:srgbClr val="222222"/>
                 </a:solidFill>
                 <a:latin typeface="맑은 고딕"/>
               </a:rPr>
-              <a:t>•  Q1. `FOR STANDBY`가 없으면 무엇이 달라지며, 그것이 왜 Data Guard에 치명적인가?</a:t>
+              <a:t>•  DBID, NAME: Primary와 같음</a:t>
             </a:r>
           </a:p>
           <a:p>
@@ -14477,13 +14793,13 @@
               </a:spcAft>
             </a:pPr>
             <a:r>
-              <a:rPr sz="1600" b="0">
+              <a:rPr sz="1700" b="0">
                 <a:solidFill>
                   <a:srgbClr val="222222"/>
                 </a:solidFill>
                 <a:latin typeface="맑은 고딕"/>
               </a:rPr>
-              <a:t>•  Q2. Standby 초기 pfile이 두 줄로 충분한 이유와, 나머지 파라미터가 채워지는 시점은?</a:t>
+              <a:t>•  DB_UNIQUE_NAME=boston, PHYSICAL STANDBY</a:t>
             </a:r>
           </a:p>
           <a:p>
@@ -14493,13 +14809,13 @@
               </a:spcAft>
             </a:pPr>
             <a:r>
-              <a:rPr sz="1600" b="0">
+              <a:rPr sz="1700" b="0">
                 <a:solidFill>
                   <a:srgbClr val="222222"/>
                 </a:solidFill>
                 <a:latin typeface="맑은 고딕"/>
               </a:rPr>
-              <a:t>•  Q3. `RMAN-05538` 경고가 뜨고 `RMAN-05001`의 경로가 Chicago였다. 무엇이 잘못되었는가?</a:t>
+              <a:t>•  CONTROLFILE_TYPE=STANDBY, MOUNTED</a:t>
             </a:r>
           </a:p>
           <a:p>
@@ -14509,45 +14825,13 @@
               </a:spcAft>
             </a:pPr>
             <a:r>
-              <a:rPr sz="1600" b="0">
+              <a:rPr sz="1700" b="0">
                 <a:solidFill>
                   <a:srgbClr val="222222"/>
                 </a:solidFill>
                 <a:latin typeface="맑은 고딕"/>
               </a:rPr>
-              <a:t>•  Q4. `NOFILENAMECHECK`를 convert 없이 단독으로 쓰면 왜 위험한가?</a:t>
-            </a:r>
-          </a:p>
-          <a:p>
-            <a:pPr algn="l">
-              <a:spcAft>
-                <a:spcPts val="1000"/>
-              </a:spcAft>
-            </a:pPr>
-            <a:r>
-              <a:rPr sz="1600" b="0">
-                <a:solidFill>
-                  <a:srgbClr val="222222"/>
-                </a:solidFill>
-                <a:latin typeface="맑은 고딕"/>
-              </a:rPr>
-              <a:t>•  Q5. `ORA-19505`의 파일 이름이 비어 있을 때 원인을 어떻게 특정하는가?</a:t>
-            </a:r>
-          </a:p>
-          <a:p>
-            <a:pPr algn="l">
-              <a:spcAft>
-                <a:spcPts val="1000"/>
-              </a:spcAft>
-            </a:pPr>
-            <a:r>
-              <a:rPr sz="1600" b="0">
-                <a:solidFill>
-                  <a:srgbClr val="222222"/>
-                </a:solidFill>
-                <a:latin typeface="맑은 고딕"/>
-              </a:rPr>
-              <a:t>•  Q6. `DBMS_DBCOMP` 보고서에서 정상 여부를 판정하는 세 열은 무엇이며 왜 그 셋인가?</a:t>
+              <a:t>•  ORA-32002: SPFILE이 이미 사용 중, 조치 불필요</a:t>
             </a:r>
           </a:p>
         </p:txBody>
@@ -14648,7 +14932,7 @@
                 </a:solidFill>
                 <a:latin typeface="맑은 고딕"/>
               </a:rPr>
-              <a:t>요약 (Summary)</a:t>
+              <a:t>파일, 로그, 파라미터 구성</a:t>
             </a:r>
           </a:p>
         </p:txBody>
@@ -14661,8 +14945,8 @@
         </p:nvSpPr>
         <p:spPr>
           <a:xfrm>
-            <a:off x="640080" y="1371600"/>
-            <a:ext cx="10881360" cy="5120640"/>
+            <a:off x="640080" y="1078992"/>
+            <a:ext cx="10881360" cy="457200"/>
           </a:xfrm>
           <a:prstGeom prst="rect">
             <a:avLst/>
@@ -14677,17 +14961,56 @@
           <a:p>
             <a:pPr algn="l">
               <a:spcAft>
+                <a:spcPts val="600"/>
+              </a:spcAft>
+            </a:pPr>
+            <a:r>
+              <a:rPr sz="1500" b="0">
+                <a:solidFill>
+                  <a:srgbClr val="5A6672"/>
+                </a:solidFill>
+                <a:latin typeface="맑은 고딕"/>
+              </a:rPr>
+              <a:t>Primary 기준값과 대조</a:t>
+            </a:r>
+          </a:p>
+        </p:txBody>
+      </p:sp>
+      <p:sp>
+        <p:nvSpPr>
+          <p:cNvPr id="5" name="TextBox 4"/>
+          <p:cNvSpPr txBox="1"/>
+          <p:nvPr/>
+        </p:nvSpPr>
+        <p:spPr>
+          <a:xfrm>
+            <a:off x="640080" y="1737360"/>
+            <a:ext cx="10881360" cy="4754880"/>
+          </a:xfrm>
+          <a:prstGeom prst="rect">
+            <a:avLst/>
+          </a:prstGeom>
+          <a:noFill/>
+        </p:spPr>
+        <p:txBody>
+          <a:bodyPr wrap="square">
+            <a:spAutoFit/>
+          </a:bodyPr>
+          <a:lstStyle/>
+          <a:p>
+            <a:pPr algn="l">
+              <a:spcAft>
                 <a:spcPts val="1000"/>
               </a:spcAft>
             </a:pPr>
             <a:r>
-              <a:rPr sz="1600" b="0">
+              <a:rPr sz="1700" b="0">
                 <a:solidFill>
                   <a:srgbClr val="222222"/>
                 </a:solidFill>
                 <a:latin typeface="맑은 고딕"/>
               </a:rPr>
-              <a:t>•  `FOR STANDBY`가 DBID를 유지한다. 실측 양쪽 모두 1852041610. 이 값이 다르면 Data Guard로 쓸 수 없다.</a:t>
+              <a:t>•  V$DATAFILE: 개수, 번호, 바뀐 경로</a:t>
             </a:r>
           </a:p>
           <a:p>
@@ -14697,13 +15020,13 @@
               </a:spcAft>
             </a:pPr>
             <a:r>
-              <a:rPr sz="1600" b="0">
+              <a:rPr sz="1700" b="0">
                 <a:solidFill>
                   <a:srgbClr val="222222"/>
                 </a:solidFill>
                 <a:latin typeface="맑은 고딕"/>
               </a:rPr>
-              <a:t>•  `FROM ACTIVE DATABASE`는 백업 없이 운영 중 Primary에서 직접 읽는다. 실패해도 Primary는 무사하다.</a:t>
+              <a:t>•  V$STANDBY_LOG: SRL 개수와 크기</a:t>
             </a:r>
           </a:p>
           <a:p>
@@ -14713,13 +15036,13 @@
               </a:spcAft>
             </a:pPr>
             <a:r>
-              <a:rPr sz="1600" b="0">
+              <a:rPr sz="1700" b="0">
                 <a:solidFill>
                   <a:srgbClr val="222222"/>
                 </a:solidFill>
                 <a:latin typeface="맑은 고딕"/>
               </a:rPr>
-              <a:t>•  초기 pfile은 두 줄 47바이트로 충분하다. SPFILE 절이 5,632바이트 spfile을 만들어 준다.</a:t>
+              <a:t>•  V$PDBS: PDB 목록</a:t>
             </a:r>
           </a:p>
           <a:p>
@@ -14729,189 +15052,13 @@
               </a:spcAft>
             </a:pPr>
             <a:r>
-              <a:rPr sz="1600" b="0">
+              <a:rPr sz="1700" b="0">
                 <a:solidFill>
                   <a:srgbClr val="222222"/>
                 </a:solidFill>
                 <a:latin typeface="맑은 고딕"/>
               </a:rPr>
-              <a:t>•  SGA는 pfile 기동 시 356,512,392바이트 → spfile 기동 시 3,221,223,192바이트로 바뀐다.</a:t>
-            </a:r>
-          </a:p>
-          <a:p>
-            <a:pPr algn="l">
-              <a:spcAft>
-                <a:spcPts val="1000"/>
-              </a:spcAft>
-            </a:pPr>
-            <a:r>
-              <a:rPr sz="1600" b="0">
-                <a:solidFill>
-                  <a:srgbClr val="222222"/>
-                </a:solidFill>
-                <a:latin typeface="맑은 고딕"/>
-              </a:rPr>
-              <a:t>•  `PARAMETER_VALUE_CONVERT`가 db_name까지 바꾸므로 `SET DB_NAME='chicago'`로 되돌린다. SET이 이긴다.</a:t>
-            </a:r>
-          </a:p>
-          <a:p>
-            <a:pPr algn="l">
-              <a:spcAft>
-                <a:spcPts val="1000"/>
-              </a:spcAft>
-            </a:pPr>
-            <a:r>
-              <a:rPr sz="1600" b="0">
-                <a:solidFill>
-                  <a:srgbClr val="222222"/>
-                </a:solidFill>
-                <a:latin typeface="맑은 고딕"/>
-              </a:rPr>
-              <a:t>•  첫 번째 실패: convert 없음 → RMAN-05538 경고 후 RMAN-05001이 파일 수만큼 11줄. 경로가 Chicago다.</a:t>
-            </a:r>
-          </a:p>
-          <a:p>
-            <a:pPr algn="l">
-              <a:spcAft>
-                <a:spcPts val="1000"/>
-              </a:spcAft>
-            </a:pPr>
-            <a:r>
-              <a:rPr sz="1600" b="0">
-                <a:solidFill>
-                  <a:srgbClr val="222222"/>
-                </a:solidFill>
-                <a:latin typeface="맑은 고딕"/>
-              </a:rPr>
-              <a:t>•  `NOFILENAMECHECK`는 convert와 함께 써야 한다. 단독 사용은 안전장치만 제거한다.</a:t>
-            </a:r>
-          </a:p>
-          <a:p>
-            <a:pPr algn="l">
-              <a:spcAft>
-                <a:spcPts val="1000"/>
-              </a:spcAft>
-            </a:pPr>
-            <a:r>
-              <a:rPr sz="1600" b="0">
-                <a:solidFill>
-                  <a:srgbClr val="222222"/>
-                </a:solidFill>
-                <a:latin typeface="맑은 고딕"/>
-              </a:rPr>
-              <a:t>•  두 번째 실패: 하위 디렉터리 없음 → ORA-17628 + ORA-19505. 파일 이름이 빈 따옴표로 나온다.</a:t>
-            </a:r>
-          </a:p>
-          <a:p>
-            <a:pPr algn="l">
-              <a:spcAft>
-                <a:spcPts val="1000"/>
-              </a:spcAft>
-            </a:pPr>
-            <a:r>
-              <a:rPr sz="1600" b="0">
-                <a:solidFill>
-                  <a:srgbClr val="222222"/>
-                </a:solidFill>
-                <a:latin typeface="맑은 고딕"/>
-              </a:rPr>
-              <a:t>•  오류 스택은 아래에서 위로 읽는다. ORA-17628의 remote는 Standby 쪽 오류라는 뜻이다.</a:t>
-            </a:r>
-          </a:p>
-          <a:p>
-            <a:pPr algn="l">
-              <a:spcAft>
-                <a:spcPts val="1000"/>
-              </a:spcAft>
-            </a:pPr>
-            <a:r>
-              <a:rPr sz="1600" b="0">
-                <a:solidFill>
-                  <a:srgbClr val="222222"/>
-                </a:solidFill>
-                <a:latin typeface="맑은 고딕"/>
-              </a:rPr>
-              <a:t>•  성공 조건 셋: rc=0, RMAN-·ORA- 줄 0개, `Finished Duplicate Db`. 실측 418줄 중 413번 줄.</a:t>
-            </a:r>
-          </a:p>
-          <a:p>
-            <a:pPr algn="l">
-              <a:spcAft>
-                <a:spcPts val="1000"/>
-              </a:spcAft>
-            </a:pPr>
-            <a:r>
-              <a:rPr sz="1600" b="0">
-                <a:solidFill>
-                  <a:srgbClr val="222222"/>
-                </a:solidFill>
-                <a:latin typeface="맑은 고딕"/>
-              </a:rPr>
-              <a:t>•  복제 직후 OPEN_MODE는 MOUNTED다. READ ONLY로 열고 PDB까지 열어야 READ ONLY WITH APPLY가 된다.</a:t>
-            </a:r>
-          </a:p>
-          <a:p>
-            <a:pPr algn="l">
-              <a:spcAft>
-                <a:spcPts val="1000"/>
-              </a:spcAft>
-            </a:pPr>
-            <a:r>
-              <a:rPr sz="1600" b="0">
-                <a:solidFill>
-                  <a:srgbClr val="222222"/>
-                </a:solidFill>
-                <a:latin typeface="맑은 고딕"/>
-              </a:rPr>
-              <a:t>•  가이드 결함 둘: `CREATE SPFILE FROM MEMORY`는 불필요(ORA-32002), PDB 여는 줄이 누락되어 있다.</a:t>
-            </a:r>
-          </a:p>
-          <a:p>
-            <a:pPr algn="l">
-              <a:spcAft>
-                <a:spcPts val="1000"/>
-              </a:spcAft>
-            </a:pPr>
-            <a:r>
-              <a:rPr sz="1600" b="0">
-                <a:solidFill>
-                  <a:srgbClr val="222222"/>
-                </a:solidFill>
-                <a:latin typeface="맑은 고딕"/>
-              </a:rPr>
-              <a:t>•  SRL 네 그룹은 복제되어 온다. 4장에서 Primary에 미리 만들어 둔 결과다.</a:t>
-            </a:r>
-          </a:p>
-          <a:p>
-            <a:pPr algn="l">
-              <a:spcAft>
-                <a:spcPts val="1000"/>
-              </a:spcAft>
-            </a:pPr>
-            <a:r>
-              <a:rPr sz="1600" b="0">
-                <a:solidFill>
-                  <a:srgbClr val="222222"/>
-                </a:solidFill>
-                <a:latin typeface="맑은 고딕"/>
-              </a:rPr>
-              <a:t>•  `DBMS_DBCOMP`의 둘째 인자는 디렉터리 객체가 아니라 파일 이름 접두어다. 결과는 dbs 아래에 생긴다.</a:t>
-            </a:r>
-          </a:p>
-          <a:p>
-            <a:pPr algn="l">
-              <a:spcAft>
-                <a:spcPts val="1000"/>
-              </a:spcAft>
-            </a:pPr>
-            <a:r>
-              <a:rPr sz="1600" b="0">
-                <a:solidFill>
-                  <a:srgbClr val="222222"/>
-                </a:solidFill>
-                <a:latin typeface="맑은 고딕"/>
-              </a:rPr>
-              <a:t>•  판정 열은 DIFFPAIR·LWLOC·LWRMT 셋. DIFFV가 0이 아닌 것은 운영 중 비교라 정상이다.</a:t>
+              <a:t>•  FAL_SERVER, LOG_ARCHIVE_DEST_n 값 재확인</a:t>
             </a:r>
           </a:p>
         </p:txBody>
@@ -15012,7 +15159,7 @@
                 </a:solidFill>
                 <a:latin typeface="맑은 고딕"/>
               </a:rPr>
-              <a:t>실습 개요 (Practice Overview)</a:t>
+              <a:t>전송 시작과 Redo Apply 기동</a:t>
             </a:r>
           </a:p>
         </p:txBody>
@@ -15025,8 +15172,8 @@
         </p:nvSpPr>
         <p:spPr>
           <a:xfrm>
-            <a:off x="640080" y="1371600"/>
-            <a:ext cx="10881360" cy="5120640"/>
+            <a:off x="640080" y="1078992"/>
+            <a:ext cx="10881360" cy="457200"/>
           </a:xfrm>
           <a:prstGeom prst="rect">
             <a:avLst/>
@@ -15041,17 +15188,733 @@
           <a:p>
             <a:pPr algn="l">
               <a:spcAft>
+                <a:spcPts val="600"/>
+              </a:spcAft>
+            </a:pPr>
+            <a:r>
+              <a:rPr sz="1500" b="0">
+                <a:solidFill>
+                  <a:srgbClr val="5A6672"/>
+                </a:solidFill>
+                <a:latin typeface="맑은 고딕"/>
+              </a:rPr>
+              <a:t>7장으로 넘어가는 지점</a:t>
+            </a:r>
+          </a:p>
+        </p:txBody>
+      </p:sp>
+      <p:sp>
+        <p:nvSpPr>
+          <p:cNvPr id="5" name="TextBox 4"/>
+          <p:cNvSpPr txBox="1"/>
+          <p:nvPr/>
+        </p:nvSpPr>
+        <p:spPr>
+          <a:xfrm>
+            <a:off x="640080" y="1737360"/>
+            <a:ext cx="10881360" cy="4754880"/>
+          </a:xfrm>
+          <a:prstGeom prst="rect">
+            <a:avLst/>
+          </a:prstGeom>
+          <a:noFill/>
+        </p:spPr>
+        <p:txBody>
+          <a:bodyPr wrap="square">
+            <a:spAutoFit/>
+          </a:bodyPr>
+          <a:lstStyle/>
+          <a:p>
+            <a:pPr algn="l">
+              <a:spcAft>
                 <a:spcPts val="1000"/>
               </a:spcAft>
             </a:pPr>
             <a:r>
+              <a:rPr sz="1700" b="0">
+                <a:solidFill>
+                  <a:srgbClr val="222222"/>
+                </a:solidFill>
+                <a:latin typeface="맑은 고딕"/>
+              </a:rPr>
+              <a:t>•  Primary: LOG_ARCHIVE_DEST_STATE_2=ENABLE</a:t>
+            </a:r>
+          </a:p>
+          <a:p>
+            <a:pPr algn="l">
+              <a:spcAft>
+                <a:spcPts val="1000"/>
+              </a:spcAft>
+            </a:pPr>
+            <a:r>
+              <a:rPr sz="1700" b="0">
+                <a:solidFill>
+                  <a:srgbClr val="222222"/>
+                </a:solidFill>
+                <a:latin typeface="맑은 고딕"/>
+              </a:rPr>
+              <a:t>•  로그 전환 후 V$ARCHIVE_DEST_STATUS 확인</a:t>
+            </a:r>
+          </a:p>
+          <a:p>
+            <a:pPr algn="l">
+              <a:spcAft>
+                <a:spcPts val="1000"/>
+              </a:spcAft>
+            </a:pPr>
+            <a:r>
+              <a:rPr sz="1700" b="0">
+                <a:solidFill>
+                  <a:srgbClr val="222222"/>
+                </a:solidFill>
+                <a:latin typeface="맑은 고딕"/>
+              </a:rPr>
+              <a:t>•  Standby: RECOVER MANAGED STANDBY DATABASE DISCONNECT</a:t>
+            </a:r>
+          </a:p>
+          <a:p>
+            <a:pPr algn="l">
+              <a:spcAft>
+                <a:spcPts val="1000"/>
+              </a:spcAft>
+            </a:pPr>
+            <a:r>
+              <a:rPr sz="1700" b="0">
+                <a:solidFill>
+                  <a:srgbClr val="222222"/>
+                </a:solidFill>
+                <a:latin typeface="맑은 고딕"/>
+              </a:rPr>
+              <a:t>•  READ ONLY WITH APPLY는 ADG 라이선스 필요</a:t>
+            </a:r>
+          </a:p>
+        </p:txBody>
+      </p:sp>
+    </p:spTree>
+  </p:cSld>
+  <p:clrMapOvr>
+    <a:masterClrMapping/>
+  </p:clrMapOvr>
+</p:sld>
+</file>
+
+<file path=ppt/slides/slide46.xml><?xml version="1.0" encoding="utf-8"?>
+<p:sld xmlns:a="http://schemas.openxmlformats.org/drawingml/2006/main" xmlns:p="http://schemas.openxmlformats.org/presentationml/2006/main" xmlns:r="http://schemas.openxmlformats.org/officeDocument/2006/relationships">
+  <p:cSld>
+    <p:spTree>
+      <p:nvGrpSpPr>
+        <p:cNvPr id="1" name=""/>
+        <p:cNvGrpSpPr/>
+        <p:nvPr/>
+      </p:nvGrpSpPr>
+      <p:grpSpPr/>
+      <p:sp>
+        <p:nvSpPr>
+          <p:cNvPr id="2" name="Rectangle 1"/>
+          <p:cNvSpPr/>
+          <p:nvPr/>
+        </p:nvSpPr>
+        <p:spPr>
+          <a:xfrm>
+            <a:off x="0" y="0"/>
+            <a:ext cx="12191695" cy="1005840"/>
+          </a:xfrm>
+          <a:prstGeom prst="rect">
+            <a:avLst/>
+          </a:prstGeom>
+          <a:solidFill>
+            <a:srgbClr val="C0392B"/>
+          </a:solidFill>
+          <a:ln>
+            <a:noFill/>
+          </a:ln>
+          <a:effectLst/>
+        </p:spPr>
+        <p:style>
+          <a:lnRef idx="1">
+            <a:schemeClr val="accent1"/>
+          </a:lnRef>
+          <a:fillRef idx="3">
+            <a:schemeClr val="accent1"/>
+          </a:fillRef>
+          <a:effectRef idx="2">
+            <a:schemeClr val="accent1"/>
+          </a:effectRef>
+          <a:fontRef idx="minor">
+            <a:schemeClr val="lt1"/>
+          </a:fontRef>
+        </p:style>
+        <p:txBody>
+          <a:bodyPr rtlCol="0" anchor="ctr"/>
+          <a:lstStyle/>
+          <a:p>
+            <a:pPr algn="ctr"/>
+          </a:p>
+        </p:txBody>
+      </p:sp>
+      <p:sp>
+        <p:nvSpPr>
+          <p:cNvPr id="3" name="TextBox 2"/>
+          <p:cNvSpPr txBox="1"/>
+          <p:nvPr/>
+        </p:nvSpPr>
+        <p:spPr>
+          <a:xfrm>
+            <a:off x="548640" y="91440"/>
+            <a:ext cx="10972800" cy="777240"/>
+          </a:xfrm>
+          <a:prstGeom prst="rect">
+            <a:avLst/>
+          </a:prstGeom>
+          <a:noFill/>
+        </p:spPr>
+        <p:txBody>
+          <a:bodyPr wrap="square">
+            <a:spAutoFit/>
+          </a:bodyPr>
+          <a:lstStyle/>
+          <a:p>
+            <a:pPr algn="l">
+              <a:spcAft>
+                <a:spcPts val="600"/>
+              </a:spcAft>
+            </a:pPr>
+            <a:r>
+              <a:rPr sz="2600" b="1">
+                <a:solidFill>
+                  <a:srgbClr val="FFFFFF"/>
+                </a:solidFill>
+                <a:latin typeface="맑은 고딕"/>
+              </a:rPr>
+              <a:t>DBMS_DBCOMP로 블록 비교</a:t>
+            </a:r>
+          </a:p>
+        </p:txBody>
+      </p:sp>
+      <p:sp>
+        <p:nvSpPr>
+          <p:cNvPr id="4" name="TextBox 3"/>
+          <p:cNvSpPr txBox="1"/>
+          <p:nvPr/>
+        </p:nvSpPr>
+        <p:spPr>
+          <a:xfrm>
+            <a:off x="640080" y="1078992"/>
+            <a:ext cx="10881360" cy="457200"/>
+          </a:xfrm>
+          <a:prstGeom prst="rect">
+            <a:avLst/>
+          </a:prstGeom>
+          <a:noFill/>
+        </p:spPr>
+        <p:txBody>
+          <a:bodyPr wrap="square">
+            <a:spAutoFit/>
+          </a:bodyPr>
+          <a:lstStyle/>
+          <a:p>
+            <a:pPr algn="l">
+              <a:spcAft>
+                <a:spcPts val="600"/>
+              </a:spcAft>
+            </a:pPr>
+            <a:r>
+              <a:rPr sz="1500" b="0">
+                <a:solidFill>
+                  <a:srgbClr val="5A6672"/>
+                </a:solidFill>
+                <a:latin typeface="맑은 고딕"/>
+              </a:rPr>
+              <a:t>19c의 블록 단위 검증</a:t>
+            </a:r>
+          </a:p>
+        </p:txBody>
+      </p:sp>
+      <p:sp>
+        <p:nvSpPr>
+          <p:cNvPr id="5" name="TextBox 4"/>
+          <p:cNvSpPr txBox="1"/>
+          <p:nvPr/>
+        </p:nvSpPr>
+        <p:spPr>
+          <a:xfrm>
+            <a:off x="640080" y="1737360"/>
+            <a:ext cx="10881360" cy="4754880"/>
+          </a:xfrm>
+          <a:prstGeom prst="rect">
+            <a:avLst/>
+          </a:prstGeom>
+          <a:noFill/>
+        </p:spPr>
+        <p:txBody>
+          <a:bodyPr wrap="square">
+            <a:spAutoFit/>
+          </a:bodyPr>
+          <a:lstStyle/>
+          <a:p>
+            <a:pPr algn="l">
+              <a:spcAft>
+                <a:spcPts val="1000"/>
+              </a:spcAft>
+            </a:pPr>
+            <a:r>
+              <a:rPr sz="1700" b="0">
+                <a:solidFill>
+                  <a:srgbClr val="222222"/>
+                </a:solidFill>
+                <a:latin typeface="맑은 고딕"/>
+              </a:rPr>
+              <a:t>•  Primary와 Standby의 같은 블록을 직접 비교</a:t>
+            </a:r>
+          </a:p>
+          <a:p>
+            <a:pPr algn="l">
+              <a:spcAft>
+                <a:spcPts val="1000"/>
+              </a:spcAft>
+            </a:pPr>
+            <a:r>
+              <a:rPr sz="1700" b="0">
+                <a:solidFill>
+                  <a:srgbClr val="222222"/>
+                </a:solidFill>
+                <a:latin typeface="맑은 고딕"/>
+              </a:rPr>
+              <a:t>•  DB_LOST_WRITE_PROTECT 설정과 무관</a:t>
+            </a:r>
+          </a:p>
+          <a:p>
+            <a:pPr algn="l">
+              <a:spcAft>
+                <a:spcPts val="1000"/>
+              </a:spcAft>
+            </a:pPr>
+            <a:r>
+              <a:rPr sz="1700" b="0">
+                <a:solidFill>
+                  <a:srgbClr val="222222"/>
+                </a:solidFill>
+                <a:latin typeface="맑은 고딕"/>
+              </a:rPr>
+              <a:t>•  두 번째 인자는 출력 파일 접두어</a:t>
+            </a:r>
+          </a:p>
+          <a:p>
+            <a:pPr algn="l">
+              <a:spcAft>
+                <a:spcPts val="1000"/>
+              </a:spcAft>
+            </a:pPr>
+            <a:r>
+              <a:rPr sz="1700" b="0">
+                <a:solidFill>
+                  <a:srgbClr val="222222"/>
+                </a:solidFill>
+                <a:latin typeface="맑은 고딕"/>
+              </a:rPr>
+              <a:t>•  Primary에서 실행하면 모든 Standby와 비교</a:t>
+            </a:r>
+          </a:p>
+        </p:txBody>
+      </p:sp>
+    </p:spTree>
+  </p:cSld>
+  <p:clrMapOvr>
+    <a:masterClrMapping/>
+  </p:clrMapOvr>
+</p:sld>
+</file>
+
+<file path=ppt/slides/slide47.xml><?xml version="1.0" encoding="utf-8"?>
+<p:sld xmlns:a="http://schemas.openxmlformats.org/drawingml/2006/main" xmlns:p="http://schemas.openxmlformats.org/presentationml/2006/main" xmlns:r="http://schemas.openxmlformats.org/officeDocument/2006/relationships">
+  <p:cSld>
+    <p:spTree>
+      <p:nvGrpSpPr>
+        <p:cNvPr id="1" name=""/>
+        <p:cNvGrpSpPr/>
+        <p:nvPr/>
+      </p:nvGrpSpPr>
+      <p:grpSpPr/>
+      <p:sp>
+        <p:nvSpPr>
+          <p:cNvPr id="2" name="Rectangle 1"/>
+          <p:cNvSpPr/>
+          <p:nvPr/>
+        </p:nvSpPr>
+        <p:spPr>
+          <a:xfrm>
+            <a:off x="0" y="0"/>
+            <a:ext cx="12191695" cy="6858000"/>
+          </a:xfrm>
+          <a:prstGeom prst="rect">
+            <a:avLst/>
+          </a:prstGeom>
+          <a:solidFill>
+            <a:srgbClr val="C0392B"/>
+          </a:solidFill>
+          <a:ln>
+            <a:noFill/>
+          </a:ln>
+          <a:effectLst/>
+        </p:spPr>
+        <p:style>
+          <a:lnRef idx="1">
+            <a:schemeClr val="accent1"/>
+          </a:lnRef>
+          <a:fillRef idx="3">
+            <a:schemeClr val="accent1"/>
+          </a:fillRef>
+          <a:effectRef idx="2">
+            <a:schemeClr val="accent1"/>
+          </a:effectRef>
+          <a:fontRef idx="minor">
+            <a:schemeClr val="lt1"/>
+          </a:fontRef>
+        </p:style>
+        <p:txBody>
+          <a:bodyPr rtlCol="0" anchor="ctr"/>
+          <a:lstStyle/>
+          <a:p>
+            <a:pPr algn="ctr"/>
+          </a:p>
+        </p:txBody>
+      </p:sp>
+      <p:sp>
+        <p:nvSpPr>
+          <p:cNvPr id="3" name="TextBox 2"/>
+          <p:cNvSpPr txBox="1"/>
+          <p:nvPr/>
+        </p:nvSpPr>
+        <p:spPr>
+          <a:xfrm>
+            <a:off x="822960" y="2011680"/>
+            <a:ext cx="10515600" cy="1097280"/>
+          </a:xfrm>
+          <a:prstGeom prst="rect">
+            <a:avLst/>
+          </a:prstGeom>
+          <a:noFill/>
+        </p:spPr>
+        <p:txBody>
+          <a:bodyPr wrap="square">
+            <a:spAutoFit/>
+          </a:bodyPr>
+          <a:lstStyle/>
+          <a:p>
+            <a:pPr algn="l">
+              <a:spcAft>
+                <a:spcPts val="600"/>
+              </a:spcAft>
+            </a:pPr>
+            <a:r>
+              <a:rPr sz="4000" b="1">
+                <a:solidFill>
+                  <a:srgbClr val="FFFFFF"/>
+                </a:solidFill>
+                <a:latin typeface="맑은 고딕"/>
+              </a:rPr>
+              <a:t>5.11</a:t>
+            </a:r>
+          </a:p>
+        </p:txBody>
+      </p:sp>
+      <p:sp>
+        <p:nvSpPr>
+          <p:cNvPr id="4" name="TextBox 3"/>
+          <p:cNvSpPr txBox="1"/>
+          <p:nvPr/>
+        </p:nvSpPr>
+        <p:spPr>
+          <a:xfrm>
+            <a:off x="822960" y="3017520"/>
+            <a:ext cx="10515600" cy="914400"/>
+          </a:xfrm>
+          <a:prstGeom prst="rect">
+            <a:avLst/>
+          </a:prstGeom>
+          <a:noFill/>
+        </p:spPr>
+        <p:txBody>
+          <a:bodyPr wrap="square">
+            <a:spAutoFit/>
+          </a:bodyPr>
+          <a:lstStyle/>
+          <a:p>
+            <a:pPr algn="l">
+              <a:spcAft>
+                <a:spcPts val="600"/>
+              </a:spcAft>
+            </a:pPr>
+            <a:r>
+              <a:rPr sz="2800" b="1">
+                <a:solidFill>
+                  <a:srgbClr val="FFFFFF"/>
+                </a:solidFill>
+                <a:latin typeface="맑은 고딕"/>
+              </a:rPr>
+              <a:t>운영 시 주의점</a:t>
+            </a:r>
+          </a:p>
+        </p:txBody>
+      </p:sp>
+      <p:sp>
+        <p:nvSpPr>
+          <p:cNvPr id="5" name="Rectangle 4"/>
+          <p:cNvSpPr/>
+          <p:nvPr/>
+        </p:nvSpPr>
+        <p:spPr>
+          <a:xfrm>
+            <a:off x="822960" y="4114800"/>
+            <a:ext cx="5486400" cy="54864"/>
+          </a:xfrm>
+          <a:prstGeom prst="rect">
+            <a:avLst/>
+          </a:prstGeom>
+          <a:solidFill>
+            <a:srgbClr val="FFFFFF"/>
+          </a:solidFill>
+          <a:ln>
+            <a:noFill/>
+          </a:ln>
+          <a:effectLst/>
+        </p:spPr>
+        <p:style>
+          <a:lnRef idx="1">
+            <a:schemeClr val="accent1"/>
+          </a:lnRef>
+          <a:fillRef idx="3">
+            <a:schemeClr val="accent1"/>
+          </a:fillRef>
+          <a:effectRef idx="2">
+            <a:schemeClr val="accent1"/>
+          </a:effectRef>
+          <a:fontRef idx="minor">
+            <a:schemeClr val="lt1"/>
+          </a:fontRef>
+        </p:style>
+        <p:txBody>
+          <a:bodyPr rtlCol="0" anchor="ctr"/>
+          <a:lstStyle/>
+          <a:p>
+            <a:pPr algn="ctr"/>
+          </a:p>
+        </p:txBody>
+      </p:sp>
+      <p:sp>
+        <p:nvSpPr>
+          <p:cNvPr id="6" name="TextBox 5"/>
+          <p:cNvSpPr txBox="1"/>
+          <p:nvPr/>
+        </p:nvSpPr>
+        <p:spPr>
+          <a:xfrm>
+            <a:off x="822960" y="4297680"/>
+            <a:ext cx="10058400" cy="2011680"/>
+          </a:xfrm>
+          <a:prstGeom prst="rect">
+            <a:avLst/>
+          </a:prstGeom>
+          <a:noFill/>
+        </p:spPr>
+        <p:txBody>
+          <a:bodyPr wrap="square">
+            <a:spAutoFit/>
+          </a:bodyPr>
+          <a:lstStyle/>
+          <a:p>
+            <a:pPr algn="l">
+              <a:spcAft>
+                <a:spcPts val="800"/>
+              </a:spcAft>
+            </a:pPr>
+            <a:r>
               <a:rPr sz="1600" b="0">
                 <a:solidFill>
+                  <a:srgbClr val="FFFFFF"/>
+                </a:solidFill>
+                <a:latin typeface="맑은 고딕"/>
+              </a:rPr>
+              <a:t>•  재생성 대비, 경로 변경, 보안</a:t>
+            </a:r>
+          </a:p>
+        </p:txBody>
+      </p:sp>
+    </p:spTree>
+  </p:cSld>
+  <p:clrMapOvr>
+    <a:masterClrMapping/>
+  </p:clrMapOvr>
+</p:sld>
+</file>
+
+<file path=ppt/slides/slide48.xml><?xml version="1.0" encoding="utf-8"?>
+<p:sld xmlns:a="http://schemas.openxmlformats.org/drawingml/2006/main" xmlns:p="http://schemas.openxmlformats.org/presentationml/2006/main" xmlns:r="http://schemas.openxmlformats.org/officeDocument/2006/relationships">
+  <p:cSld>
+    <p:spTree>
+      <p:nvGrpSpPr>
+        <p:cNvPr id="1" name=""/>
+        <p:cNvGrpSpPr/>
+        <p:nvPr/>
+      </p:nvGrpSpPr>
+      <p:grpSpPr/>
+      <p:sp>
+        <p:nvSpPr>
+          <p:cNvPr id="2" name="Rectangle 1"/>
+          <p:cNvSpPr/>
+          <p:nvPr/>
+        </p:nvSpPr>
+        <p:spPr>
+          <a:xfrm>
+            <a:off x="0" y="0"/>
+            <a:ext cx="12191695" cy="1005840"/>
+          </a:xfrm>
+          <a:prstGeom prst="rect">
+            <a:avLst/>
+          </a:prstGeom>
+          <a:solidFill>
+            <a:srgbClr val="C0392B"/>
+          </a:solidFill>
+          <a:ln>
+            <a:noFill/>
+          </a:ln>
+          <a:effectLst/>
+        </p:spPr>
+        <p:style>
+          <a:lnRef idx="1">
+            <a:schemeClr val="accent1"/>
+          </a:lnRef>
+          <a:fillRef idx="3">
+            <a:schemeClr val="accent1"/>
+          </a:fillRef>
+          <a:effectRef idx="2">
+            <a:schemeClr val="accent1"/>
+          </a:effectRef>
+          <a:fontRef idx="minor">
+            <a:schemeClr val="lt1"/>
+          </a:fontRef>
+        </p:style>
+        <p:txBody>
+          <a:bodyPr rtlCol="0" anchor="ctr"/>
+          <a:lstStyle/>
+          <a:p>
+            <a:pPr algn="ctr"/>
+          </a:p>
+        </p:txBody>
+      </p:sp>
+      <p:sp>
+        <p:nvSpPr>
+          <p:cNvPr id="3" name="TextBox 2"/>
+          <p:cNvSpPr txBox="1"/>
+          <p:nvPr/>
+        </p:nvSpPr>
+        <p:spPr>
+          <a:xfrm>
+            <a:off x="548640" y="91440"/>
+            <a:ext cx="10972800" cy="777240"/>
+          </a:xfrm>
+          <a:prstGeom prst="rect">
+            <a:avLst/>
+          </a:prstGeom>
+          <a:noFill/>
+        </p:spPr>
+        <p:txBody>
+          <a:bodyPr wrap="square">
+            <a:spAutoFit/>
+          </a:bodyPr>
+          <a:lstStyle/>
+          <a:p>
+            <a:pPr algn="l">
+              <a:spcAft>
+                <a:spcPts val="600"/>
+              </a:spcAft>
+            </a:pPr>
+            <a:r>
+              <a:rPr sz="2600" b="1">
+                <a:solidFill>
+                  <a:srgbClr val="FFFFFF"/>
+                </a:solidFill>
+                <a:latin typeface="맑은 고딕"/>
+              </a:rPr>
+              <a:t>운영 시 주의점</a:t>
+            </a:r>
+          </a:p>
+        </p:txBody>
+      </p:sp>
+      <p:sp>
+        <p:nvSpPr>
+          <p:cNvPr id="4" name="TextBox 3"/>
+          <p:cNvSpPr txBox="1"/>
+          <p:nvPr/>
+        </p:nvSpPr>
+        <p:spPr>
+          <a:xfrm>
+            <a:off x="640080" y="1078992"/>
+            <a:ext cx="10881360" cy="457200"/>
+          </a:xfrm>
+          <a:prstGeom prst="rect">
+            <a:avLst/>
+          </a:prstGeom>
+          <a:noFill/>
+        </p:spPr>
+        <p:txBody>
+          <a:bodyPr wrap="square">
+            <a:spAutoFit/>
+          </a:bodyPr>
+          <a:lstStyle/>
+          <a:p>
+            <a:pPr algn="l">
+              <a:spcAft>
+                <a:spcPts val="600"/>
+              </a:spcAft>
+            </a:pPr>
+            <a:r>
+              <a:rPr sz="1500" b="0">
+                <a:solidFill>
+                  <a:srgbClr val="5A6672"/>
+                </a:solidFill>
+                <a:latin typeface="맑은 고딕"/>
+              </a:rPr>
+              <a:t>만든 다음에도 남는 일</a:t>
+            </a:r>
+          </a:p>
+        </p:txBody>
+      </p:sp>
+      <p:sp>
+        <p:nvSpPr>
+          <p:cNvPr id="5" name="TextBox 4"/>
+          <p:cNvSpPr txBox="1"/>
+          <p:nvPr/>
+        </p:nvSpPr>
+        <p:spPr>
+          <a:xfrm>
+            <a:off x="640080" y="1737360"/>
+            <a:ext cx="10881360" cy="4754880"/>
+          </a:xfrm>
+          <a:prstGeom prst="rect">
+            <a:avLst/>
+          </a:prstGeom>
+          <a:noFill/>
+        </p:spPr>
+        <p:txBody>
+          <a:bodyPr wrap="square">
+            <a:spAutoFit/>
+          </a:bodyPr>
+          <a:lstStyle/>
+          <a:p>
+            <a:pPr algn="l">
+              <a:spcAft>
+                <a:spcPts val="1000"/>
+              </a:spcAft>
+            </a:pPr>
+            <a:r>
+              <a:rPr sz="1700" b="0">
+                <a:solidFill>
                   <a:srgbClr val="222222"/>
                 </a:solidFill>
                 <a:latin typeface="맑은 고딕"/>
               </a:rPr>
-              <a:t>•  실습 01 — Primary 파라미터 확인: 2~4장 설정을 점검하고 대조용 기준값을 기록한다. RMAN-05500을 재현한다.</a:t>
+              <a:t>•  DUPLICATE 스크립트와 convert 규칙 보관</a:t>
             </a:r>
           </a:p>
           <a:p>
@@ -15061,13 +15924,185 @@
               </a:spcAft>
             </a:pPr>
             <a:r>
+              <a:rPr sz="1700" b="0">
+                <a:solidFill>
+                  <a:srgbClr val="222222"/>
+                </a:solidFill>
+                <a:latin typeface="맑은 고딕"/>
+              </a:rPr>
+              <a:t>•  Primary 경로가 늘면 Standby 값과 디렉터리도 갱신</a:t>
+            </a:r>
+          </a:p>
+          <a:p>
+            <a:pPr algn="l">
+              <a:spcAft>
+                <a:spcPts val="1000"/>
+              </a:spcAft>
+            </a:pPr>
+            <a:r>
+              <a:rPr sz="1700" b="0">
+                <a:solidFill>
+                  <a:srgbClr val="222222"/>
+                </a:solidFill>
+                <a:latin typeface="맑은 고딕"/>
+              </a:rPr>
+              <a:t>•  생성 중 생긴 아카이브 로그 보존</a:t>
+            </a:r>
+          </a:p>
+          <a:p>
+            <a:pPr algn="l">
+              <a:spcAft>
+                <a:spcPts val="1000"/>
+              </a:spcAft>
+            </a:pPr>
+            <a:r>
+              <a:rPr sz="1700" b="0">
+                <a:solidFill>
+                  <a:srgbClr val="222222"/>
+                </a:solidFill>
+                <a:latin typeface="맑은 고딕"/>
+              </a:rPr>
+              <a:t>•  스크립트에 SYS 비밀번호를 적지 않음</a:t>
+            </a:r>
+          </a:p>
+        </p:txBody>
+      </p:sp>
+    </p:spTree>
+  </p:cSld>
+  <p:clrMapOvr>
+    <a:masterClrMapping/>
+  </p:clrMapOvr>
+</p:sld>
+</file>
+
+<file path=ppt/slides/slide49.xml><?xml version="1.0" encoding="utf-8"?>
+<p:sld xmlns:a="http://schemas.openxmlformats.org/drawingml/2006/main" xmlns:p="http://schemas.openxmlformats.org/presentationml/2006/main" xmlns:r="http://schemas.openxmlformats.org/officeDocument/2006/relationships">
+  <p:cSld>
+    <p:spTree>
+      <p:nvGrpSpPr>
+        <p:cNvPr id="1" name=""/>
+        <p:cNvGrpSpPr/>
+        <p:nvPr/>
+      </p:nvGrpSpPr>
+      <p:grpSpPr/>
+      <p:sp>
+        <p:nvSpPr>
+          <p:cNvPr id="2" name="Rectangle 1"/>
+          <p:cNvSpPr/>
+          <p:nvPr/>
+        </p:nvSpPr>
+        <p:spPr>
+          <a:xfrm>
+            <a:off x="0" y="0"/>
+            <a:ext cx="12191695" cy="1005840"/>
+          </a:xfrm>
+          <a:prstGeom prst="rect">
+            <a:avLst/>
+          </a:prstGeom>
+          <a:solidFill>
+            <a:srgbClr val="C0392B"/>
+          </a:solidFill>
+          <a:ln>
+            <a:noFill/>
+          </a:ln>
+          <a:effectLst/>
+        </p:spPr>
+        <p:style>
+          <a:lnRef idx="1">
+            <a:schemeClr val="accent1"/>
+          </a:lnRef>
+          <a:fillRef idx="3">
+            <a:schemeClr val="accent1"/>
+          </a:fillRef>
+          <a:effectRef idx="2">
+            <a:schemeClr val="accent1"/>
+          </a:effectRef>
+          <a:fontRef idx="minor">
+            <a:schemeClr val="lt1"/>
+          </a:fontRef>
+        </p:style>
+        <p:txBody>
+          <a:bodyPr rtlCol="0" anchor="ctr"/>
+          <a:lstStyle/>
+          <a:p>
+            <a:pPr algn="ctr"/>
+          </a:p>
+        </p:txBody>
+      </p:sp>
+      <p:sp>
+        <p:nvSpPr>
+          <p:cNvPr id="3" name="TextBox 2"/>
+          <p:cNvSpPr txBox="1"/>
+          <p:nvPr/>
+        </p:nvSpPr>
+        <p:spPr>
+          <a:xfrm>
+            <a:off x="548640" y="91440"/>
+            <a:ext cx="10972800" cy="777240"/>
+          </a:xfrm>
+          <a:prstGeom prst="rect">
+            <a:avLst/>
+          </a:prstGeom>
+          <a:noFill/>
+        </p:spPr>
+        <p:txBody>
+          <a:bodyPr wrap="square">
+            <a:spAutoFit/>
+          </a:bodyPr>
+          <a:lstStyle/>
+          <a:p>
+            <a:pPr algn="l">
+              <a:spcAft>
+                <a:spcPts val="600"/>
+              </a:spcAft>
+            </a:pPr>
+            <a:r>
+              <a:rPr sz="2600" b="1">
+                <a:solidFill>
+                  <a:srgbClr val="FFFFFF"/>
+                </a:solidFill>
+                <a:latin typeface="맑은 고딕"/>
+              </a:rPr>
+              <a:t>요약</a:t>
+            </a:r>
+          </a:p>
+        </p:txBody>
+      </p:sp>
+      <p:sp>
+        <p:nvSpPr>
+          <p:cNvPr id="4" name="TextBox 3"/>
+          <p:cNvSpPr txBox="1"/>
+          <p:nvPr/>
+        </p:nvSpPr>
+        <p:spPr>
+          <a:xfrm>
+            <a:off x="640080" y="1371600"/>
+            <a:ext cx="10881360" cy="5120640"/>
+          </a:xfrm>
+          <a:prstGeom prst="rect">
+            <a:avLst/>
+          </a:prstGeom>
+          <a:noFill/>
+        </p:spPr>
+        <p:txBody>
+          <a:bodyPr wrap="square">
+            <a:spAutoFit/>
+          </a:bodyPr>
+          <a:lstStyle/>
+          <a:p>
+            <a:pPr algn="l">
+              <a:spcAft>
+                <a:spcPts val="1000"/>
+              </a:spcAft>
+            </a:pPr>
+            <a:r>
               <a:rPr sz="1600" b="0">
                 <a:solidFill>
                   <a:srgbClr val="222222"/>
                 </a:solidFill>
                 <a:latin typeface="맑은 고딕"/>
               </a:rPr>
-              <a:t>•  실습 02 — Standby 초기 pfile: 두 줄로 충분한 이유를 확인하고 db_name 오설정을 재현한다.</a:t>
+              <a:t>•  Standby: 같은 DBID·DB_NAME, 다른 DB_UNIQUE_NAME, STANDBY 컨트롤 파일</a:t>
             </a:r>
           </a:p>
           <a:p>
@@ -15083,7 +16118,7 @@
                 </a:solidFill>
                 <a:latin typeface="맑은 고딕"/>
               </a:rPr>
-              <a:t>•  실습 03 — NOMOUNT 기동과 접속 확인: Standby를 헐고 NOMOUNT로 띄운 뒤 원격 SYS 접속을 확인한다.</a:t>
+              <a:t>•  방법: Active, 백업 기반, 수동, DBCA, EM 중 상황에 맞게 선택</a:t>
             </a:r>
           </a:p>
           <a:p>
@@ -15099,7 +16134,7 @@
                 </a:solidFill>
                 <a:latin typeface="맑은 고딕"/>
               </a:rPr>
-              <a:t>•  실습 04 — DUPLICATE 실행: 스크립트를 실행하고 418줄 로그를 단계별로 읽는다.</a:t>
+              <a:t>•  준비: 패스워드 파일 복사, 최소 pfile, 디렉터리, NOMOUNT, 정적 등록</a:t>
             </a:r>
           </a:p>
           <a:p>
@@ -15115,7 +16150,7 @@
                 </a:solidFill>
                 <a:latin typeface="맑은 고딕"/>
               </a:rPr>
-              <a:t>•  실습 05 — 실패 재현과 진단: RMAN-05001과 ORA-19505를 각각 재현하고 진단 경로를 따라간다.</a:t>
+              <a:t>•  SPFILE 절: PARAMETER_VALUE_CONVERT 후 SET으로 보정</a:t>
             </a:r>
           </a:p>
           <a:p>
@@ -15131,7 +16166,7 @@
                 </a:solidFill>
                 <a:latin typeface="맑은 고딕"/>
               </a:rPr>
-              <a:t>•  실습 06 — 결과 검증과 ADG 전환: 기준값과 열네 항목을 대조하고 READ ONLY WITH APPLY로 올린다.</a:t>
+              <a:t>•  convert는 대소문자 구분 문자열 치환, 디렉터리는 따로 생성</a:t>
             </a:r>
           </a:p>
           <a:p>
@@ -15147,23 +16182,7 @@
                 </a:solidFill>
                 <a:latin typeface="맑은 고딕"/>
               </a:rPr>
-              <a:t>•  실습 07 — DBMS_DBCOMP 블록 비교: 세 가지 함정을 확인하고 보고서의 판정 열을 읽는다.</a:t>
-            </a:r>
-          </a:p>
-          <a:p>
-            <a:pPr algn="l">
-              <a:spcAft>
-                <a:spcPts val="1000"/>
-              </a:spcAft>
-            </a:pPr>
-            <a:r>
-              <a:rPr sz="1600" b="0">
-                <a:solidFill>
-                  <a:srgbClr val="222222"/>
-                </a:solidFill>
-                <a:latin typeface="맑은 고딕"/>
-              </a:rPr>
-              <a:t>•  실습 03·04·05는 Standby를 실제로 헌다. 개인 실습 환경에서만, VM 스냅샷을 뜬 뒤 수행한다.</a:t>
+              <a:t>•  실패는 단계로 분류, 확인 후 Redo Apply 기동</a:t>
             </a:r>
           </a:p>
         </p:txBody>
@@ -15264,7 +16283,7 @@
                 </a:solidFill>
                 <a:latin typeface="맑은 고딕"/>
               </a:rPr>
-              <a:t>같은 명령, 다른 결과</a:t>
+              <a:t>물리 Standby는 Primary의 블록 사본</a:t>
             </a:r>
           </a:p>
         </p:txBody>
@@ -15303,7 +16322,7 @@
                 </a:solidFill>
                 <a:latin typeface="맑은 고딕"/>
               </a:rPr>
-              <a:t>BR 과정의 DUPLICATE와 비교</a:t>
+              <a:t>같아야 하는 것과 달라야 하는 것</a:t>
             </a:r>
           </a:p>
         </p:txBody>
@@ -15342,7 +16361,7 @@
                 </a:solidFill>
                 <a:latin typeface="맑은 고딕"/>
               </a:rPr>
-              <a:t>•  BR 17장 : 테스트용 복제본을 만든다 — 새 DBID, RESETLOGS</a:t>
+              <a:t>•  DBID, DB_NAME: Primary와 같음</a:t>
             </a:r>
           </a:p>
           <a:p>
@@ -15358,7 +16377,7 @@
                 </a:solidFill>
                 <a:latin typeface="맑은 고딕"/>
               </a:rPr>
-              <a:t>•  이 장   : Data Guard용 Standby를 만든다 — DBID 유지, RESETLOGS 없음</a:t>
+              <a:t>•  DB_UNIQUE_NAME: 반드시 다름 (chicago / boston)</a:t>
             </a:r>
           </a:p>
           <a:p>
@@ -15374,7 +16393,7 @@
                 </a:solidFill>
                 <a:latin typeface="맑은 고딕"/>
               </a:rPr>
-              <a:t>•  차이를 만드는 것은 단 한 절, `FOR STANDBY`</a:t>
+              <a:t>•  컨트롤 파일: STANDBY 종류</a:t>
             </a:r>
           </a:p>
           <a:p>
@@ -15390,7 +16409,571 @@
                 </a:solidFill>
                 <a:latin typeface="맑은 고딕"/>
               </a:rPr>
-              <a:t>•  실측 DBID : chicago 1852041610 = boston 1852041610</a:t>
+              <a:t>•  ORACLE_SID: Standby 고유 (orapw, spfile 이름과 연결)</a:t>
+            </a:r>
+          </a:p>
+        </p:txBody>
+      </p:sp>
+    </p:spTree>
+  </p:cSld>
+  <p:clrMapOvr>
+    <a:masterClrMapping/>
+  </p:clrMapOvr>
+</p:sld>
+</file>
+
+<file path=ppt/slides/slide50.xml><?xml version="1.0" encoding="utf-8"?>
+<p:sld xmlns:a="http://schemas.openxmlformats.org/drawingml/2006/main" xmlns:p="http://schemas.openxmlformats.org/presentationml/2006/main" xmlns:r="http://schemas.openxmlformats.org/officeDocument/2006/relationships">
+  <p:cSld>
+    <p:spTree>
+      <p:nvGrpSpPr>
+        <p:cNvPr id="1" name=""/>
+        <p:cNvGrpSpPr/>
+        <p:nvPr/>
+      </p:nvGrpSpPr>
+      <p:grpSpPr/>
+      <p:sp>
+        <p:nvSpPr>
+          <p:cNvPr id="2" name="Rectangle 1"/>
+          <p:cNvSpPr/>
+          <p:nvPr/>
+        </p:nvSpPr>
+        <p:spPr>
+          <a:xfrm>
+            <a:off x="0" y="0"/>
+            <a:ext cx="12191695" cy="1005840"/>
+          </a:xfrm>
+          <a:prstGeom prst="rect">
+            <a:avLst/>
+          </a:prstGeom>
+          <a:solidFill>
+            <a:srgbClr val="C0392B"/>
+          </a:solidFill>
+          <a:ln>
+            <a:noFill/>
+          </a:ln>
+          <a:effectLst/>
+        </p:spPr>
+        <p:style>
+          <a:lnRef idx="1">
+            <a:schemeClr val="accent1"/>
+          </a:lnRef>
+          <a:fillRef idx="3">
+            <a:schemeClr val="accent1"/>
+          </a:fillRef>
+          <a:effectRef idx="2">
+            <a:schemeClr val="accent1"/>
+          </a:effectRef>
+          <a:fontRef idx="minor">
+            <a:schemeClr val="lt1"/>
+          </a:fontRef>
+        </p:style>
+        <p:txBody>
+          <a:bodyPr rtlCol="0" anchor="ctr"/>
+          <a:lstStyle/>
+          <a:p>
+            <a:pPr algn="ctr"/>
+          </a:p>
+        </p:txBody>
+      </p:sp>
+      <p:sp>
+        <p:nvSpPr>
+          <p:cNvPr id="3" name="TextBox 2"/>
+          <p:cNvSpPr txBox="1"/>
+          <p:nvPr/>
+        </p:nvSpPr>
+        <p:spPr>
+          <a:xfrm>
+            <a:off x="548640" y="91440"/>
+            <a:ext cx="10972800" cy="777240"/>
+          </a:xfrm>
+          <a:prstGeom prst="rect">
+            <a:avLst/>
+          </a:prstGeom>
+          <a:noFill/>
+        </p:spPr>
+        <p:txBody>
+          <a:bodyPr wrap="square">
+            <a:spAutoFit/>
+          </a:bodyPr>
+          <a:lstStyle/>
+          <a:p>
+            <a:pPr algn="l">
+              <a:spcAft>
+                <a:spcPts val="600"/>
+              </a:spcAft>
+            </a:pPr>
+            <a:r>
+              <a:rPr sz="2600" b="1">
+                <a:solidFill>
+                  <a:srgbClr val="FFFFFF"/>
+                </a:solidFill>
+                <a:latin typeface="맑은 고딕"/>
+              </a:rPr>
+              <a:t>퀴즈 (1/2)</a:t>
+            </a:r>
+          </a:p>
+        </p:txBody>
+      </p:sp>
+      <p:sp>
+        <p:nvSpPr>
+          <p:cNvPr id="4" name="TextBox 3"/>
+          <p:cNvSpPr txBox="1"/>
+          <p:nvPr/>
+        </p:nvSpPr>
+        <p:spPr>
+          <a:xfrm>
+            <a:off x="640080" y="1371600"/>
+            <a:ext cx="10881360" cy="5120640"/>
+          </a:xfrm>
+          <a:prstGeom prst="rect">
+            <a:avLst/>
+          </a:prstGeom>
+          <a:noFill/>
+        </p:spPr>
+        <p:txBody>
+          <a:bodyPr wrap="square">
+            <a:spAutoFit/>
+          </a:bodyPr>
+          <a:lstStyle/>
+          <a:p>
+            <a:pPr algn="l">
+              <a:spcAft>
+                <a:spcPts val="1000"/>
+              </a:spcAft>
+            </a:pPr>
+            <a:r>
+              <a:rPr sz="1600" b="0">
+                <a:solidFill>
+                  <a:srgbClr val="222222"/>
+                </a:solidFill>
+                <a:latin typeface="맑은 고딕"/>
+              </a:rPr>
+              <a:t>•  Q1. FOR STANDBY 복제본의 DBID는? → Primary와 같고 MOUNT로 끝남</a:t>
+            </a:r>
+          </a:p>
+          <a:p>
+            <a:pPr algn="l">
+              <a:spcAft>
+                <a:spcPts val="1000"/>
+              </a:spcAft>
+            </a:pPr>
+            <a:r>
+              <a:rPr sz="1600" b="0">
+                <a:solidFill>
+                  <a:srgbClr val="222222"/>
+                </a:solidFill>
+                <a:latin typeface="맑은 고딕"/>
+              </a:rPr>
+              <a:t>•  Q2. NOMOUNT 인스턴스 접속 시 ORA-12528이면? → 정적 등록 확인</a:t>
+            </a:r>
+          </a:p>
+          <a:p>
+            <a:pPr algn="l">
+              <a:spcAft>
+                <a:spcPts val="1000"/>
+              </a:spcAft>
+            </a:pPr>
+            <a:r>
+              <a:rPr sz="1600" b="0">
+                <a:solidFill>
+                  <a:srgbClr val="222222"/>
+                </a:solidFill>
+                <a:latin typeface="맑은 고딕"/>
+              </a:rPr>
+              <a:t>•  Q3. SET 없이 FAL_SERVER='boston'은? → 그대로 남아 자기 자신을 가리킴</a:t>
+            </a:r>
+          </a:p>
+        </p:txBody>
+      </p:sp>
+    </p:spTree>
+  </p:cSld>
+  <p:clrMapOvr>
+    <a:masterClrMapping/>
+  </p:clrMapOvr>
+</p:sld>
+</file>
+
+<file path=ppt/slides/slide51.xml><?xml version="1.0" encoding="utf-8"?>
+<p:sld xmlns:a="http://schemas.openxmlformats.org/drawingml/2006/main" xmlns:p="http://schemas.openxmlformats.org/presentationml/2006/main" xmlns:r="http://schemas.openxmlformats.org/officeDocument/2006/relationships">
+  <p:cSld>
+    <p:spTree>
+      <p:nvGrpSpPr>
+        <p:cNvPr id="1" name=""/>
+        <p:cNvGrpSpPr/>
+        <p:nvPr/>
+      </p:nvGrpSpPr>
+      <p:grpSpPr/>
+      <p:sp>
+        <p:nvSpPr>
+          <p:cNvPr id="2" name="Rectangle 1"/>
+          <p:cNvSpPr/>
+          <p:nvPr/>
+        </p:nvSpPr>
+        <p:spPr>
+          <a:xfrm>
+            <a:off x="0" y="0"/>
+            <a:ext cx="12191695" cy="1005840"/>
+          </a:xfrm>
+          <a:prstGeom prst="rect">
+            <a:avLst/>
+          </a:prstGeom>
+          <a:solidFill>
+            <a:srgbClr val="C0392B"/>
+          </a:solidFill>
+          <a:ln>
+            <a:noFill/>
+          </a:ln>
+          <a:effectLst/>
+        </p:spPr>
+        <p:style>
+          <a:lnRef idx="1">
+            <a:schemeClr val="accent1"/>
+          </a:lnRef>
+          <a:fillRef idx="3">
+            <a:schemeClr val="accent1"/>
+          </a:fillRef>
+          <a:effectRef idx="2">
+            <a:schemeClr val="accent1"/>
+          </a:effectRef>
+          <a:fontRef idx="minor">
+            <a:schemeClr val="lt1"/>
+          </a:fontRef>
+        </p:style>
+        <p:txBody>
+          <a:bodyPr rtlCol="0" anchor="ctr"/>
+          <a:lstStyle/>
+          <a:p>
+            <a:pPr algn="ctr"/>
+          </a:p>
+        </p:txBody>
+      </p:sp>
+      <p:sp>
+        <p:nvSpPr>
+          <p:cNvPr id="3" name="TextBox 2"/>
+          <p:cNvSpPr txBox="1"/>
+          <p:nvPr/>
+        </p:nvSpPr>
+        <p:spPr>
+          <a:xfrm>
+            <a:off x="548640" y="91440"/>
+            <a:ext cx="10972800" cy="777240"/>
+          </a:xfrm>
+          <a:prstGeom prst="rect">
+            <a:avLst/>
+          </a:prstGeom>
+          <a:noFill/>
+        </p:spPr>
+        <p:txBody>
+          <a:bodyPr wrap="square">
+            <a:spAutoFit/>
+          </a:bodyPr>
+          <a:lstStyle/>
+          <a:p>
+            <a:pPr algn="l">
+              <a:spcAft>
+                <a:spcPts val="600"/>
+              </a:spcAft>
+            </a:pPr>
+            <a:r>
+              <a:rPr sz="2600" b="1">
+                <a:solidFill>
+                  <a:srgbClr val="FFFFFF"/>
+                </a:solidFill>
+                <a:latin typeface="맑은 고딕"/>
+              </a:rPr>
+              <a:t>퀴즈 (2/2)</a:t>
+            </a:r>
+          </a:p>
+        </p:txBody>
+      </p:sp>
+      <p:sp>
+        <p:nvSpPr>
+          <p:cNvPr id="4" name="TextBox 3"/>
+          <p:cNvSpPr txBox="1"/>
+          <p:nvPr/>
+        </p:nvSpPr>
+        <p:spPr>
+          <a:xfrm>
+            <a:off x="640080" y="1371600"/>
+            <a:ext cx="10881360" cy="5120640"/>
+          </a:xfrm>
+          <a:prstGeom prst="rect">
+            <a:avLst/>
+          </a:prstGeom>
+          <a:noFill/>
+        </p:spPr>
+        <p:txBody>
+          <a:bodyPr wrap="square">
+            <a:spAutoFit/>
+          </a:bodyPr>
+          <a:lstStyle/>
+          <a:p>
+            <a:pPr algn="l">
+              <a:spcAft>
+                <a:spcPts val="1000"/>
+              </a:spcAft>
+            </a:pPr>
+            <a:r>
+              <a:rPr sz="1600" b="0">
+                <a:solidFill>
+                  <a:srgbClr val="222222"/>
+                </a:solidFill>
+                <a:latin typeface="맑은 고딕"/>
+              </a:rPr>
+              <a:t>•  Q4. Chicago 경로에 'chicago' 규칙이면? → 미적용, RMAN-05001</a:t>
+            </a:r>
+          </a:p>
+          <a:p>
+            <a:pPr algn="l">
+              <a:spcAft>
+                <a:spcPts val="1000"/>
+              </a:spcAft>
+            </a:pPr>
+            <a:r>
+              <a:rPr sz="1600" b="0">
+                <a:solidFill>
+                  <a:srgbClr val="222222"/>
+                </a:solidFill>
+                <a:latin typeface="맑은 고딕"/>
+              </a:rPr>
+              <a:t>•  Q5. ORA-17628과 ORA-19505는 어디부터? → Standby alert 로그와 디렉터리</a:t>
+            </a:r>
+          </a:p>
+          <a:p>
+            <a:pPr algn="l">
+              <a:spcAft>
+                <a:spcPts val="1000"/>
+              </a:spcAft>
+            </a:pPr>
+            <a:r>
+              <a:rPr sz="1600" b="0">
+                <a:solidFill>
+                  <a:srgbClr val="222222"/>
+                </a:solidFill>
+                <a:latin typeface="맑은 고딕"/>
+              </a:rPr>
+              <a:t>•  Q6. 생성 후 CREATE SPFILE에 ORA-32002면? → 이미 SPFILE 사용 중, 조치 불필요</a:t>
+            </a:r>
+          </a:p>
+        </p:txBody>
+      </p:sp>
+    </p:spTree>
+  </p:cSld>
+  <p:clrMapOvr>
+    <a:masterClrMapping/>
+  </p:clrMapOvr>
+</p:sld>
+</file>
+
+<file path=ppt/slides/slide52.xml><?xml version="1.0" encoding="utf-8"?>
+<p:sld xmlns:a="http://schemas.openxmlformats.org/drawingml/2006/main" xmlns:p="http://schemas.openxmlformats.org/presentationml/2006/main" xmlns:r="http://schemas.openxmlformats.org/officeDocument/2006/relationships">
+  <p:cSld>
+    <p:spTree>
+      <p:nvGrpSpPr>
+        <p:cNvPr id="1" name=""/>
+        <p:cNvGrpSpPr/>
+        <p:nvPr/>
+      </p:nvGrpSpPr>
+      <p:grpSpPr/>
+      <p:sp>
+        <p:nvSpPr>
+          <p:cNvPr id="2" name="Rectangle 1"/>
+          <p:cNvSpPr/>
+          <p:nvPr/>
+        </p:nvSpPr>
+        <p:spPr>
+          <a:xfrm>
+            <a:off x="0" y="0"/>
+            <a:ext cx="12191695" cy="1005840"/>
+          </a:xfrm>
+          <a:prstGeom prst="rect">
+            <a:avLst/>
+          </a:prstGeom>
+          <a:solidFill>
+            <a:srgbClr val="C0392B"/>
+          </a:solidFill>
+          <a:ln>
+            <a:noFill/>
+          </a:ln>
+          <a:effectLst/>
+        </p:spPr>
+        <p:style>
+          <a:lnRef idx="1">
+            <a:schemeClr val="accent1"/>
+          </a:lnRef>
+          <a:fillRef idx="3">
+            <a:schemeClr val="accent1"/>
+          </a:fillRef>
+          <a:effectRef idx="2">
+            <a:schemeClr val="accent1"/>
+          </a:effectRef>
+          <a:fontRef idx="minor">
+            <a:schemeClr val="lt1"/>
+          </a:fontRef>
+        </p:style>
+        <p:txBody>
+          <a:bodyPr rtlCol="0" anchor="ctr"/>
+          <a:lstStyle/>
+          <a:p>
+            <a:pPr algn="ctr"/>
+          </a:p>
+        </p:txBody>
+      </p:sp>
+      <p:sp>
+        <p:nvSpPr>
+          <p:cNvPr id="3" name="TextBox 2"/>
+          <p:cNvSpPr txBox="1"/>
+          <p:nvPr/>
+        </p:nvSpPr>
+        <p:spPr>
+          <a:xfrm>
+            <a:off x="548640" y="91440"/>
+            <a:ext cx="10972800" cy="777240"/>
+          </a:xfrm>
+          <a:prstGeom prst="rect">
+            <a:avLst/>
+          </a:prstGeom>
+          <a:noFill/>
+        </p:spPr>
+        <p:txBody>
+          <a:bodyPr wrap="square">
+            <a:spAutoFit/>
+          </a:bodyPr>
+          <a:lstStyle/>
+          <a:p>
+            <a:pPr algn="l">
+              <a:spcAft>
+                <a:spcPts val="600"/>
+              </a:spcAft>
+            </a:pPr>
+            <a:r>
+              <a:rPr sz="2600" b="1">
+                <a:solidFill>
+                  <a:srgbClr val="FFFFFF"/>
+                </a:solidFill>
+                <a:latin typeface="맑은 고딕"/>
+              </a:rPr>
+              <a:t>실습 개요</a:t>
+            </a:r>
+          </a:p>
+        </p:txBody>
+      </p:sp>
+      <p:sp>
+        <p:nvSpPr>
+          <p:cNvPr id="4" name="TextBox 3"/>
+          <p:cNvSpPr txBox="1"/>
+          <p:nvPr/>
+        </p:nvSpPr>
+        <p:spPr>
+          <a:xfrm>
+            <a:off x="640080" y="1371600"/>
+            <a:ext cx="10881360" cy="5120640"/>
+          </a:xfrm>
+          <a:prstGeom prst="rect">
+            <a:avLst/>
+          </a:prstGeom>
+          <a:noFill/>
+        </p:spPr>
+        <p:txBody>
+          <a:bodyPr wrap="square">
+            <a:spAutoFit/>
+          </a:bodyPr>
+          <a:lstStyle/>
+          <a:p>
+            <a:pPr algn="l">
+              <a:spcAft>
+                <a:spcPts val="1000"/>
+              </a:spcAft>
+            </a:pPr>
+            <a:r>
+              <a:rPr sz="1600" b="0">
+                <a:solidFill>
+                  <a:srgbClr val="222222"/>
+                </a:solidFill>
+                <a:latin typeface="맑은 고딕"/>
+              </a:rPr>
+              <a:t>•  01 Primary 파라미터 확인 / 02 Standby 초기 pfile (5.4, 5.5)</a:t>
+            </a:r>
+          </a:p>
+          <a:p>
+            <a:pPr algn="l">
+              <a:spcAft>
+                <a:spcPts val="1000"/>
+              </a:spcAft>
+            </a:pPr>
+            <a:r>
+              <a:rPr sz="1600" b="0">
+                <a:solidFill>
+                  <a:srgbClr val="222222"/>
+                </a:solidFill>
+                <a:latin typeface="맑은 고딕"/>
+              </a:rPr>
+              <a:t>•  03 NOMOUNT 기동과 접속 확인 (5.5)</a:t>
+            </a:r>
+          </a:p>
+          <a:p>
+            <a:pPr algn="l">
+              <a:spcAft>
+                <a:spcPts val="1000"/>
+              </a:spcAft>
+            </a:pPr>
+            <a:r>
+              <a:rPr sz="1600" b="0">
+                <a:solidFill>
+                  <a:srgbClr val="222222"/>
+                </a:solidFill>
+                <a:latin typeface="맑은 고딕"/>
+              </a:rPr>
+              <a:t>•  04 DUPLICATE 실행과 로그 읽기 (5.6, 5.8)</a:t>
+            </a:r>
+          </a:p>
+          <a:p>
+            <a:pPr algn="l">
+              <a:spcAft>
+                <a:spcPts val="1000"/>
+              </a:spcAft>
+            </a:pPr>
+            <a:r>
+              <a:rPr sz="1600" b="0">
+                <a:solidFill>
+                  <a:srgbClr val="222222"/>
+                </a:solidFill>
+                <a:latin typeface="맑은 고딕"/>
+              </a:rPr>
+              <a:t>•  05 실패 재현과 진단: RMAN-05001, ORA-19505 (5.9)</a:t>
+            </a:r>
+          </a:p>
+          <a:p>
+            <a:pPr algn="l">
+              <a:spcAft>
+                <a:spcPts val="1000"/>
+              </a:spcAft>
+            </a:pPr>
+            <a:r>
+              <a:rPr sz="1600" b="0">
+                <a:solidFill>
+                  <a:srgbClr val="222222"/>
+                </a:solidFill>
+                <a:latin typeface="맑은 고딕"/>
+              </a:rPr>
+              <a:t>•  06 결과 검증과 ADG 전환 (5.10)</a:t>
+            </a:r>
+          </a:p>
+          <a:p>
+            <a:pPr algn="l">
+              <a:spcAft>
+                <a:spcPts val="1000"/>
+              </a:spcAft>
+            </a:pPr>
+            <a:r>
+              <a:rPr sz="1600" b="0">
+                <a:solidFill>
+                  <a:srgbClr val="222222"/>
+                </a:solidFill>
+                <a:latin typeface="맑은 고딕"/>
+              </a:rPr>
+              <a:t>•  07 DBMS_DBCOMP 블록 비교 (5.10)</a:t>
             </a:r>
           </a:p>
         </p:txBody>
@@ -15491,7 +17074,7 @@
                 </a:solidFill>
                 <a:latin typeface="맑은 고딕"/>
               </a:rPr>
-              <a:t>FROM ACTIVE DATABASE</a:t>
+              <a:t>BR 과정의 DUPLICATE와 무엇이 다른가</a:t>
             </a:r>
           </a:p>
         </p:txBody>
@@ -15530,7 +17113,7 @@
                 </a:solidFill>
                 <a:latin typeface="맑은 고딕"/>
               </a:rPr>
-              <a:t>백업 없이 만든다</a:t>
+              <a:t>같은 명령의 변형, 다른 목적</a:t>
             </a:r>
           </a:p>
         </p:txBody>
@@ -15569,7 +17152,7 @@
                 </a:solidFill>
                 <a:latin typeface="맑은 고딕"/>
               </a:rPr>
-              <a:t>•  백업셋이 아니라 운영 중인 Primary에서 직접 읽는다</a:t>
+              <a:t>•  일반 DUPLICATE: 새 DBID, RESETLOGS로 OPEN</a:t>
             </a:r>
           </a:p>
           <a:p>
@@ -15585,7 +17168,7 @@
                 </a:solidFill>
                 <a:latin typeface="맑은 고딕"/>
               </a:rPr>
-              <a:t>•  사전 백업이 필요 없다 — 준비 시간이 사라진다</a:t>
+              <a:t>•  FOR STANDBY: 같은 DBID, MOUNT 상태로 멈춤</a:t>
             </a:r>
           </a:p>
           <a:p>
@@ -15601,7 +17184,7 @@
                 </a:solidFill>
                 <a:latin typeface="맑은 고딕"/>
               </a:rPr>
-              <a:t>•  Primary는 읽기만 한다 — 실패해도 운영에 영향이 없다</a:t>
+              <a:t>•  일반 복제는 원본과 관계가 끊김</a:t>
             </a:r>
           </a:p>
           <a:p>
@@ -15617,7 +17200,7 @@
                 </a:solidFill>
                 <a:latin typeface="맑은 고딕"/>
               </a:rPr>
-              <a:t>•  실습에서 두 번 실패하는 동안 chicago는 계속 READ WRITE였다</a:t>
+              <a:t>•  Standby는 복제 이후 리두로 계속 연결</a:t>
             </a:r>
           </a:p>
         </p:txBody>
@@ -15649,7 +17232,7 @@
         <p:spPr>
           <a:xfrm>
             <a:off x="0" y="0"/>
-            <a:ext cx="12191695" cy="6858000"/>
+            <a:ext cx="12191695" cy="1005840"/>
           </a:xfrm>
           <a:prstGeom prst="rect">
             <a:avLst/>
@@ -15692,8 +17275,8 @@
         </p:nvSpPr>
         <p:spPr>
           <a:xfrm>
-            <a:off x="822960" y="2011680"/>
-            <a:ext cx="10515600" cy="1097280"/>
+            <a:off x="548640" y="91440"/>
+            <a:ext cx="10972800" cy="777240"/>
           </a:xfrm>
           <a:prstGeom prst="rect">
             <a:avLst/>
@@ -15712,13 +17295,13 @@
               </a:spcAft>
             </a:pPr>
             <a:r>
-              <a:rPr sz="4000" b="1">
+              <a:rPr sz="2600" b="1">
                 <a:solidFill>
                   <a:srgbClr val="FFFFFF"/>
                 </a:solidFill>
                 <a:latin typeface="맑은 고딕"/>
               </a:rPr>
-              <a:t>5.3</a:t>
+              <a:t>만들어야 하는 재료</a:t>
             </a:r>
           </a:p>
         </p:txBody>
@@ -15731,8 +17314,8 @@
         </p:nvSpPr>
         <p:spPr>
           <a:xfrm>
-            <a:off x="822960" y="3017520"/>
-            <a:ext cx="10515600" cy="914400"/>
+            <a:off x="640080" y="1078992"/>
+            <a:ext cx="10881360" cy="457200"/>
           </a:xfrm>
           <a:prstGeom prst="rect">
             <a:avLst/>
@@ -15751,71 +17334,27 @@
               </a:spcAft>
             </a:pPr>
             <a:r>
-              <a:rPr sz="2800" b="1">
-                <a:solidFill>
-                  <a:srgbClr val="FFFFFF"/>
-                </a:solidFill>
-                <a:latin typeface="맑은 고딕"/>
-              </a:rPr>
-              <a:t>Primary 쪽 준비 확인</a:t>
-            </a:r>
-          </a:p>
-        </p:txBody>
-      </p:sp>
-      <p:sp>
-        <p:nvSpPr>
-          <p:cNvPr id="5" name="Rectangle 4"/>
-          <p:cNvSpPr/>
-          <p:nvPr/>
-        </p:nvSpPr>
-        <p:spPr>
-          <a:xfrm>
-            <a:off x="822960" y="4114800"/>
-            <a:ext cx="5486400" cy="54864"/>
-          </a:xfrm>
-          <a:prstGeom prst="rect">
-            <a:avLst/>
-          </a:prstGeom>
-          <a:solidFill>
-            <a:srgbClr val="FFFFFF"/>
-          </a:solidFill>
-          <a:ln>
-            <a:noFill/>
-          </a:ln>
-          <a:effectLst/>
-        </p:spPr>
-        <p:style>
-          <a:lnRef idx="1">
-            <a:schemeClr val="accent1"/>
-          </a:lnRef>
-          <a:fillRef idx="3">
-            <a:schemeClr val="accent1"/>
-          </a:fillRef>
-          <a:effectRef idx="2">
-            <a:schemeClr val="accent1"/>
-          </a:effectRef>
-          <a:fontRef idx="minor">
-            <a:schemeClr val="lt1"/>
-          </a:fontRef>
-        </p:style>
-        <p:txBody>
-          <a:bodyPr rtlCol="0" anchor="ctr"/>
-          <a:lstStyle/>
-          <a:p>
-            <a:pPr algn="ctr"/>
-          </a:p>
-        </p:txBody>
-      </p:sp>
-      <p:sp>
-        <p:nvSpPr>
-          <p:cNvPr id="6" name="TextBox 5"/>
+              <a:rPr sz="1500" b="0">
+                <a:solidFill>
+                  <a:srgbClr val="5A6672"/>
+                </a:solidFill>
+                <a:latin typeface="맑은 고딕"/>
+              </a:rPr>
+              <a:t>방법이 달라도 결과물은 같다</a:t>
+            </a:r>
+          </a:p>
+        </p:txBody>
+      </p:sp>
+      <p:sp>
+        <p:nvSpPr>
+          <p:cNvPr id="5" name="TextBox 4"/>
           <p:cNvSpPr txBox="1"/>
           <p:nvPr/>
         </p:nvSpPr>
         <p:spPr>
           <a:xfrm>
-            <a:off x="822960" y="4297680"/>
-            <a:ext cx="10058400" cy="2011680"/>
+            <a:off x="640080" y="1737360"/>
+            <a:ext cx="10881360" cy="4754880"/>
           </a:xfrm>
           <a:prstGeom prst="rect">
             <a:avLst/>
@@ -15830,49 +17369,81 @@
           <a:p>
             <a:pPr algn="l">
               <a:spcAft>
-                <a:spcPts val="800"/>
-              </a:spcAft>
-            </a:pPr>
-            <a:r>
-              <a:rPr sz="1600" b="0">
-                <a:solidFill>
-                  <a:srgbClr val="FFFFFF"/>
-                </a:solidFill>
-                <a:latin typeface="맑은 고딕"/>
-              </a:rPr>
-              <a:t>•  2~4장에서 설정한 값 점검</a:t>
-            </a:r>
-          </a:p>
-          <a:p>
-            <a:pPr algn="l">
-              <a:spcAft>
-                <a:spcPts val="800"/>
-              </a:spcAft>
-            </a:pPr>
-            <a:r>
-              <a:rPr sz="1600" b="0">
-                <a:solidFill>
-                  <a:srgbClr val="FFFFFF"/>
-                </a:solidFill>
-                <a:latin typeface="맑은 고딕"/>
-              </a:rPr>
-              <a:t>•  기준값 기록의 중요성</a:t>
-            </a:r>
-          </a:p>
-          <a:p>
-            <a:pPr algn="l">
-              <a:spcAft>
-                <a:spcPts val="800"/>
-              </a:spcAft>
-            </a:pPr>
-            <a:r>
-              <a:rPr sz="1600" b="0">
-                <a:solidFill>
-                  <a:srgbClr val="FFFFFF"/>
-                </a:solidFill>
-                <a:latin typeface="맑은 고딕"/>
-              </a:rPr>
-              <a:t>•  파일 목록과 디렉터리 구조</a:t>
+                <a:spcPts val="1000"/>
+              </a:spcAft>
+            </a:pPr>
+            <a:r>
+              <a:rPr sz="1700" b="0">
+                <a:solidFill>
+                  <a:srgbClr val="222222"/>
+                </a:solidFill>
+                <a:latin typeface="맑은 고딕"/>
+              </a:rPr>
+              <a:t>•  데이터 파일 사본 (퍼지 상태, 리두로 맞춤)</a:t>
+            </a:r>
+          </a:p>
+          <a:p>
+            <a:pPr algn="l">
+              <a:spcAft>
+                <a:spcPts val="1000"/>
+              </a:spcAft>
+            </a:pPr>
+            <a:r>
+              <a:rPr sz="1700" b="0">
+                <a:solidFill>
+                  <a:srgbClr val="222222"/>
+                </a:solidFill>
+                <a:latin typeface="맑은 고딕"/>
+              </a:rPr>
+              <a:t>•  Standby 컨트롤 파일</a:t>
+            </a:r>
+          </a:p>
+          <a:p>
+            <a:pPr algn="l">
+              <a:spcAft>
+                <a:spcPts val="1000"/>
+              </a:spcAft>
+            </a:pPr>
+            <a:r>
+              <a:rPr sz="1700" b="0">
+                <a:solidFill>
+                  <a:srgbClr val="222222"/>
+                </a:solidFill>
+                <a:latin typeface="맑은 고딕"/>
+              </a:rPr>
+              <a:t>•  Standby용 SPFILE</a:t>
+            </a:r>
+          </a:p>
+          <a:p>
+            <a:pPr algn="l">
+              <a:spcAft>
+                <a:spcPts val="1000"/>
+              </a:spcAft>
+            </a:pPr>
+            <a:r>
+              <a:rPr sz="1700" b="0">
+                <a:solidFill>
+                  <a:srgbClr val="222222"/>
+                </a:solidFill>
+                <a:latin typeface="맑은 고딕"/>
+              </a:rPr>
+              <a:t>•  Primary와 같은 패스워드 파일</a:t>
+            </a:r>
+          </a:p>
+          <a:p>
+            <a:pPr algn="l">
+              <a:spcAft>
+                <a:spcPts val="1000"/>
+              </a:spcAft>
+            </a:pPr>
+            <a:r>
+              <a:rPr sz="1700" b="0">
+                <a:solidFill>
+                  <a:srgbClr val="222222"/>
+                </a:solidFill>
+                <a:latin typeface="맑은 고딕"/>
+              </a:rPr>
+              <a:t>•  Standby Redo Log</a:t>
             </a:r>
           </a:p>
         </p:txBody>
@@ -15904,7 +17475,7 @@
         <p:spPr>
           <a:xfrm>
             <a:off x="0" y="0"/>
-            <a:ext cx="12191695" cy="1005840"/>
+            <a:ext cx="12191695" cy="6858000"/>
           </a:xfrm>
           <a:prstGeom prst="rect">
             <a:avLst/>
@@ -15947,8 +17518,8 @@
         </p:nvSpPr>
         <p:spPr>
           <a:xfrm>
-            <a:off x="548640" y="91440"/>
-            <a:ext cx="10972800" cy="777240"/>
+            <a:off x="822960" y="2011680"/>
+            <a:ext cx="10515600" cy="1097280"/>
           </a:xfrm>
           <a:prstGeom prst="rect">
             <a:avLst/>
@@ -15967,13 +17538,13 @@
               </a:spcAft>
             </a:pPr>
             <a:r>
-              <a:rPr sz="2600" b="1">
+              <a:rPr sz="4000" b="1">
                 <a:solidFill>
                   <a:srgbClr val="FFFFFF"/>
                 </a:solidFill>
                 <a:latin typeface="맑은 고딕"/>
               </a:rPr>
-              <a:t>기준값을 먼저 기록한다</a:t>
+              <a:t>5.3</a:t>
             </a:r>
           </a:p>
         </p:txBody>
@@ -15986,8 +17557,8 @@
         </p:nvSpPr>
         <p:spPr>
           <a:xfrm>
-            <a:off x="640080" y="1078992"/>
-            <a:ext cx="10881360" cy="457200"/>
+            <a:off x="822960" y="3017520"/>
+            <a:ext cx="10515600" cy="914400"/>
           </a:xfrm>
           <a:prstGeom prst="rect">
             <a:avLst/>
@@ -16006,27 +17577,71 @@
               </a:spcAft>
             </a:pPr>
             <a:r>
-              <a:rPr sz="1500" b="0">
-                <a:solidFill>
-                  <a:srgbClr val="5A6672"/>
-                </a:solidFill>
-                <a:latin typeface="맑은 고딕"/>
-              </a:rPr>
-              <a:t>검증은 대조다</a:t>
-            </a:r>
-          </a:p>
-        </p:txBody>
-      </p:sp>
-      <p:sp>
-        <p:nvSpPr>
-          <p:cNvPr id="5" name="TextBox 4"/>
+              <a:rPr sz="2800" b="1">
+                <a:solidFill>
+                  <a:srgbClr val="FFFFFF"/>
+                </a:solidFill>
+                <a:latin typeface="맑은 고딕"/>
+              </a:rPr>
+              <a:t>Standby를 만드는 방법들</a:t>
+            </a:r>
+          </a:p>
+        </p:txBody>
+      </p:sp>
+      <p:sp>
+        <p:nvSpPr>
+          <p:cNvPr id="5" name="Rectangle 4"/>
+          <p:cNvSpPr/>
+          <p:nvPr/>
+        </p:nvSpPr>
+        <p:spPr>
+          <a:xfrm>
+            <a:off x="822960" y="4114800"/>
+            <a:ext cx="5486400" cy="54864"/>
+          </a:xfrm>
+          <a:prstGeom prst="rect">
+            <a:avLst/>
+          </a:prstGeom>
+          <a:solidFill>
+            <a:srgbClr val="FFFFFF"/>
+          </a:solidFill>
+          <a:ln>
+            <a:noFill/>
+          </a:ln>
+          <a:effectLst/>
+        </p:spPr>
+        <p:style>
+          <a:lnRef idx="1">
+            <a:schemeClr val="accent1"/>
+          </a:lnRef>
+          <a:fillRef idx="3">
+            <a:schemeClr val="accent1"/>
+          </a:fillRef>
+          <a:effectRef idx="2">
+            <a:schemeClr val="accent1"/>
+          </a:effectRef>
+          <a:fontRef idx="minor">
+            <a:schemeClr val="lt1"/>
+          </a:fontRef>
+        </p:style>
+        <p:txBody>
+          <a:bodyPr rtlCol="0" anchor="ctr"/>
+          <a:lstStyle/>
+          <a:p>
+            <a:pPr algn="ctr"/>
+          </a:p>
+        </p:txBody>
+      </p:sp>
+      <p:sp>
+        <p:nvSpPr>
+          <p:cNvPr id="6" name="TextBox 5"/>
           <p:cNvSpPr txBox="1"/>
           <p:nvPr/>
         </p:nvSpPr>
         <p:spPr>
           <a:xfrm>
-            <a:off x="640080" y="1737360"/>
-            <a:ext cx="10881360" cy="4754880"/>
+            <a:off x="822960" y="4297680"/>
+            <a:ext cx="10058400" cy="2011680"/>
           </a:xfrm>
           <a:prstGeom prst="rect">
             <a:avLst/>
@@ -16041,65 +17656,65 @@
           <a:p>
             <a:pPr algn="l">
               <a:spcAft>
-                <a:spcPts val="1000"/>
-              </a:spcAft>
-            </a:pPr>
-            <a:r>
-              <a:rPr sz="1700" b="0">
-                <a:solidFill>
-                  <a:srgbClr val="222222"/>
-                </a:solidFill>
-                <a:latin typeface="맑은 고딕"/>
-              </a:rPr>
-              <a:t>•  DBID · DB_NAME · DB_UNIQUE_NAME · ROLE · CONTROLFILE_TYPE</a:t>
-            </a:r>
-          </a:p>
-          <a:p>
-            <a:pPr algn="l">
-              <a:spcAft>
-                <a:spcPts val="1000"/>
-              </a:spcAft>
-            </a:pPr>
-            <a:r>
-              <a:rPr sz="1700" b="0">
-                <a:solidFill>
-                  <a:srgbClr val="222222"/>
-                </a:solidFill>
-                <a:latin typeface="맑은 고딕"/>
-              </a:rPr>
-              <a:t>•  데이터 파일 11개, 번호 1,3,4,5,6,7,8,9,10,11,12</a:t>
-            </a:r>
-          </a:p>
-          <a:p>
-            <a:pPr algn="l">
-              <a:spcAft>
-                <a:spcPts val="1000"/>
-              </a:spcAft>
-            </a:pPr>
-            <a:r>
-              <a:rPr sz="1700" b="0">
-                <a:solidFill>
-                  <a:srgbClr val="222222"/>
-                </a:solidFill>
-                <a:latin typeface="맑은 고딕"/>
-              </a:rPr>
-              <a:t>•  온라인 리두 3그룹 · SRL 4그룹 · PDB 두 개</a:t>
-            </a:r>
-          </a:p>
-          <a:p>
-            <a:pPr algn="l">
-              <a:spcAft>
-                <a:spcPts val="1000"/>
-              </a:spcAft>
-            </a:pPr>
-            <a:r>
-              <a:rPr sz="1700" b="0">
-                <a:solidFill>
-                  <a:srgbClr val="222222"/>
-                </a:solidFill>
-                <a:latin typeface="맑은 고딕"/>
-              </a:rPr>
-              <a:t>•  복제 후 이 목록과 하나씩 맞춰 본다</a:t>
+                <a:spcPts val="800"/>
+              </a:spcAft>
+            </a:pPr>
+            <a:r>
+              <a:rPr sz="1600" b="0">
+                <a:solidFill>
+                  <a:srgbClr val="FFFFFF"/>
+                </a:solidFill>
+                <a:latin typeface="맑은 고딕"/>
+              </a:rPr>
+              <a:t>•  Active DUPLICATE와 백업 기반 DUPLICATE</a:t>
+            </a:r>
+          </a:p>
+          <a:p>
+            <a:pPr algn="l">
+              <a:spcAft>
+                <a:spcPts val="800"/>
+              </a:spcAft>
+            </a:pPr>
+            <a:r>
+              <a:rPr sz="1600" b="0">
+                <a:solidFill>
+                  <a:srgbClr val="FFFFFF"/>
+                </a:solidFill>
+                <a:latin typeface="맑은 고딕"/>
+              </a:rPr>
+              <a:t>•  수동 복원 방식</a:t>
+            </a:r>
+          </a:p>
+          <a:p>
+            <a:pPr algn="l">
+              <a:spcAft>
+                <a:spcPts val="800"/>
+              </a:spcAft>
+            </a:pPr>
+            <a:r>
+              <a:rPr sz="1600" b="0">
+                <a:solidFill>
+                  <a:srgbClr val="FFFFFF"/>
+                </a:solidFill>
+                <a:latin typeface="맑은 고딕"/>
+              </a:rPr>
+              <a:t>•  DBCA, Enterprise Manager</a:t>
+            </a:r>
+          </a:p>
+          <a:p>
+            <a:pPr algn="l">
+              <a:spcAft>
+                <a:spcPts val="800"/>
+              </a:spcAft>
+            </a:pPr>
+            <a:r>
+              <a:rPr sz="1600" b="0">
+                <a:solidFill>
+                  <a:srgbClr val="FFFFFF"/>
+                </a:solidFill>
+                <a:latin typeface="맑은 고딕"/>
+              </a:rPr>
+              <a:t>•  선택 기준</a:t>
             </a:r>
           </a:p>
         </p:txBody>
@@ -16200,7 +17815,7 @@
                 </a:solidFill>
                 <a:latin typeface="맑은 고딕"/>
               </a:rPr>
-              <a:t>하위 디렉터리에 주목한다</a:t>
+              <a:t>RMAN DUPLICATE FROM ACTIVE DATABASE</a:t>
             </a:r>
           </a:p>
         </p:txBody>
@@ -16239,7 +17854,7 @@
                 </a:solidFill>
                 <a:latin typeface="맑은 고딕"/>
               </a:rPr>
-              <a:t>나중에 문제가 된다</a:t>
+              <a:t>이 과정의 기준 방법</a:t>
             </a:r>
           </a:p>
         </p:txBody>
@@ -16278,7 +17893,7 @@
                 </a:solidFill>
                 <a:latin typeface="맑은 고딕"/>
               </a:rPr>
-              <a:t>•  Primary 데이터 파일은 세 층으로 나뉜다</a:t>
+              <a:t>•  운영 중인 Primary 파일을 네트워크로 직접 복사</a:t>
             </a:r>
           </a:p>
           <a:p>
@@ -16294,7 +17909,7 @@
                 </a:solidFill>
                 <a:latin typeface="맑은 고딕"/>
               </a:rPr>
-              <a:t>•  루트 : 1, 3, 4, 7 — `/Chicago/` 바로 아래</a:t>
+              <a:t>•  미리 받아 둔 백업이 필요 없음</a:t>
             </a:r>
           </a:p>
           <a:p>
@@ -16310,7 +17925,7 @@
                 </a:solidFill>
                 <a:latin typeface="맑은 고딕"/>
               </a:rPr>
-              <a:t>•  시드 PDB : 5, 6, 8 — `/Chicago/pdbseed/`</a:t>
+              <a:t>•  target과 auxiliary에 동시 접속</a:t>
             </a:r>
           </a:p>
           <a:p>
@@ -16326,7 +17941,7 @@
                 </a:solidFill>
                 <a:latin typeface="맑은 고딕"/>
               </a:rPr>
-              <a:t>•  사용자 PDB : 9, 10, 11, 12 — `/Chicago/chicago_pdb1/`</a:t>
+              <a:t>•  복사 동안 Primary I/O와 네트워크 사용</a:t>
             </a:r>
           </a:p>
         </p:txBody>
